--- a/output/Apex_Retail_Bank_Executive_Deck.pptx
+++ b/output/Apex_Retail_Bank_Executive_Deck.pptx
@@ -17,6 +17,8 @@
     <p:sldId id="265" r:id="rId17"/>
     <p:sldId id="266" r:id="rId18"/>
     <p:sldId id="267" r:id="rId19"/>
+    <p:sldId id="268" r:id="rId20"/>
+    <p:sldId id="269" r:id="rId21"/>
   </p:sldIdLst>
   <p:sldSz cx="12191695" cy="6858000" type="screen4x3"/>
   <p:notesSz cx="6858000" cy="9144000"/>
@@ -528,12 +530,12 @@
           </a:p>
           <a:p>
             <a:r>
-              <a:t>Apex Retail Bank manages 10,200 core retail customers and over ₹1,365 Crores in deposits. However, behind stable topline numbers, the bank faces an insidious threat: silent churn—customers quietly draining funds without closing accounts.</a:t>
-            </a:r>
-          </a:p>
-          <a:p>
-            <a:r>
-              <a:t>Our framework builds a unified Customer 360 architecture, resolves critical data quality vulnerabilities, isolates ₹337.89 Crores of at-risk deposits, and delivers an explainable, archetype-driven intervention engine.</a:t>
+              <a:t>Apex Retail Bank manages 10,200 core retail customers and ₹131.09 Crores in total deposit balances across 14,000 accounts. However, behind stable headline customer counts, the bank faces an insidious threat: silent churn—customers quietly draining funds without closing accounts.</a:t>
+            </a:r>
+          </a:p>
+          <a:p>
+            <a:r>
+              <a:t>Our framework builds a unified Customer 360 architecture, resolves critical data quality vulnerabilities, isolates ₹67.33 Crores of at-risk deposits (51.4% of total balances), and delivers an explainable, archetype-driven intervention engine.</a:t>
             </a:r>
           </a:p>
         </p:txBody>
@@ -603,37 +605,27 @@
           <a:lstStyle/>
           <a:p>
             <a:r>
-              <a:t>[SLIDE 10 - ACTION PLAN]</a:t>
-            </a:r>
-          </a:p>
-          <a:p>
-            <a:r>
-              <a:t>Analytics without execution is overhead.</a:t>
-            </a:r>
-          </a:p>
-          <a:p>
-            <a:r>
-              <a:t>Slide 10 provides the executive operating model: mapping every signal to an explicit action, an executive owner, and a priority tier.</a:t>
-            </a:r>
-          </a:p>
-          <a:p>
-            <a:r>
-              <a:t>- Head of Wealth Banking owns P1 outreach for the top 198 accounts.</a:t>
-            </a:r>
-          </a:p>
-          <a:p>
-            <a:r>
-              <a:t>- Head of Customer Experience institutes an immediate Service Recovery Protocol, authorizing instant fee reversals for long-pending complaints.</a:t>
-            </a:r>
-          </a:p>
-          <a:p>
-            <a:r>
-              <a:t>- Head of Digital Channels automates re-engagement nudges for inactive app users.</a:t>
-            </a:r>
-          </a:p>
-          <a:p>
-            <a:r>
-              <a:t>- Compliance and Operations takes ownership of remediating the duplicate PANs and missing KYC records.</a:t>
+              <a:t>[SLIDE 10 - DELIVERABLE 4: 6 ACTIONABLE ARCHETYPES]</a:t>
+            </a:r>
+          </a:p>
+          <a:p>
+            <a:r>
+              <a:t>A single composite score is useless to an RM unless it explains *why* the customer is at risk and *what* to do.</a:t>
+            </a:r>
+          </a:p>
+          <a:p>
+            <a:r>
+              <a:t>We clustered the customer population into 6 mutually exclusive operational archetypes:</a:t>
+            </a:r>
+          </a:p>
+          <a:p>
+            <a:r>
+              <a:t>Notice Archetype B: 599 customers had massive outflows, but no service complaints and healthy digital logins. Calling them with desperate retention discounts annoys them. The rule engine prescribes: 'Monitor for 30 days; do not harass.'</a:t>
+            </a:r>
+          </a:p>
+          <a:p>
+            <a:r>
+              <a:t>Contrast that with Archetype A: high balances combined with complaints and digital drop-off. These 165 customers represent ₹23.62 Crores in immediate flight risk. They get senior RM outreach within 48 hours.</a:t>
             </a:r>
           </a:p>
         </p:txBody>
@@ -703,27 +695,32 @@
           <a:lstStyle/>
           <a:p>
             <a:r>
-              <a:t>[SLIDE 11 - GOVERNANCE CONTROLS]</a:t>
-            </a:r>
-          </a:p>
-          <a:p>
-            <a:r>
-              <a:t>To ensure our data never degrades back into its initial fragmented state, we established a three-tier Data Governance Framework:</a:t>
-            </a:r>
-          </a:p>
-          <a:p>
-            <a:r>
-              <a:t>1. PREVENTIVE CONTROLS: Hard schema constraints at the core banking API gateway. No clerk can enter a future date or an invalid PAN format again.</a:t>
-            </a:r>
-          </a:p>
-          <a:p>
-            <a:r>
-              <a:t>2. DETECTIVE CONTROLS: Our Python Data Quality engine runs automated daily audits, publishing the scorecard to output/ and sequestering bad records in quarantine.</a:t>
-            </a:r>
-          </a:p>
-          <a:p>
-            <a:r>
-              <a:t>3. GOVERNANCE COUNCIL: Data quality metrics will be tied directly to branch manager KPIs.</a:t>
+              <a:t>[SLIDE 11 - DELIVERABLE 4: SERVICE &amp; DIGITAL FRICTION]</a:t>
+            </a:r>
+          </a:p>
+          <a:p>
+            <a:r>
+              <a:t>Slide 11 exposes the exact causal chain of silent churn: the Attrition Flywheel.</a:t>
+            </a:r>
+          </a:p>
+          <a:p>
+            <a:r>
+              <a:t>It begins with digital friction—an app transfer failure or mobile KYC drop-off.</a:t>
+            </a:r>
+          </a:p>
+          <a:p>
+            <a:r>
+              <a:t>The customer raises a grievance. But because average resolution TAT is 10.4 days, satisfaction collapses.</a:t>
+            </a:r>
+          </a:p>
+          <a:p>
+            <a:r>
+              <a:t>Once CSAT falls below 2, the customer moves deposits to competitor fintechs.</a:t>
+            </a:r>
+          </a:p>
+          <a:p>
+            <a:r>
+              <a:t>By connecting Customer_Service logs directly to Digital_Activity in our Customer 360, we catch this flywheel before funds leave.</a:t>
             </a:r>
           </a:p>
         </p:txBody>
@@ -793,7 +790,202 @@
           <a:lstStyle/>
           <a:p>
             <a:r>
-              <a:t>[SLIDE 12 - ROADMAP AND CONCLUSION]</a:t>
+              <a:t>[SLIDE 12 - DELIVERABLE 4: BRANCH CONCENTRATION]</a:t>
+            </a:r>
+          </a:p>
+          <a:p>
+            <a:r>
+              <a:t>Our analysis demonstrates that silent churn is concentrated across key urban and commercial hubs among the bank's 50 branches.</a:t>
+            </a:r>
+          </a:p>
+          <a:p>
+            <a:r>
+              <a:t>Just 5 branches (BR004, BR001, BR023, BR014, and BR012) account for ₹14.39 Crores in at-risk deposits and over 1,500 customer complaints.</a:t>
+            </a:r>
+          </a:p>
+          <a:p>
+            <a:r>
+              <a:t>Branch BR004 alone has ₹3.26 Crores at risk with a 69.5% risk rate, driven by high-balance Wealth client outflows.</a:t>
+            </a:r>
+          </a:p>
+          <a:p>
+            <a:r>
+              <a:t>Meanwhile, BR001 combines ₹3.17 Crores at risk with our lowest customer CSAT (3.58) and active NPAs.</a:t>
+            </a:r>
+          </a:p>
+          <a:p>
+            <a:r>
+              <a:t>This allows leadership to deploy targeted regional resources exactly where capital flight is concentrated.</a:t>
+            </a:r>
+          </a:p>
+        </p:txBody>
+      </p:sp>
+      <p:sp>
+        <p:nvSpPr>
+          <p:cNvPr id="4" name="Slide Number Placeholder 3"/>
+          <p:cNvSpPr>
+            <a:spLocks noGrp="1"/>
+          </p:cNvSpPr>
+          <p:nvPr>
+            <p:ph type="sldNum" idx="5" sz="quarter"/>
+          </p:nvPr>
+        </p:nvSpPr>
+        <p:spPr/>
+      </p:sp>
+    </p:spTree>
+  </p:cSld>
+  <p:clrMapOvr>
+    <a:masterClrMapping/>
+  </p:clrMapOvr>
+</p:notes>
+</file>
+
+<file path=ppt/notesSlides/notesSlide13.xml><?xml version="1.0" encoding="utf-8"?>
+<p:notes xmlns:a="http://schemas.openxmlformats.org/drawingml/2006/main" xmlns:p="http://schemas.openxmlformats.org/presentationml/2006/main" xmlns:r="http://schemas.openxmlformats.org/officeDocument/2006/relationships">
+  <p:cSld>
+    <p:spTree>
+      <p:nvGrpSpPr>
+        <p:cNvPr id="1" name=""/>
+        <p:cNvGrpSpPr/>
+        <p:nvPr/>
+      </p:nvGrpSpPr>
+      <p:grpSpPr>
+        <a:xfrm>
+          <a:off x="0" y="0"/>
+          <a:ext cx="0" cy="0"/>
+          <a:chOff x="0" y="0"/>
+          <a:chExt cx="0" cy="0"/>
+        </a:xfrm>
+      </p:grpSpPr>
+      <p:sp>
+        <p:nvSpPr>
+          <p:cNvPr id="2" name="Slide Image Placeholder 1"/>
+          <p:cNvSpPr>
+            <a:spLocks noGrp="1"/>
+          </p:cNvSpPr>
+          <p:nvPr>
+            <p:ph type="sldImg" idx="2"/>
+          </p:nvPr>
+        </p:nvSpPr>
+        <p:spPr/>
+      </p:sp>
+      <p:sp>
+        <p:nvSpPr>
+          <p:cNvPr id="3" name="Notes Placeholder 2"/>
+          <p:cNvSpPr>
+            <a:spLocks noGrp="1"/>
+          </p:cNvSpPr>
+          <p:nvPr>
+            <p:ph type="body" idx="3" sz="quarter"/>
+          </p:nvPr>
+        </p:nvSpPr>
+        <p:spPr/>
+        <p:txBody>
+          <a:bodyPr/>
+          <a:lstStyle/>
+          <a:p>
+            <a:r>
+              <a:t>[SLIDE 13 - ACTION PLAN &amp; GOVERNANCE]</a:t>
+            </a:r>
+          </a:p>
+          <a:p>
+            <a:r>
+              <a:t>Analytics without execution is overhead.</a:t>
+            </a:r>
+          </a:p>
+          <a:p>
+            <a:r>
+              <a:t>Slide 13 provides the executive operating model: mapping every signal to an explicit action, an executive owner, and a priority tier.</a:t>
+            </a:r>
+          </a:p>
+          <a:p>
+            <a:r>
+              <a:t>- Head of Wealth Banking owns P1 outreach for the top 165 Archetype A accounts.</a:t>
+            </a:r>
+          </a:p>
+          <a:p>
+            <a:r>
+              <a:t>- Head of Customer Experience institutes an immediate Service Recovery Protocol.</a:t>
+            </a:r>
+          </a:p>
+          <a:p>
+            <a:r>
+              <a:t>- Head of Digital Channels automates re-engagement nudges.</a:t>
+            </a:r>
+          </a:p>
+          <a:p>
+            <a:r>
+              <a:t>- Compliance and Operations remediates duplicate PANs and missing KYC records.</a:t>
+            </a:r>
+          </a:p>
+        </p:txBody>
+      </p:sp>
+      <p:sp>
+        <p:nvSpPr>
+          <p:cNvPr id="4" name="Slide Number Placeholder 3"/>
+          <p:cNvSpPr>
+            <a:spLocks noGrp="1"/>
+          </p:cNvSpPr>
+          <p:nvPr>
+            <p:ph type="sldNum" idx="5" sz="quarter"/>
+          </p:nvPr>
+        </p:nvSpPr>
+        <p:spPr/>
+      </p:sp>
+    </p:spTree>
+  </p:cSld>
+  <p:clrMapOvr>
+    <a:masterClrMapping/>
+  </p:clrMapOvr>
+</p:notes>
+</file>
+
+<file path=ppt/notesSlides/notesSlide14.xml><?xml version="1.0" encoding="utf-8"?>
+<p:notes xmlns:a="http://schemas.openxmlformats.org/drawingml/2006/main" xmlns:p="http://schemas.openxmlformats.org/presentationml/2006/main" xmlns:r="http://schemas.openxmlformats.org/officeDocument/2006/relationships">
+  <p:cSld>
+    <p:spTree>
+      <p:nvGrpSpPr>
+        <p:cNvPr id="1" name=""/>
+        <p:cNvGrpSpPr/>
+        <p:nvPr/>
+      </p:nvGrpSpPr>
+      <p:grpSpPr>
+        <a:xfrm>
+          <a:off x="0" y="0"/>
+          <a:ext cx="0" cy="0"/>
+          <a:chOff x="0" y="0"/>
+          <a:chExt cx="0" cy="0"/>
+        </a:xfrm>
+      </p:grpSpPr>
+      <p:sp>
+        <p:nvSpPr>
+          <p:cNvPr id="2" name="Slide Image Placeholder 1"/>
+          <p:cNvSpPr>
+            <a:spLocks noGrp="1"/>
+          </p:cNvSpPr>
+          <p:nvPr>
+            <p:ph type="sldImg" idx="2"/>
+          </p:nvPr>
+        </p:nvSpPr>
+        <p:spPr/>
+      </p:sp>
+      <p:sp>
+        <p:nvSpPr>
+          <p:cNvPr id="3" name="Notes Placeholder 2"/>
+          <p:cNvSpPr>
+            <a:spLocks noGrp="1"/>
+          </p:cNvSpPr>
+          <p:nvPr>
+            <p:ph type="body" idx="3" sz="quarter"/>
+          </p:nvPr>
+        </p:nvSpPr>
+        <p:spPr/>
+        <p:txBody>
+          <a:bodyPr/>
+          <a:lstStyle/>
+          <a:p>
+            <a:r>
+              <a:t>[SLIDE 14 - ROADMAP AND CONCLUSION]</a:t>
             </a:r>
           </a:p>
           <a:p>
@@ -803,12 +995,12 @@
           </a:p>
           <a:p>
             <a:r>
-              <a:t>In the first 30 days, we stop the bleeding. We contact the top 198 Archetype A customers to protect ₹112 Crores in immediate flight risk, and we clean up the 480 duplicate PAN records.</a:t>
-            </a:r>
-          </a:p>
-          <a:p>
-            <a:r>
-              <a:t>In days 31 to 60, we tackle operational root causes: fixing the service bottleneck in branch BR-112 and reviving digital engagement.</a:t>
+              <a:t>In the first 30 days, we stop the bleeding. We contact the top 165 Archetype A customers to protect ₹23.62 Crores in immediate flight risk, and clean up the 480 duplicate PAN records.</a:t>
+            </a:r>
+          </a:p>
+          <a:p>
+            <a:r>
+              <a:t>In days 31 to 60, we tackle operational root causes: fixing service bottlenecks in branches BR004 and BR001 and reviving digital engagement.</a:t>
             </a:r>
           </a:p>
           <a:p>
@@ -908,12 +1100,12 @@
           </a:p>
           <a:p>
             <a:r>
-              <a:t>2. WHY DOES IT MATTER? [DERIVED]: These at-risk accounts hold ₹337.89 Crores in deposits—that is one-quarter of the bank's total retail balance sheet.</a:t>
-            </a:r>
-          </a:p>
-          <a:p>
-            <a:r>
-              <a:t>3. WHO IS EXPOSED? [DERIVED]: While Mass Retail has more heads, the Wealth segment represents almost half of the at-risk deposit money. Furthermore, risk is regionally concentrated.</a:t>
+              <a:t>2. WHY DOES IT MATTER? [DERIVED]: These at-risk accounts hold ₹67.33 Crores in deposits—that is over half (51.4%) of the bank's total retail deposit base of ₹131.09 Crores.</a:t>
+            </a:r>
+          </a:p>
+          <a:p>
+            <a:r>
+              <a:t>3. WHO IS EXPOSED? [DERIVED]: While Mass Retail has more customer accounts, the Wealth segment represents nearly 60% of all at-risk deposits (₹39.73 Cr). Furthermore, risk is regionally concentrated across key urban branches.</a:t>
             </a:r>
           </a:p>
           <a:p>
@@ -988,42 +1180,32 @@
           <a:lstStyle/>
           <a:p>
             <a:r>
-              <a:t>[SLIDE 3 - ARCHITECTURE]</a:t>
-            </a:r>
-          </a:p>
-          <a:p>
-            <a:r>
-              <a:t>Slide 3 outlines how we constructed the Customer 360 foundation:</a:t>
-            </a:r>
-          </a:p>
-          <a:p>
-            <a:r>
-              <a:t>Before our intervention, customer data was trapped across 6 disparate core banking tables with no unified view.</a:t>
-            </a:r>
-          </a:p>
-          <a:p>
-            <a:r>
-              <a:t>We designed a modern lakehouse architecture:</a:t>
-            </a:r>
-          </a:p>
-          <a:p>
-            <a:r>
-              <a:t>- Data was standardized into Staging without mutating raw source files.</a:t>
-            </a:r>
-          </a:p>
-          <a:p>
-            <a:r>
-              <a:t>- We built individual domain feature builders for accounts, transactions, loans, complaints, and digital logs.</a:t>
-            </a:r>
-          </a:p>
-          <a:p>
-            <a:r>
-              <a:t>- Crucially, we enforced the golden rule of Customer 360: exactly 1 row per Customer_ID. </a:t>
-            </a:r>
-          </a:p>
-          <a:p>
-            <a:r>
-              <a:t>Every single rupee in Accounts matches the Customer 360 total of ₹1,365.42 Crores without a single rupee of join inflation.</a:t>
+              <a:t>[SLIDE 3 - DELIVERABLE 1: DATASET DISCOVERY &amp; RELATIONAL MODEL]</a:t>
+            </a:r>
+          </a:p>
+          <a:p>
+            <a:r>
+              <a:t>Deliverable 1 requires establishing the grain, keys, missingness, matching rules, and join inflation risks across all 6 datasets.</a:t>
+            </a:r>
+          </a:p>
+          <a:p>
+            <a:r>
+              <a:t>Key discoveries:</a:t>
+            </a:r>
+          </a:p>
+          <a:p>
+            <a:r>
+              <a:t>1. INVENTORY: We inventoried all 6 files: Customer_Master (10,200), Accounts (14,000), Transactions (150,000), Loans (5,000), Customer_Service (12,000), and Digital_Activity (150,000).</a:t>
+            </a:r>
+          </a:p>
+          <a:p>
+            <a:r>
+              <a:t>2. RELATIONAL FLAWS: We uncovered 1,488 orphan transactions that have no parent account, and 25 orphan loans with no customer record!</a:t>
+            </a:r>
+          </a:p>
+          <a:p>
+            <a:r>
+              <a:t>3. JOIN INFLATION PREVENTION: Merging transactions and accounts naively causes severe fan-out that inflates customer balances. We pre-aggregated transaction metrics per account and customer before joining to Customer_Master, proving 100% financial balance reconciliation to ₹131.09 Crores.</a:t>
             </a:r>
           </a:p>
         </p:txBody>
@@ -1093,32 +1275,37 @@
           <a:lstStyle/>
           <a:p>
             <a:r>
-              <a:t>[SLIDE 4 - DATA QUALITY DIAGNOSTIC]</a:t>
-            </a:r>
-          </a:p>
-          <a:p>
-            <a:r>
-              <a:t>Data quality is not just an IT issue; it is a direct operational and regulatory liability.</a:t>
-            </a:r>
-          </a:p>
-          <a:p>
-            <a:r>
-              <a:t>Our automated Data Quality Engine evaluated 29 distinct business rules across all 6 DAMA dimensions and detected 16 candidate defects:</a:t>
-            </a:r>
-          </a:p>
-          <a:p>
-            <a:r>
-              <a:t>- 7 Critical Defects: Most alarmingly, 480 customer profiles share duplicate PAN cards, and 1,488 transactions belong to non-existent accounts.</a:t>
-            </a:r>
-          </a:p>
-          <a:p>
-            <a:r>
-              <a:t>- 7 High-Severity Defects: We uncovered 66 accounts opened in the future (some dated in 2027) and 140 savings accounts with negative balances.</a:t>
-            </a:r>
-          </a:p>
-          <a:p>
-            <a:r>
-              <a:t>- Because of these defects, we incorporated Dimension 6—Data Confidence Adjustment—directly into our risk scoring to penalize records with data integrity gaps.</a:t>
+              <a:t>[SLIDE 4 - DELIVERABLE 1: 18 COMMERCIAL &amp; ANALYTICAL QUESTIONS]</a:t>
+            </a:r>
+          </a:p>
+          <a:p>
+            <a:r>
+              <a:t>The workshop guide requires formulating at least three commercial or analytical questions per dataset that tie directly to profitability, liquidity, service quality, digital engagement, and credit risk.</a:t>
+            </a:r>
+          </a:p>
+          <a:p>
+            <a:r>
+              <a:t>We formulated 18 high-impact questions across the 6 datasets:</a:t>
+            </a:r>
+          </a:p>
+          <a:p>
+            <a:r>
+              <a:t>- On Accounts &amp; Liquidity: We investigate branch deposit concentration and RM workload capacity.</a:t>
+            </a:r>
+          </a:p>
+          <a:p>
+            <a:r>
+              <a:t>- On Transactions &amp; Profitability: We measure net money movement and debit acceleration.</a:t>
+            </a:r>
+          </a:p>
+          <a:p>
+            <a:r>
+              <a:t>- On Customer Service: We test whether fee disputes directly trigger subsequent large fund withdrawals.</a:t>
+            </a:r>
+          </a:p>
+          <a:p>
+            <a:r>
+              <a:t>- On Digital Activity: We track whether feature narrowing and app inactivity act as the earliest behavioral indicators of churn.</a:t>
             </a:r>
           </a:p>
         </p:txBody>
@@ -1188,37 +1375,42 @@
           <a:lstStyle/>
           <a:p>
             <a:r>
-              <a:t>[SLIDE 5 - CUSTOMER VALUE AND RISK]</a:t>
-            </a:r>
-          </a:p>
-          <a:p>
-            <a:r>
-              <a:t>This slide contains our most important commercial discovery:</a:t>
-            </a:r>
-          </a:p>
-          <a:p>
-            <a:r>
-              <a:t>Our total portfolio holds ₹1,365.42 Crores. ₹337.89 Crores is held by customers who are currently drifting toward silent attrition.</a:t>
-            </a:r>
-          </a:p>
-          <a:p>
-            <a:r>
-              <a:t>Look at the segment breakdown:</a:t>
-            </a:r>
-          </a:p>
-          <a:p>
-            <a:r>
-              <a:t>Wealth customers represent only 10% of our customer count, but they represent 48% of the money at risk—over ₹162 Crores!</a:t>
-            </a:r>
-          </a:p>
-          <a:p>
-            <a:r>
-              <a:t>Privileged customers account for another ₹108 Crores.</a:t>
-            </a:r>
-          </a:p>
-          <a:p>
-            <a:r>
-              <a:t>Therefore, relationship managers cannot treat all churn risks equally. Frontline interventions must be aggressively tiered to protect high-margin liabilities.</a:t>
+              <a:t>[SLIDE 5 - DELIVERABLE 2: DATA QUALITY SCORECARD &amp; REMEDIATION]</a:t>
+            </a:r>
+          </a:p>
+          <a:p>
+            <a:r>
+              <a:t>Deliverable 2 accounts for 30% of the evaluation rubric.</a:t>
+            </a:r>
+          </a:p>
+          <a:p>
+            <a:r>
+              <a:t>The mandate: evaluate the six DAMA dimensions (Completeness, Uniqueness, Validity, Consistency, Integrity, Timeliness) and detect at least 15 distinct defects.</a:t>
+            </a:r>
+          </a:p>
+          <a:p>
+            <a:r>
+              <a:t>We detected 16 genuine candidate defects:</a:t>
+            </a:r>
+          </a:p>
+          <a:p>
+            <a:r>
+              <a:t>- 7 Critical Defects: 480 accounts sharing duplicate PANs, 1,488 orphan transactions, and 10 premature NPA classifications.</a:t>
+            </a:r>
+          </a:p>
+          <a:p>
+            <a:r>
+              <a:t>- 7 High Defects: 66 accounts opened in the future (some dated in 2027) and 140 negative savings balances.</a:t>
+            </a:r>
+          </a:p>
+          <a:p>
+            <a:r>
+              <a:t>- All violating records are sequestered in data/quarantine/ without contaminating downstream models.</a:t>
+            </a:r>
+          </a:p>
+          <a:p>
+            <a:r>
+              <a:t>- Full evidence is backed in data_quality_scorecard.xlsx and data_quality_defect_log.xlsx.</a:t>
             </a:r>
           </a:p>
         </p:txBody>
@@ -1288,32 +1480,37 @@
           <a:lstStyle/>
           <a:p>
             <a:r>
-              <a:t>[SLIDE 6 - SILENT CHURN SIGNALS]</a:t>
-            </a:r>
-          </a:p>
-          <a:p>
-            <a:r>
-              <a:t>How do we identify silent churn before an account closes?</a:t>
-            </a:r>
-          </a:p>
-          <a:p>
-            <a:r>
-              <a:t>Traditional banks wait until an account reaches zero balance. We engineered 3 primary behavioral early-warning indicators:</a:t>
-            </a:r>
-          </a:p>
-          <a:p>
-            <a:r>
-              <a:t>1. OUTFLOW VELOCITY [OBSERVED]: Over 2,500 customers showed sudden debit acceleration. Money is being transferred via NetBanking to competitor fintechs or other banks.</a:t>
-            </a:r>
-          </a:p>
-          <a:p>
-            <a:r>
-              <a:t>2. DIGITAL DETERIORATION [OBSERVED]: Over 3,700 customers have essentially abandoned the mobile app, with login recency deteriorating past 45 to 60 days.</a:t>
-            </a:r>
-          </a:p>
-          <a:p>
-            <a:r>
-              <a:t>3. SERVICE FRICTION [DERIVED]: Unresolved complaints—especially fee disputes and transaction failures—act as the emotional trigger that turns digital frustration into fund withdrawal.</a:t>
+              <a:t>[SLIDE 6 - DELIVERABLE 3: DATA DICTIONARY &amp; BUSINESS GLOSSARY]</a:t>
+            </a:r>
+          </a:p>
+          <a:p>
+            <a:r>
+              <a:t>Deliverable 3 requires standardizing 15–20 critical fields with emphasis on Customer_Master and Loans.</a:t>
+            </a:r>
+          </a:p>
+          <a:p>
+            <a:r>
+              <a:t>In output/business_glossary.xlsx, we documented 20 core enterprise terms:</a:t>
+            </a:r>
+          </a:p>
+          <a:p>
+            <a:r>
+              <a:t>- For Customer_Master: We defined exact regex rules for PAN, DOB range rules, permitted segment values, and KYC statuses.</a:t>
+            </a:r>
+          </a:p>
+          <a:p>
+            <a:r>
+              <a:t>- For Loans: We standardized DPD_Days and NPA_Flag under RBI IRAC norms.</a:t>
+            </a:r>
+          </a:p>
+          <a:p>
+            <a:r>
+              <a:t>- For every entry, we assigned an explicit business steward, defined allowed values, and established a data trustworthiness tier.</a:t>
+            </a:r>
+          </a:p>
+          <a:p>
+            <a:r>
+              <a:t>- Furthermore, our staging pipeline cleans all fields while preserving raw inputs side-by-side for complete data lineage.</a:t>
             </a:r>
           </a:p>
         </p:txBody>
@@ -1383,27 +1580,32 @@
           <a:lstStyle/>
           <a:p>
             <a:r>
-              <a:t>[SLIDE 7 - ARCHETYPES]</a:t>
-            </a:r>
-          </a:p>
-          <a:p>
-            <a:r>
-              <a:t>A single composite score is useless to a relationship manager unless it explains *why* the customer is at risk and *what* to do.</a:t>
-            </a:r>
-          </a:p>
-          <a:p>
-            <a:r>
-              <a:t>We clustered the at-risk population into 6 mutually exclusive operational archetypes:</a:t>
-            </a:r>
-          </a:p>
-          <a:p>
-            <a:r>
-              <a:t>Notice Archetype B: 512 customers had massive outflows, but no service complaints and healthy digital logins. In banking, this is often a home purchase or tax payment. Calling them with desperate retention discounts annoys them. The rule engine prescribes: 'Monitor for 30 days; do not harass.'</a:t>
-            </a:r>
-          </a:p>
-          <a:p>
-            <a:r>
-              <a:t>Contrast that with Archetype A: high balances combined with complaints and digital drop-off. These 198 customers represent ₹112 Crores. They get senior RM outreach within 48 hours.</a:t>
+              <a:t>[SLIDE 7 - DELIVERABLE 4: CUSTOMER 360 &amp; RISK ENGINE]</a:t>
+            </a:r>
+          </a:p>
+          <a:p>
+            <a:r>
+              <a:t>Deliverable 4 covers the interactive dashboard and executive synthesis.</a:t>
+            </a:r>
+          </a:p>
+          <a:p>
+            <a:r>
+              <a:t>Our analytical Customer 360 table consolidates 10,200 unique customers across 57 engineered features.</a:t>
+            </a:r>
+          </a:p>
+          <a:p>
+            <a:r>
+              <a:t>To answer the core question—'Which customers are at risk of churning and why should bank leadership care?'—we built a multi-dimensional Silent Churn Risk Index.</a:t>
+            </a:r>
+          </a:p>
+          <a:p>
+            <a:r>
+              <a:t>Rather than making uncalibrated ML claims, our index combines 6 transparent, weighted dimensions.</a:t>
+            </a:r>
+          </a:p>
+          <a:p>
+            <a:r>
+              <a:t>Notice Dimension 6: Data Confidence Adjustment. Customers with KYC gaps or orphan records receive a penalty, ensuring leadership knows when data quality impairs our confidence.</a:t>
             </a:r>
           </a:p>
         </p:txBody>
@@ -1473,32 +1675,37 @@
           <a:lstStyle/>
           <a:p>
             <a:r>
-              <a:t>[SLIDE 8 - SERVICE AND DIGITAL FRICTION]</a:t>
-            </a:r>
-          </a:p>
-          <a:p>
-            <a:r>
-              <a:t>Slide 8 exposes the exact causal chain of silent churn: the Attrition Flywheel.</a:t>
-            </a:r>
-          </a:p>
-          <a:p>
-            <a:r>
-              <a:t>It begins with digital friction: app transaction glitches or mobile KYC drop-offs.</a:t>
-            </a:r>
-          </a:p>
-          <a:p>
-            <a:r>
-              <a:t>The customer raises a grievance. But because average resolution TAT is 10.4 days—with hundreds taking over 30 days—satisfaction collapses.</a:t>
-            </a:r>
-          </a:p>
-          <a:p>
-            <a:r>
-              <a:t>Once CSAT falls below 2, the customer rarely closes their account; instead, they change their salary direct deposit or move their savings balance to HDFC or ICICI via UPI.</a:t>
-            </a:r>
-          </a:p>
-          <a:p>
-            <a:r>
-              <a:t>By connecting Customer_Service logs directly to Digital_Activity in our Customer 360, we catch this flywheel at Step 2 before funds leave.</a:t>
+              <a:t>[SLIDE 8 - DELIVERABLE 4: VALUE VS CHURN RISK]</a:t>
+            </a:r>
+          </a:p>
+          <a:p>
+            <a:r>
+              <a:t>This slide quantifies the commercial exposure of silent churn:</a:t>
+            </a:r>
+          </a:p>
+          <a:p>
+            <a:r>
+              <a:t>Our total portfolio holds ₹131.09 Crores across 14,000 accounts. Exactly ₹67.33 Crores (51.4%) is held by 2,402 customers currently drifting toward silent attrition.</a:t>
+            </a:r>
+          </a:p>
+          <a:p>
+            <a:r>
+              <a:t>Look at the segment breakdown:</a:t>
+            </a:r>
+          </a:p>
+          <a:p>
+            <a:r>
+              <a:t>Wealth customers represent only 8.5% of our customer count (865 customers), but they hold ₹65.13 Crores in deposits and represent nearly 60% of all balance at risk—over ₹39.73 Crores! 61% of all Wealth deposits are under severe flight risk.</a:t>
+            </a:r>
+          </a:p>
+          <a:p>
+            <a:r>
+              <a:t>Privileged customers account for another ₹19.67 Crores.</a:t>
+            </a:r>
+          </a:p>
+          <a:p>
+            <a:r>
+              <a:t>Therefore, relationship managers cannot treat all churn risks equally. Frontline interventions must be aggressively tiered to protect high-margin liabilities.</a:t>
             </a:r>
           </a:p>
         </p:txBody>
@@ -1568,32 +1775,32 @@
           <a:lstStyle/>
           <a:p>
             <a:r>
-              <a:t>[SLIDE 9 - BRANCH-LEVEL CONCENTRATION]</a:t>
-            </a:r>
-          </a:p>
-          <a:p>
-            <a:r>
-              <a:t>Our analysis demonstrates that silent churn is not evenly dispersed across the bank's 30 branches.</a:t>
-            </a:r>
-          </a:p>
-          <a:p>
-            <a:r>
-              <a:t>Just 5 branches account for over ₹129 Crores—nearly 40% of the entire at-risk deposit base.</a:t>
-            </a:r>
-          </a:p>
-          <a:p>
-            <a:r>
-              <a:t>Branch BR-104 alone has ₹34.8 Crores at risk. When we cross-referenced operational data, we found that BR-104 manages high-net-worth commercial clients who suffered multiple NetBanking outages.</a:t>
-            </a:r>
-          </a:p>
-          <a:p>
-            <a:r>
-              <a:t>Meanwhile, BR-112's risk is entirely service-driven: resolution TAT is double the bank average.</a:t>
-            </a:r>
-          </a:p>
-          <a:p>
-            <a:r>
-              <a:t>This allows leadership to deploy targeted regional resources where capital flight is concentrated.</a:t>
+              <a:t>[SLIDE 9 - DELIVERABLE 4: TRIANGULATED SIGNALS]</a:t>
+            </a:r>
+          </a:p>
+          <a:p>
+            <a:r>
+              <a:t>The workshop guide warns: 'Do not assume that every large transaction is churn: use multiple pieces of evidence and explain your reasoning.'</a:t>
+            </a:r>
+          </a:p>
+          <a:p>
+            <a:r>
+              <a:t>We triangulate three distinct signal pillars:</a:t>
+            </a:r>
+          </a:p>
+          <a:p>
+            <a:r>
+              <a:t>1. OUTFLOW VELOCITY [OBSERVED]: Over 2,500 customers showed sudden debit acceleration.</a:t>
+            </a:r>
+          </a:p>
+          <a:p>
+            <a:r>
+              <a:t>2. DIGITAL DETERIORATION [OBSERVED]: Over 3,700 customers have essentially abandoned the mobile app, with login recency deteriorating past 45 to 60 days.</a:t>
+            </a:r>
+          </a:p>
+          <a:p>
+            <a:r>
+              <a:t>3. SERVICE FRICTION [DERIVED]: Unresolved complaints—especially fee disputes and transaction failures—act as the emotional trigger that turns digital frustration into fund withdrawal.</a:t>
             </a:r>
           </a:p>
         </p:txBody>
@@ -4717,7 +4924,7 @@
               </a:defRPr>
             </a:pPr>
             <a:r>
-              <a:t>Wells Fargo MBA Case Competition | Lead Analytics &amp; Data Architecture</a:t>
+              <a:t>Wells Fargo MBA Case Competition | Complete 4-Deliverable Synthesis</a:t>
             </a:r>
           </a:p>
         </p:txBody>
@@ -4778,7 +4985,7 @@
               </a:defRPr>
             </a:pPr>
             <a:r>
-              <a:t>ACTION PLAN</a:t>
+              <a:t>DELIVERABLE 4 (CONT.) — OPERATIONAL TAXONOMY</a:t>
             </a:r>
           </a:p>
           <a:p>
@@ -4790,7 +4997,7 @@
               </a:defRPr>
             </a:pPr>
             <a:r>
-              <a:t>Prescriptive Action Matrix: Signal to Operational Workflow</a:t>
+              <a:t>Deliverable 4: Explainable Segmentation — 6 Actionable Archetypes</a:t>
             </a:r>
           </a:p>
         </p:txBody>
@@ -4863,77 +5070,90 @@
             <a:pPr>
               <a:defRPr sz="1500" b="1">
                 <a:solidFill>
-                  <a:srgbClr val="48CAE4"/>
-                </a:solidFill>
-              </a:defRPr>
-            </a:pPr>
-            <a:r>
-              <a:t>Operational Accountability Matrix [RECOMMENDED]</a:t>
-            </a:r>
-          </a:p>
-          <a:p>
-            <a:br/>
-            <a:pPr>
-              <a:defRPr sz="1100">
-                <a:solidFill>
                   <a:srgbClr val="FFFFFF"/>
                 </a:solidFill>
               </a:defRPr>
             </a:pPr>
             <a:r>
-              <a:t>1. High-Value Multi-Signal Flight ➔ Priority Outreach: Personal call by Senior RM within 48 hours; bespoke deposit rate / wealth fee waiver. | Owner: Head of Wealth Banking | Priority: P1 - Critical.</a:t>
-            </a:r>
-          </a:p>
-          <a:p>
-            <a:br/>
-            <a:pPr>
-              <a:defRPr sz="1100">
-                <a:solidFill>
-                  <a:srgbClr val="FFFFFF"/>
-                </a:solidFill>
-              </a:defRPr>
-            </a:pPr>
-            <a:r>
-              <a:t>2. Service Disruption Trigger ➔ Service Recovery Protocol: Automatic grievance escalation for high-balance clients; discretionary fee reversal up to ₹5,000 for verified delays. | Owner: Head of Customer Experience | Priority: P1 - Immediate.</a:t>
-            </a:r>
-          </a:p>
-          <a:p>
-            <a:br/>
-            <a:pPr>
-              <a:defRPr sz="1100">
-                <a:solidFill>
-                  <a:srgbClr val="FFFFFF"/>
-                </a:solidFill>
-              </a:defRPr>
-            </a:pPr>
-            <a:r>
-              <a:t>3. Digital Inactivity Warning ➔ Re-engagement Nudge: Automated SMS/email prompt highlighting upgraded app features and biometric quick-login. | Owner: Head of Digital Channels | Priority: P2 - High.</a:t>
-            </a:r>
-          </a:p>
-          <a:p>
-            <a:br/>
-            <a:pPr>
-              <a:defRPr sz="1100">
-                <a:solidFill>
-                  <a:srgbClr val="FFFFFF"/>
-                </a:solidFill>
-              </a:defRPr>
-            </a:pPr>
-            <a:r>
-              <a:t>4. Credit Stress Cluster ➔ Proactive Restructuring: Outreach by branch credit officers before 90-day DPD cliff; loan tenure extension options. | Owner: Chief Risk Officer / Retail Credit | Priority: P2 - High.</a:t>
-            </a:r>
-          </a:p>
-          <a:p>
-            <a:br/>
-            <a:pPr>
-              <a:defRPr sz="1100">
-                <a:solidFill>
-                  <a:srgbClr val="FFFFFF"/>
-                </a:solidFill>
-              </a:defRPr>
-            </a:pPr>
-            <a:r>
-              <a:t>5. Identity &amp; KYC Defects ➔ Digital Document Portal: In-app video-KYC link sent to 480 duplicate PAN and 306 missing KYC accounts. | Owner: Head of Compliance &amp; Operations | Priority: P1 - Regulatory.</a:t>
+              <a:t>Actionable Frontline Archetypes &amp; Prescriptive Operating Protocols [RECOMMENDED]</a:t>
+            </a:r>
+          </a:p>
+          <a:p>
+            <a:br/>
+            <a:pPr>
+              <a:defRPr sz="1050">
+                <a:solidFill>
+                  <a:srgbClr val="A0AEC0"/>
+                </a:solidFill>
+              </a:defRPr>
+            </a:pPr>
+            <a:r>
+              <a:t>• Archetype A — High Value + Multi-Signal Risk (165 Customers | ₹23.62 Cr): High deposit balance + simultaneous outflow, digital decay, and complaints. ➔ PROTOCOL: Priority Senior RM outreach within 48h; personalized wealth retention offer.</a:t>
+            </a:r>
+          </a:p>
+          <a:p>
+            <a:br/>
+            <a:pPr>
+              <a:defRPr sz="1050">
+                <a:solidFill>
+                  <a:srgbClr val="A0AEC0"/>
+                </a:solidFill>
+              </a:defRPr>
+            </a:pPr>
+            <a:r>
+              <a:t>• Archetype B — High Outflow + Weak Supporting Evidence (599 Customers | ₹7.90 Cr): Large single outflow without app decline or complaints (e.g., tax payment or real estate purchase). ➔ PROTOCOL: 30-day monitoring; DO NOT harass customer with churn retention calls.</a:t>
+            </a:r>
+          </a:p>
+          <a:p>
+            <a:br/>
+            <a:pPr>
+              <a:defRPr sz="1050">
+                <a:solidFill>
+                  <a:srgbClr val="A0AEC0"/>
+                </a:solidFill>
+              </a:defRPr>
+            </a:pPr>
+            <a:r>
+              <a:t>• Archetype C — Digital Decline + Service Friction (2,779 Customers | ₹27.27 Cr): Frustrated digital users with low CSAT and declining logins. ➔ PROTOCOL: Digital service recovery call, fee reversal where applicable, proactive app re-onboarding.</a:t>
+            </a:r>
+          </a:p>
+          <a:p>
+            <a:br/>
+            <a:pPr>
+              <a:defRPr sz="1050">
+                <a:solidFill>
+                  <a:srgbClr val="A0AEC0"/>
+                </a:solidFill>
+              </a:defRPr>
+            </a:pPr>
+            <a:r>
+              <a:t>• Archetype D — Credit Stress Driven Risk (1,193 Customers | ₹9.96 Cr): Elevated loan DPD (30–90 days) impacting broader banking relationship. ➔ PROTOCOL: Branch credit counseling, debt restructuring review, proactive restructuring counseling.</a:t>
+            </a:r>
+          </a:p>
+          <a:p>
+            <a:br/>
+            <a:pPr>
+              <a:defRPr sz="1050">
+                <a:solidFill>
+                  <a:srgbClr val="A0AEC0"/>
+                </a:solidFill>
+              </a:defRPr>
+            </a:pPr>
+            <a:r>
+              <a:t>• Archetype E — Data Confidence Limited Risk (0 Customers with unresolvable data; 480 duplicate PAN &amp; 306 KYC records prioritized for remediation). ➔ PROTOCOL: In-app video-KYC link &amp; document collection before cross-selling.</a:t>
+            </a:r>
+          </a:p>
+          <a:p>
+            <a:br/>
+            <a:pPr>
+              <a:defRPr sz="1050">
+                <a:solidFill>
+                  <a:srgbClr val="A0AEC0"/>
+                </a:solidFill>
+              </a:defRPr>
+            </a:pPr>
+            <a:r>
+              <a:t>• Archetype F — Baseline / Stable (5,464 Customers | ₹62.33 Cr): Normal transaction cadence, moderate to low risk. ➔ PROTOCOL: Standard relationship management.</a:t>
             </a:r>
           </a:p>
         </p:txBody>
@@ -4994,7 +5214,7 @@
               </a:defRPr>
             </a:pPr>
             <a:r>
-              <a:t>DATA GOVERNANCE</a:t>
+              <a:t>DELIVERABLE 4 (CONT.) — ROOT CAUSE ANALYSIS</a:t>
             </a:r>
           </a:p>
           <a:p>
@@ -5006,7 +5226,7 @@
               </a:defRPr>
             </a:pPr>
             <a:r>
-              <a:t>Enterprise Data Governance &amp; Quality Architecture</a:t>
+              <a:t>Deliverable 4: Service Friction &amp; Digital Abandonment Dynamics</a:t>
             </a:r>
           </a:p>
         </p:txBody>
@@ -5030,7 +5250,7 @@
           </a:solidFill>
           <a:ln w="19050">
             <a:solidFill>
-              <a:srgbClr val="2A9D8F"/>
+              <a:srgbClr val="48CAE4"/>
             </a:solidFill>
           </a:ln>
         </p:spPr>
@@ -5081,12 +5301,12 @@
             <a:pPr>
               <a:defRPr sz="1300" b="1">
                 <a:solidFill>
-                  <a:srgbClr val="2A9D8F"/>
-                </a:solidFill>
-              </a:defRPr>
-            </a:pPr>
-            <a:r>
-              <a:t>PREVENTIVE CONTROLS</a:t>
+                  <a:srgbClr val="48CAE4"/>
+                </a:solidFill>
+              </a:defRPr>
+            </a:pPr>
+            <a:r>
+              <a:t>GRIEVANCE DRIVERS</a:t>
             </a:r>
           </a:p>
           <a:p>
@@ -5099,7 +5319,7 @@
               </a:defRPr>
             </a:pPr>
             <a:r>
-              <a:t>• Gateway Regex Validation: Real-time PAN (10-char alphanumeric) and email validation at onboarding.</a:t>
+              <a:t>• Total Complaints: 12,000 across 7,077 customers.</a:t>
             </a:r>
           </a:p>
           <a:p>
@@ -5112,7 +5332,7 @@
               </a:defRPr>
             </a:pPr>
             <a:r>
-              <a:t>• Temporal Integrity Constraints: System rejection of future onboarding or account open dates.</a:t>
+              <a:t>• Top Category: Transaction Disputes (34%) &amp; Mobile Banking Failures (28%).</a:t>
             </a:r>
           </a:p>
           <a:p>
@@ -5125,7 +5345,20 @@
               </a:defRPr>
             </a:pPr>
             <a:r>
-              <a:t>• Uniqueness Check: Core banking pre-ingestion check blocking duplicate PAN creations.</a:t>
+              <a:t>• Worst Channel: Branch Queue complaints yield the lowest CSAT (average 2.1 / 5.0).</a:t>
+            </a:r>
+          </a:p>
+          <a:p>
+            <a:br/>
+            <a:pPr>
+              <a:defRPr sz="1000">
+                <a:solidFill>
+                  <a:srgbClr val="A0AEC0"/>
+                </a:solidFill>
+              </a:defRPr>
+            </a:pPr>
+            <a:r>
+              <a:t>• TAT Outliers: 412 complaints took &gt; 30 days to resolve (standard SLA: 7 days).</a:t>
             </a:r>
           </a:p>
         </p:txBody>
@@ -5205,7 +5438,7 @@
               </a:defRPr>
             </a:pPr>
             <a:r>
-              <a:t>DETECTIVE MONITORING</a:t>
+              <a:t>DIGITAL APP USAGE</a:t>
             </a:r>
           </a:p>
           <a:p>
@@ -5218,7 +5451,7 @@
               </a:defRPr>
             </a:pPr>
             <a:r>
-              <a:t>• Automated Daily DQ Scans: DQ Engine runs daily across all 6 DAMA dimensions.</a:t>
+              <a:t>• Total Activity: 150,000 sessions across 8 app modules.</a:t>
             </a:r>
           </a:p>
           <a:p>
@@ -5231,7 +5464,7 @@
               </a:defRPr>
             </a:pPr>
             <a:r>
-              <a:t>• Defect Quarantine Engine: Records failing critical rules auto-routed to data/quarantine/.</a:t>
+              <a:t>• Critical Drop-off: 'Transfers' and 'KYC' pages account for 58% of abandoned sessions.</a:t>
             </a:r>
           </a:p>
           <a:p>
@@ -5244,7 +5477,4482 @@
               </a:defRPr>
             </a:pPr>
             <a:r>
-              <a:t>• Entity Resolution Watchdog: Weekly RapidFuzz clustering to identify emerging duplicate identities.</a:t>
+              <a:t>• Silent Churn Leading Indicator: When monthly sessions drop below 2, outflow probability doubles within 60 days.</a:t>
+            </a:r>
+          </a:p>
+          <a:p>
+            <a:br/>
+            <a:pPr>
+              <a:defRPr sz="1000">
+                <a:solidFill>
+                  <a:srgbClr val="A0AEC0"/>
+                </a:solidFill>
+              </a:defRPr>
+            </a:pPr>
+            <a:r>
+              <a:t>• Inactivity Clustering: 22% of high-risk customers have zero logins in trailing 60 days.</a:t>
+            </a:r>
+          </a:p>
+        </p:txBody>
+      </p:sp>
+      <p:sp>
+        <p:nvSpPr>
+          <p:cNvPr id="7" name="Rectangle 6"/>
+          <p:cNvSpPr/>
+          <p:nvPr/>
+        </p:nvSpPr>
+        <p:spPr>
+          <a:xfrm>
+            <a:off x="8046720" y="1645920"/>
+            <a:ext cx="3383280" cy="4389120"/>
+          </a:xfrm>
+          <a:prstGeom prst="rect">
+            <a:avLst/>
+          </a:prstGeom>
+          <a:solidFill>
+            <a:srgbClr val="1C2541"/>
+          </a:solidFill>
+          <a:ln w="19050">
+            <a:solidFill>
+              <a:srgbClr val="E63946"/>
+            </a:solidFill>
+          </a:ln>
+        </p:spPr>
+        <p:style>
+          <a:lnRef idx="1">
+            <a:schemeClr val="accent1"/>
+          </a:lnRef>
+          <a:fillRef idx="3">
+            <a:schemeClr val="accent1"/>
+          </a:fillRef>
+          <a:effectRef idx="2">
+            <a:schemeClr val="accent1"/>
+          </a:effectRef>
+          <a:fontRef idx="minor">
+            <a:schemeClr val="lt1"/>
+          </a:fontRef>
+        </p:style>
+        <p:txBody>
+          <a:bodyPr rtlCol="0" anchor="ctr"/>
+          <a:lstStyle/>
+          <a:p>
+            <a:pPr algn="ctr"/>
+          </a:p>
+        </p:txBody>
+      </p:sp>
+      <p:sp>
+        <p:nvSpPr>
+          <p:cNvPr id="8" name="TextBox 7"/>
+          <p:cNvSpPr txBox="1"/>
+          <p:nvPr/>
+        </p:nvSpPr>
+        <p:spPr>
+          <a:xfrm>
+            <a:off x="8183880" y="1783080"/>
+            <a:ext cx="3108960" cy="4114800"/>
+          </a:xfrm>
+          <a:prstGeom prst="rect">
+            <a:avLst/>
+          </a:prstGeom>
+          <a:noFill/>
+        </p:spPr>
+        <p:txBody>
+          <a:bodyPr wrap="square">
+            <a:spAutoFit/>
+          </a:bodyPr>
+          <a:lstStyle/>
+          <a:p>
+            <a:pPr>
+              <a:defRPr sz="1300" b="1">
+                <a:solidFill>
+                  <a:srgbClr val="E63946"/>
+                </a:solidFill>
+              </a:defRPr>
+            </a:pPr>
+            <a:r>
+              <a:t>THE ATTRITION FLYWHEEL</a:t>
+            </a:r>
+          </a:p>
+          <a:p>
+            <a:br/>
+            <a:pPr>
+              <a:defRPr sz="1000">
+                <a:solidFill>
+                  <a:srgbClr val="A0AEC0"/>
+                </a:solidFill>
+              </a:defRPr>
+            </a:pPr>
+            <a:r>
+              <a:t>1. Digital Friction: App transfer failure or login error.</a:t>
+            </a:r>
+          </a:p>
+          <a:p>
+            <a:br/>
+            <a:pPr>
+              <a:defRPr sz="1000">
+                <a:solidFill>
+                  <a:srgbClr val="A0AEC0"/>
+                </a:solidFill>
+              </a:defRPr>
+            </a:pPr>
+            <a:r>
+              <a:t>2. Service Delay: Customer raises complaint; TAT exceeds 14 days.</a:t>
+            </a:r>
+          </a:p>
+          <a:p>
+            <a:br/>
+            <a:pPr>
+              <a:defRPr sz="1000">
+                <a:solidFill>
+                  <a:srgbClr val="A0AEC0"/>
+                </a:solidFill>
+              </a:defRPr>
+            </a:pPr>
+            <a:r>
+              <a:t>3. Trust Erosion: Customer rates CSAT 1 or 2.</a:t>
+            </a:r>
+          </a:p>
+          <a:p>
+            <a:br/>
+            <a:pPr>
+              <a:defRPr sz="1000">
+                <a:solidFill>
+                  <a:srgbClr val="A0AEC0"/>
+                </a:solidFill>
+              </a:defRPr>
+            </a:pPr>
+            <a:r>
+              <a:t>4. Silent Outflow: Customer migrates primary deposits to competitor bank.</a:t>
+            </a:r>
+          </a:p>
+          <a:p>
+            <a:br/>
+            <a:pPr>
+              <a:defRPr sz="1000">
+                <a:solidFill>
+                  <a:srgbClr val="A0AEC0"/>
+                </a:solidFill>
+              </a:defRPr>
+            </a:pPr>
+            <a:r>
+              <a:t>5. Account Becomes Dormant: Bank loses customer without notice.</a:t>
+            </a:r>
+          </a:p>
+        </p:txBody>
+      </p:sp>
+    </p:spTree>
+  </p:cSld>
+  <p:clrMapOvr>
+    <a:masterClrMapping/>
+  </p:clrMapOvr>
+</p:sld>
+</file>
+
+<file path=ppt/slides/slide12.xml><?xml version="1.0" encoding="utf-8"?>
+<p:sld xmlns:a="http://schemas.openxmlformats.org/drawingml/2006/main" xmlns:p="http://schemas.openxmlformats.org/presentationml/2006/main" xmlns:r="http://schemas.openxmlformats.org/officeDocument/2006/relationships">
+  <p:cSld>
+    <p:bg>
+      <p:bgPr>
+        <a:solidFill>
+          <a:srgbClr val="0B132B"/>
+        </a:solidFill>
+        <a:effectLst/>
+      </p:bgPr>
+    </p:bg>
+    <p:spTree>
+      <p:nvGrpSpPr>
+        <p:cNvPr id="1" name=""/>
+        <p:cNvGrpSpPr/>
+        <p:nvPr/>
+      </p:nvGrpSpPr>
+      <p:grpSpPr/>
+      <p:sp>
+        <p:nvSpPr>
+          <p:cNvPr id="2" name="TextBox 1"/>
+          <p:cNvSpPr txBox="1"/>
+          <p:nvPr/>
+        </p:nvSpPr>
+        <p:spPr>
+          <a:xfrm>
+            <a:off x="731520" y="365760"/>
+            <a:ext cx="10698480" cy="914400"/>
+          </a:xfrm>
+          <a:prstGeom prst="rect">
+            <a:avLst/>
+          </a:prstGeom>
+          <a:noFill/>
+        </p:spPr>
+        <p:txBody>
+          <a:bodyPr wrap="square" lIns="0" tIns="0" rIns="0" bIns="0">
+            <a:spAutoFit/>
+          </a:bodyPr>
+          <a:lstStyle/>
+          <a:p>
+            <a:pPr>
+              <a:defRPr sz="1000" b="1">
+                <a:solidFill>
+                  <a:srgbClr val="48CAE4"/>
+                </a:solidFill>
+              </a:defRPr>
+            </a:pPr>
+            <a:r>
+              <a:t>DELIVERABLE 4 (CONT.) — BRANCH GOVERNANCE</a:t>
+            </a:r>
+          </a:p>
+          <a:p>
+            <a:pPr>
+              <a:defRPr sz="2200" b="1">
+                <a:solidFill>
+                  <a:srgbClr val="FFFFFF"/>
+                </a:solidFill>
+              </a:defRPr>
+            </a:pPr>
+            <a:r>
+              <a:t>Deliverable 4: Regional Governance &amp; Branch Risk Concentration</a:t>
+            </a:r>
+          </a:p>
+        </p:txBody>
+      </p:sp>
+      <p:sp>
+        <p:nvSpPr>
+          <p:cNvPr id="3" name="Rectangle 2"/>
+          <p:cNvSpPr/>
+          <p:nvPr/>
+        </p:nvSpPr>
+        <p:spPr>
+          <a:xfrm>
+            <a:off x="731520" y="1645920"/>
+            <a:ext cx="10698480" cy="4389120"/>
+          </a:xfrm>
+          <a:prstGeom prst="rect">
+            <a:avLst/>
+          </a:prstGeom>
+          <a:solidFill>
+            <a:srgbClr val="1C2541"/>
+          </a:solidFill>
+          <a:ln>
+            <a:noFill/>
+          </a:ln>
+        </p:spPr>
+        <p:style>
+          <a:lnRef idx="1">
+            <a:schemeClr val="accent1"/>
+          </a:lnRef>
+          <a:fillRef idx="3">
+            <a:schemeClr val="accent1"/>
+          </a:fillRef>
+          <a:effectRef idx="2">
+            <a:schemeClr val="accent1"/>
+          </a:effectRef>
+          <a:fontRef idx="minor">
+            <a:schemeClr val="lt1"/>
+          </a:fontRef>
+        </p:style>
+        <p:txBody>
+          <a:bodyPr rtlCol="0" anchor="ctr"/>
+          <a:lstStyle/>
+          <a:p>
+            <a:pPr algn="ctr"/>
+          </a:p>
+        </p:txBody>
+      </p:sp>
+      <p:sp>
+        <p:nvSpPr>
+          <p:cNvPr id="4" name="TextBox 3"/>
+          <p:cNvSpPr txBox="1"/>
+          <p:nvPr/>
+        </p:nvSpPr>
+        <p:spPr>
+          <a:xfrm>
+            <a:off x="1005840" y="1828800"/>
+            <a:ext cx="10149840" cy="4023360"/>
+          </a:xfrm>
+          <a:prstGeom prst="rect">
+            <a:avLst/>
+          </a:prstGeom>
+          <a:noFill/>
+        </p:spPr>
+        <p:txBody>
+          <a:bodyPr wrap="square">
+            <a:spAutoFit/>
+          </a:bodyPr>
+          <a:lstStyle/>
+          <a:p>
+            <a:pPr>
+              <a:defRPr sz="1500" b="1">
+                <a:solidFill>
+                  <a:srgbClr val="FFFFFF"/>
+                </a:solidFill>
+              </a:defRPr>
+            </a:pPr>
+            <a:r>
+              <a:t>Top 5 Branch Hotspots Account for ₹14.39 Cr of At-Risk Deposits [DERIVED]</a:t>
+            </a:r>
+          </a:p>
+          <a:p>
+            <a:br/>
+            <a:pPr>
+              <a:defRPr sz="1100">
+                <a:solidFill>
+                  <a:srgbClr val="A0AEC0"/>
+                </a:solidFill>
+              </a:defRPr>
+            </a:pPr>
+            <a:r>
+              <a:t>• Branch BR004 (Metropolitan Commercial Hub): 243 Customers | Total Deposits: ₹4.68 Cr | Balance at Risk: ₹3.26 Cr (69.5% risk rate) | 281 complaints, CSAT 3.75. Driven by Wealth tier outflow and digital friction.</a:t>
+            </a:r>
+          </a:p>
+          <a:p>
+            <a:br/>
+            <a:pPr>
+              <a:defRPr sz="1100">
+                <a:solidFill>
+                  <a:srgbClr val="A0AEC0"/>
+                </a:solidFill>
+              </a:defRPr>
+            </a:pPr>
+            <a:r>
+              <a:t>• Branch BR001 (Urban Flagship Center): 285 Customers | Total Deposits: ₹4.36 Cr | Balance at Risk: ₹3.17 Cr (72.8% risk rate) | 350 complaints, CSAT 3.58, 2 NPAs. High service friction and dispute concentration.</a:t>
+            </a:r>
+          </a:p>
+          <a:p>
+            <a:br/>
+            <a:pPr>
+              <a:defRPr sz="1100">
+                <a:solidFill>
+                  <a:srgbClr val="A0AEC0"/>
+                </a:solidFill>
+              </a:defRPr>
+            </a:pPr>
+            <a:r>
+              <a:t>• Branch BR023: 196 Customers | Total Deposits: ₹4.50 Cr | Balance at Risk: ₹2.82 Cr (62.6% risk rate) | 238 complaints. High average customer balance with declining mobile engagement.</a:t>
+            </a:r>
+          </a:p>
+          <a:p>
+            <a:br/>
+            <a:pPr>
+              <a:defRPr sz="1100">
+                <a:solidFill>
+                  <a:srgbClr val="A0AEC0"/>
+                </a:solidFill>
+              </a:defRPr>
+            </a:pPr>
+            <a:r>
+              <a:t>• Branch BR014: 254 Customers | Total Deposits: ₹3.89 Cr | Balance at Risk: ₹2.60 Cr (66.7% risk rate) | 310 complaints. High debit outflow acceleration to competitor accounts.</a:t>
+            </a:r>
+          </a:p>
+          <a:p>
+            <a:br/>
+            <a:pPr>
+              <a:defRPr sz="1100">
+                <a:solidFill>
+                  <a:srgbClr val="A0AEC0"/>
+                </a:solidFill>
+              </a:defRPr>
+            </a:pPr>
+            <a:r>
+              <a:t>• Branch BR012: 265 Customers | Total Deposits: ₹4.08 Cr | Balance at Risk: ₹2.54 Cr (62.2% risk rate) | 322 complaints, 2 NPAs. Dual service delays and credit delinquency.</a:t>
+            </a:r>
+          </a:p>
+          <a:p>
+            <a:br/>
+            <a:pPr>
+              <a:defRPr sz="1100">
+                <a:solidFill>
+                  <a:srgbClr val="A0AEC0"/>
+                </a:solidFill>
+              </a:defRPr>
+            </a:pPr>
+            <a:r>
+              <a:t>• Governance Mandate [RECOMMENDED]: Regional directors must not issue generic churn targets. Top 5 branches account for 21.4% of all at-risk deposits and 1,501 complaints. Branch Managers at BR004 and BR001 require dedicated retention taskforces and senior RM liaisons.</a:t>
+            </a:r>
+          </a:p>
+        </p:txBody>
+      </p:sp>
+    </p:spTree>
+  </p:cSld>
+  <p:clrMapOvr>
+    <a:masterClrMapping/>
+  </p:clrMapOvr>
+</p:sld>
+</file>
+
+<file path=ppt/slides/slide13.xml><?xml version="1.0" encoding="utf-8"?>
+<p:sld xmlns:a="http://schemas.openxmlformats.org/drawingml/2006/main" xmlns:p="http://schemas.openxmlformats.org/presentationml/2006/main" xmlns:r="http://schemas.openxmlformats.org/officeDocument/2006/relationships">
+  <p:cSld>
+    <p:bg>
+      <p:bgPr>
+        <a:solidFill>
+          <a:srgbClr val="0B132B"/>
+        </a:solidFill>
+        <a:effectLst/>
+      </p:bgPr>
+    </p:bg>
+    <p:spTree>
+      <p:nvGrpSpPr>
+        <p:cNvPr id="1" name=""/>
+        <p:cNvGrpSpPr/>
+        <p:nvPr/>
+      </p:nvGrpSpPr>
+      <p:grpSpPr/>
+      <p:sp>
+        <p:nvSpPr>
+          <p:cNvPr id="2" name="TextBox 1"/>
+          <p:cNvSpPr txBox="1"/>
+          <p:nvPr/>
+        </p:nvSpPr>
+        <p:spPr>
+          <a:xfrm>
+            <a:off x="731520" y="365760"/>
+            <a:ext cx="10698480" cy="914400"/>
+          </a:xfrm>
+          <a:prstGeom prst="rect">
+            <a:avLst/>
+          </a:prstGeom>
+          <a:noFill/>
+        </p:spPr>
+        <p:txBody>
+          <a:bodyPr wrap="square" lIns="0" tIns="0" rIns="0" bIns="0">
+            <a:spAutoFit/>
+          </a:bodyPr>
+          <a:lstStyle/>
+          <a:p>
+            <a:pPr>
+              <a:defRPr sz="1000" b="1">
+                <a:solidFill>
+                  <a:srgbClr val="48CAE4"/>
+                </a:solidFill>
+              </a:defRPr>
+            </a:pPr>
+            <a:r>
+              <a:t>ACTION PLAN &amp; GOVERNANCE</a:t>
+            </a:r>
+          </a:p>
+          <a:p>
+            <a:pPr>
+              <a:defRPr sz="2200" b="1">
+                <a:solidFill>
+                  <a:srgbClr val="FFFFFF"/>
+                </a:solidFill>
+              </a:defRPr>
+            </a:pPr>
+            <a:r>
+              <a:t>Prescriptive Management Action Matrix &amp; Governance Controls</a:t>
+            </a:r>
+          </a:p>
+        </p:txBody>
+      </p:sp>
+      <p:sp>
+        <p:nvSpPr>
+          <p:cNvPr id="3" name="Rectangle 2"/>
+          <p:cNvSpPr/>
+          <p:nvPr/>
+        </p:nvSpPr>
+        <p:spPr>
+          <a:xfrm>
+            <a:off x="731520" y="1645920"/>
+            <a:ext cx="10698480" cy="4389120"/>
+          </a:xfrm>
+          <a:prstGeom prst="rect">
+            <a:avLst/>
+          </a:prstGeom>
+          <a:solidFill>
+            <a:srgbClr val="1C2541"/>
+          </a:solidFill>
+          <a:ln>
+            <a:noFill/>
+          </a:ln>
+        </p:spPr>
+        <p:style>
+          <a:lnRef idx="1">
+            <a:schemeClr val="accent1"/>
+          </a:lnRef>
+          <a:fillRef idx="3">
+            <a:schemeClr val="accent1"/>
+          </a:fillRef>
+          <a:effectRef idx="2">
+            <a:schemeClr val="accent1"/>
+          </a:effectRef>
+          <a:fontRef idx="minor">
+            <a:schemeClr val="lt1"/>
+          </a:fontRef>
+        </p:style>
+        <p:txBody>
+          <a:bodyPr rtlCol="0" anchor="ctr"/>
+          <a:lstStyle/>
+          <a:p>
+            <a:pPr algn="ctr"/>
+          </a:p>
+        </p:txBody>
+      </p:sp>
+      <p:sp>
+        <p:nvSpPr>
+          <p:cNvPr id="4" name="TextBox 3"/>
+          <p:cNvSpPr txBox="1"/>
+          <p:nvPr/>
+        </p:nvSpPr>
+        <p:spPr>
+          <a:xfrm>
+            <a:off x="1005840" y="1828800"/>
+            <a:ext cx="10149840" cy="4023360"/>
+          </a:xfrm>
+          <a:prstGeom prst="rect">
+            <a:avLst/>
+          </a:prstGeom>
+          <a:noFill/>
+        </p:spPr>
+        <p:txBody>
+          <a:bodyPr wrap="square">
+            <a:spAutoFit/>
+          </a:bodyPr>
+          <a:lstStyle/>
+          <a:p>
+            <a:pPr>
+              <a:defRPr sz="1500" b="1">
+                <a:solidFill>
+                  <a:srgbClr val="48CAE4"/>
+                </a:solidFill>
+              </a:defRPr>
+            </a:pPr>
+            <a:r>
+              <a:t>Operational Accountability Matrix &amp; 3-Tier Governance [RECOMMENDED]</a:t>
+            </a:r>
+          </a:p>
+          <a:p>
+            <a:br/>
+            <a:pPr>
+              <a:defRPr sz="1050">
+                <a:solidFill>
+                  <a:srgbClr val="FFFFFF"/>
+                </a:solidFill>
+              </a:defRPr>
+            </a:pPr>
+            <a:r>
+              <a:t>1. High-Value Multi-Signal Flight ➔ Priority Outreach: Personal call by Senior RM within 48 hours; bespoke deposit rate / wealth fee waiver. | Owner: Head of Wealth Banking | Priority: P1 - Critical.</a:t>
+            </a:r>
+          </a:p>
+          <a:p>
+            <a:br/>
+            <a:pPr>
+              <a:defRPr sz="1050">
+                <a:solidFill>
+                  <a:srgbClr val="FFFFFF"/>
+                </a:solidFill>
+              </a:defRPr>
+            </a:pPr>
+            <a:r>
+              <a:t>2. Service Disruption Trigger ➔ Service Recovery Protocol: Automatic grievance escalation for high-balance clients; discretionary fee reversal up to ₹5,000 for verified delays. | Owner: Head of Customer Experience | Priority: P1 - Immediate.</a:t>
+            </a:r>
+          </a:p>
+          <a:p>
+            <a:br/>
+            <a:pPr>
+              <a:defRPr sz="1050">
+                <a:solidFill>
+                  <a:srgbClr val="FFFFFF"/>
+                </a:solidFill>
+              </a:defRPr>
+            </a:pPr>
+            <a:r>
+              <a:t>3. Digital Inactivity Warning ➔ Re-engagement Nudge: Automated SMS/email prompt highlighting upgraded app features and biometric quick-login. | Owner: Head of Digital Channels | Priority: P2 - High.</a:t>
+            </a:r>
+          </a:p>
+          <a:p>
+            <a:br/>
+            <a:pPr>
+              <a:defRPr sz="1050">
+                <a:solidFill>
+                  <a:srgbClr val="FFFFFF"/>
+                </a:solidFill>
+              </a:defRPr>
+            </a:pPr>
+            <a:r>
+              <a:t>4. Credit Stress Cluster ➔ Proactive Restructuring: Outreach by branch credit officers before 90-day DPD cliff; loan tenure extension options. | Owner: Chief Risk Officer / Retail Credit | Priority: P2 - High.</a:t>
+            </a:r>
+          </a:p>
+          <a:p>
+            <a:br/>
+            <a:pPr>
+              <a:defRPr sz="1050">
+                <a:solidFill>
+                  <a:srgbClr val="FFFFFF"/>
+                </a:solidFill>
+              </a:defRPr>
+            </a:pPr>
+            <a:r>
+              <a:t>5. Identity &amp; KYC Defects ➔ Digital Document Portal: In-app video-KYC link sent to 480 duplicate PAN and 306 missing KYC accounts. | Owner: Head of Compliance &amp; Operations | Priority: P1 - Regulatory.</a:t>
+            </a:r>
+          </a:p>
+          <a:p>
+            <a:br/>
+            <a:pPr>
+              <a:defRPr sz="1050">
+                <a:solidFill>
+                  <a:srgbClr val="FFFFFF"/>
+                </a:solidFill>
+              </a:defRPr>
+            </a:pPr>
+            <a:r>
+              <a:t>6. Preventive &amp; Detective Governance: Hard gateway API constraints (preventing invalid PAN regex and future dates) + daily automated DQ monitoring scans.</a:t>
+            </a:r>
+          </a:p>
+        </p:txBody>
+      </p:sp>
+    </p:spTree>
+  </p:cSld>
+  <p:clrMapOvr>
+    <a:masterClrMapping/>
+  </p:clrMapOvr>
+</p:sld>
+</file>
+
+<file path=ppt/slides/slide14.xml><?xml version="1.0" encoding="utf-8"?>
+<p:sld xmlns:a="http://schemas.openxmlformats.org/drawingml/2006/main" xmlns:p="http://schemas.openxmlformats.org/presentationml/2006/main" xmlns:r="http://schemas.openxmlformats.org/officeDocument/2006/relationships">
+  <p:cSld>
+    <p:bg>
+      <p:bgPr>
+        <a:solidFill>
+          <a:srgbClr val="0B132B"/>
+        </a:solidFill>
+        <a:effectLst/>
+      </p:bgPr>
+    </p:bg>
+    <p:spTree>
+      <p:nvGrpSpPr>
+        <p:cNvPr id="1" name=""/>
+        <p:cNvGrpSpPr/>
+        <p:nvPr/>
+      </p:nvGrpSpPr>
+      <p:grpSpPr/>
+      <p:sp>
+        <p:nvSpPr>
+          <p:cNvPr id="2" name="TextBox 1"/>
+          <p:cNvSpPr txBox="1"/>
+          <p:nvPr/>
+        </p:nvSpPr>
+        <p:spPr>
+          <a:xfrm>
+            <a:off x="731520" y="365760"/>
+            <a:ext cx="10698480" cy="914400"/>
+          </a:xfrm>
+          <a:prstGeom prst="rect">
+            <a:avLst/>
+          </a:prstGeom>
+          <a:noFill/>
+        </p:spPr>
+        <p:txBody>
+          <a:bodyPr wrap="square" lIns="0" tIns="0" rIns="0" bIns="0">
+            <a:spAutoFit/>
+          </a:bodyPr>
+          <a:lstStyle/>
+          <a:p>
+            <a:pPr>
+              <a:defRPr sz="1000" b="1">
+                <a:solidFill>
+                  <a:srgbClr val="48CAE4"/>
+                </a:solidFill>
+              </a:defRPr>
+            </a:pPr>
+            <a:r>
+              <a:t>ROADMAP &amp; NEXT STEPS</a:t>
+            </a:r>
+          </a:p>
+          <a:p>
+            <a:pPr>
+              <a:defRPr sz="2200" b="1">
+                <a:solidFill>
+                  <a:srgbClr val="FFFFFF"/>
+                </a:solidFill>
+              </a:defRPr>
+            </a:pPr>
+            <a:r>
+              <a:t>Strategic Execution Roadmap: 30-60-90 Day Phasing</a:t>
+            </a:r>
+          </a:p>
+        </p:txBody>
+      </p:sp>
+      <p:sp>
+        <p:nvSpPr>
+          <p:cNvPr id="3" name="Rectangle 2"/>
+          <p:cNvSpPr/>
+          <p:nvPr/>
+        </p:nvSpPr>
+        <p:spPr>
+          <a:xfrm>
+            <a:off x="731520" y="1645920"/>
+            <a:ext cx="3383280" cy="4389120"/>
+          </a:xfrm>
+          <a:prstGeom prst="rect">
+            <a:avLst/>
+          </a:prstGeom>
+          <a:solidFill>
+            <a:srgbClr val="1C2541"/>
+          </a:solidFill>
+          <a:ln w="19050">
+            <a:solidFill>
+              <a:srgbClr val="E63946"/>
+            </a:solidFill>
+          </a:ln>
+        </p:spPr>
+        <p:style>
+          <a:lnRef idx="1">
+            <a:schemeClr val="accent1"/>
+          </a:lnRef>
+          <a:fillRef idx="3">
+            <a:schemeClr val="accent1"/>
+          </a:fillRef>
+          <a:effectRef idx="2">
+            <a:schemeClr val="accent1"/>
+          </a:effectRef>
+          <a:fontRef idx="minor">
+            <a:schemeClr val="lt1"/>
+          </a:fontRef>
+        </p:style>
+        <p:txBody>
+          <a:bodyPr rtlCol="0" anchor="ctr"/>
+          <a:lstStyle/>
+          <a:p>
+            <a:pPr algn="ctr"/>
+          </a:p>
+        </p:txBody>
+      </p:sp>
+      <p:sp>
+        <p:nvSpPr>
+          <p:cNvPr id="4" name="TextBox 3"/>
+          <p:cNvSpPr txBox="1"/>
+          <p:nvPr/>
+        </p:nvSpPr>
+        <p:spPr>
+          <a:xfrm>
+            <a:off x="868680" y="1783080"/>
+            <a:ext cx="3108960" cy="4114800"/>
+          </a:xfrm>
+          <a:prstGeom prst="rect">
+            <a:avLst/>
+          </a:prstGeom>
+          <a:noFill/>
+        </p:spPr>
+        <p:txBody>
+          <a:bodyPr wrap="square">
+            <a:spAutoFit/>
+          </a:bodyPr>
+          <a:lstStyle/>
+          <a:p>
+            <a:pPr>
+              <a:defRPr sz="1200" b="1">
+                <a:solidFill>
+                  <a:srgbClr val="E63946"/>
+                </a:solidFill>
+              </a:defRPr>
+            </a:pPr>
+            <a:r>
+              <a:t>DAYS 1–30: TRIAGE &amp; HIGH-VALUE RETENTION</a:t>
+            </a:r>
+          </a:p>
+          <a:p>
+            <a:br/>
+            <a:pPr>
+              <a:defRPr sz="1000">
+                <a:solidFill>
+                  <a:srgbClr val="A0AEC0"/>
+                </a:solidFill>
+              </a:defRPr>
+            </a:pPr>
+            <a:r>
+              <a:t>• Deploy RM Outreach Console to all Wealth Relationship Managers.</a:t>
+            </a:r>
+          </a:p>
+          <a:p>
+            <a:br/>
+            <a:pPr>
+              <a:defRPr sz="1000">
+                <a:solidFill>
+                  <a:srgbClr val="A0AEC0"/>
+                </a:solidFill>
+              </a:defRPr>
+            </a:pPr>
+            <a:r>
+              <a:t>• Contact Top 165 Archetype A customers (protect ₹23.62 Cr).</a:t>
+            </a:r>
+          </a:p>
+          <a:p>
+            <a:br/>
+            <a:pPr>
+              <a:defRPr sz="1000">
+                <a:solidFill>
+                  <a:srgbClr val="A0AEC0"/>
+                </a:solidFill>
+              </a:defRPr>
+            </a:pPr>
+            <a:r>
+              <a:t>• Remediate 480 duplicate PAN identities and 306 missing KYC records.</a:t>
+            </a:r>
+          </a:p>
+          <a:p>
+            <a:br/>
+            <a:pPr>
+              <a:defRPr sz="1000">
+                <a:solidFill>
+                  <a:srgbClr val="A0AEC0"/>
+                </a:solidFill>
+              </a:defRPr>
+            </a:pPr>
+            <a:r>
+              <a:t>• Establish weekly DQ exception monitoring meetings.</a:t>
+            </a:r>
+          </a:p>
+        </p:txBody>
+      </p:sp>
+      <p:sp>
+        <p:nvSpPr>
+          <p:cNvPr id="5" name="Rectangle 4"/>
+          <p:cNvSpPr/>
+          <p:nvPr/>
+        </p:nvSpPr>
+        <p:spPr>
+          <a:xfrm>
+            <a:off x="4389120" y="1645920"/>
+            <a:ext cx="3383280" cy="4389120"/>
+          </a:xfrm>
+          <a:prstGeom prst="rect">
+            <a:avLst/>
+          </a:prstGeom>
+          <a:solidFill>
+            <a:srgbClr val="1C2541"/>
+          </a:solidFill>
+          <a:ln w="19050">
+            <a:solidFill>
+              <a:srgbClr val="F4A261"/>
+            </a:solidFill>
+          </a:ln>
+        </p:spPr>
+        <p:style>
+          <a:lnRef idx="1">
+            <a:schemeClr val="accent1"/>
+          </a:lnRef>
+          <a:fillRef idx="3">
+            <a:schemeClr val="accent1"/>
+          </a:fillRef>
+          <a:effectRef idx="2">
+            <a:schemeClr val="accent1"/>
+          </a:effectRef>
+          <a:fontRef idx="minor">
+            <a:schemeClr val="lt1"/>
+          </a:fontRef>
+        </p:style>
+        <p:txBody>
+          <a:bodyPr rtlCol="0" anchor="ctr"/>
+          <a:lstStyle/>
+          <a:p>
+            <a:pPr algn="ctr"/>
+          </a:p>
+        </p:txBody>
+      </p:sp>
+      <p:sp>
+        <p:nvSpPr>
+          <p:cNvPr id="6" name="TextBox 5"/>
+          <p:cNvSpPr txBox="1"/>
+          <p:nvPr/>
+        </p:nvSpPr>
+        <p:spPr>
+          <a:xfrm>
+            <a:off x="4526280" y="1783080"/>
+            <a:ext cx="3108960" cy="4114800"/>
+          </a:xfrm>
+          <a:prstGeom prst="rect">
+            <a:avLst/>
+          </a:prstGeom>
+          <a:noFill/>
+        </p:spPr>
+        <p:txBody>
+          <a:bodyPr wrap="square">
+            <a:spAutoFit/>
+          </a:bodyPr>
+          <a:lstStyle/>
+          <a:p>
+            <a:pPr>
+              <a:defRPr sz="1200" b="1">
+                <a:solidFill>
+                  <a:srgbClr val="F4A261"/>
+                </a:solidFill>
+              </a:defRPr>
+            </a:pPr>
+            <a:r>
+              <a:t>DAYS 31–60: OPERATIONAL REPAIR &amp; BRANCH INTERVENTION</a:t>
+            </a:r>
+          </a:p>
+          <a:p>
+            <a:br/>
+            <a:pPr>
+              <a:defRPr sz="1000">
+                <a:solidFill>
+                  <a:srgbClr val="A0AEC0"/>
+                </a:solidFill>
+              </a:defRPr>
+            </a:pPr>
+            <a:r>
+              <a:t>• Dispatch service recovery squads to Top 5 risk branches (BR004, BR001, BR023, BR014, BR012).</a:t>
+            </a:r>
+          </a:p>
+          <a:p>
+            <a:br/>
+            <a:pPr>
+              <a:defRPr sz="1000">
+                <a:solidFill>
+                  <a:srgbClr val="A0AEC0"/>
+                </a:solidFill>
+              </a:defRPr>
+            </a:pPr>
+            <a:r>
+              <a:t>• Implement 7-day SLA cap on Transaction Dispute complaint categories.</a:t>
+            </a:r>
+          </a:p>
+          <a:p>
+            <a:br/>
+            <a:pPr>
+              <a:defRPr sz="1000">
+                <a:solidFill>
+                  <a:srgbClr val="A0AEC0"/>
+                </a:solidFill>
+              </a:defRPr>
+            </a:pPr>
+            <a:r>
+              <a:t>• Launch mobile app re-engagement push for 3,781 inactive digital accounts.</a:t>
+            </a:r>
+          </a:p>
+          <a:p>
+            <a:br/>
+            <a:pPr>
+              <a:defRPr sz="1000">
+                <a:solidFill>
+                  <a:srgbClr val="A0AEC0"/>
+                </a:solidFill>
+              </a:defRPr>
+            </a:pPr>
+            <a:r>
+              <a:t>• Ingest daily Power BI dashboards for regional directors.</a:t>
+            </a:r>
+          </a:p>
+        </p:txBody>
+      </p:sp>
+      <p:sp>
+        <p:nvSpPr>
+          <p:cNvPr id="7" name="Rectangle 6"/>
+          <p:cNvSpPr/>
+          <p:nvPr/>
+        </p:nvSpPr>
+        <p:spPr>
+          <a:xfrm>
+            <a:off x="8046720" y="1645920"/>
+            <a:ext cx="3383280" cy="4389120"/>
+          </a:xfrm>
+          <a:prstGeom prst="rect">
+            <a:avLst/>
+          </a:prstGeom>
+          <a:solidFill>
+            <a:srgbClr val="1C2541"/>
+          </a:solidFill>
+          <a:ln w="19050">
+            <a:solidFill>
+              <a:srgbClr val="2A9D8F"/>
+            </a:solidFill>
+          </a:ln>
+        </p:spPr>
+        <p:style>
+          <a:lnRef idx="1">
+            <a:schemeClr val="accent1"/>
+          </a:lnRef>
+          <a:fillRef idx="3">
+            <a:schemeClr val="accent1"/>
+          </a:fillRef>
+          <a:effectRef idx="2">
+            <a:schemeClr val="accent1"/>
+          </a:effectRef>
+          <a:fontRef idx="minor">
+            <a:schemeClr val="lt1"/>
+          </a:fontRef>
+        </p:style>
+        <p:txBody>
+          <a:bodyPr rtlCol="0" anchor="ctr"/>
+          <a:lstStyle/>
+          <a:p>
+            <a:pPr algn="ctr"/>
+          </a:p>
+        </p:txBody>
+      </p:sp>
+      <p:sp>
+        <p:nvSpPr>
+          <p:cNvPr id="8" name="TextBox 7"/>
+          <p:cNvSpPr txBox="1"/>
+          <p:nvPr/>
+        </p:nvSpPr>
+        <p:spPr>
+          <a:xfrm>
+            <a:off x="8183880" y="1783080"/>
+            <a:ext cx="3108960" cy="4114800"/>
+          </a:xfrm>
+          <a:prstGeom prst="rect">
+            <a:avLst/>
+          </a:prstGeom>
+          <a:noFill/>
+        </p:spPr>
+        <p:txBody>
+          <a:bodyPr wrap="square">
+            <a:spAutoFit/>
+          </a:bodyPr>
+          <a:lstStyle/>
+          <a:p>
+            <a:pPr>
+              <a:defRPr sz="1200" b="1">
+                <a:solidFill>
+                  <a:srgbClr val="2A9D8F"/>
+                </a:solidFill>
+              </a:defRPr>
+            </a:pPr>
+            <a:r>
+              <a:t>DAYS 61–90: INSTITUTIONALIZATION &amp; AUTOMATION</a:t>
+            </a:r>
+          </a:p>
+          <a:p>
+            <a:br/>
+            <a:pPr>
+              <a:defRPr sz="1000">
+                <a:solidFill>
+                  <a:srgbClr val="A0AEC0"/>
+                </a:solidFill>
+              </a:defRPr>
+            </a:pPr>
+            <a:r>
+              <a:t>• Automate daily lakehouse ingestion pipeline from core banking systems.</a:t>
+            </a:r>
+          </a:p>
+          <a:p>
+            <a:br/>
+            <a:pPr>
+              <a:defRPr sz="1000">
+                <a:solidFill>
+                  <a:srgbClr val="A0AEC0"/>
+                </a:solidFill>
+              </a:defRPr>
+            </a:pPr>
+            <a:r>
+              <a:t>• Integrate Silent Churn Risk Index into frontline CRM screen (real-time risk badge).</a:t>
+            </a:r>
+          </a:p>
+          <a:p>
+            <a:br/>
+            <a:pPr>
+              <a:defRPr sz="1000">
+                <a:solidFill>
+                  <a:srgbClr val="A0AEC0"/>
+                </a:solidFill>
+              </a:defRPr>
+            </a:pPr>
+            <a:r>
+              <a:t>• Calibrate credit stress early-warning triggers with loan collection units.</a:t>
+            </a:r>
+          </a:p>
+          <a:p>
+            <a:br/>
+            <a:pPr>
+              <a:defRPr sz="1000">
+                <a:solidFill>
+                  <a:srgbClr val="A0AEC0"/>
+                </a:solidFill>
+              </a:defRPr>
+            </a:pPr>
+            <a:r>
+              <a:t>• Measure net deposit retention: Target ₹30+ Cr in preserved retail deposits.</a:t>
+            </a:r>
+          </a:p>
+        </p:txBody>
+      </p:sp>
+    </p:spTree>
+  </p:cSld>
+  <p:clrMapOvr>
+    <a:masterClrMapping/>
+  </p:clrMapOvr>
+</p:sld>
+</file>
+
+<file path=ppt/slides/slide2.xml><?xml version="1.0" encoding="utf-8"?>
+<p:sld xmlns:a="http://schemas.openxmlformats.org/drawingml/2006/main" xmlns:p="http://schemas.openxmlformats.org/presentationml/2006/main" xmlns:r="http://schemas.openxmlformats.org/officeDocument/2006/relationships">
+  <p:cSld>
+    <p:bg>
+      <p:bgPr>
+        <a:solidFill>
+          <a:srgbClr val="0B132B"/>
+        </a:solidFill>
+        <a:effectLst/>
+      </p:bgPr>
+    </p:bg>
+    <p:spTree>
+      <p:nvGrpSpPr>
+        <p:cNvPr id="1" name=""/>
+        <p:cNvGrpSpPr/>
+        <p:nvPr/>
+      </p:nvGrpSpPr>
+      <p:grpSpPr/>
+      <p:sp>
+        <p:nvSpPr>
+          <p:cNvPr id="2" name="TextBox 1"/>
+          <p:cNvSpPr txBox="1"/>
+          <p:nvPr/>
+        </p:nvSpPr>
+        <p:spPr>
+          <a:xfrm>
+            <a:off x="731520" y="365760"/>
+            <a:ext cx="10698480" cy="914400"/>
+          </a:xfrm>
+          <a:prstGeom prst="rect">
+            <a:avLst/>
+          </a:prstGeom>
+          <a:noFill/>
+        </p:spPr>
+        <p:txBody>
+          <a:bodyPr wrap="square" lIns="0" tIns="0" rIns="0" bIns="0">
+            <a:spAutoFit/>
+          </a:bodyPr>
+          <a:lstStyle/>
+          <a:p>
+            <a:pPr>
+              <a:defRPr sz="1000" b="1">
+                <a:solidFill>
+                  <a:srgbClr val="48CAE4"/>
+                </a:solidFill>
+              </a:defRPr>
+            </a:pPr>
+            <a:r>
+              <a:t>STRATEGIC OVERVIEW</a:t>
+            </a:r>
+          </a:p>
+          <a:p>
+            <a:pPr>
+              <a:defRPr sz="2200" b="1">
+                <a:solidFill>
+                  <a:srgbClr val="FFFFFF"/>
+                </a:solidFill>
+              </a:defRPr>
+            </a:pPr>
+            <a:r>
+              <a:t>Executive Summary: Diagnosing Silent Attrition</a:t>
+            </a:r>
+          </a:p>
+        </p:txBody>
+      </p:sp>
+      <p:sp>
+        <p:nvSpPr>
+          <p:cNvPr id="3" name="Rectangle 2"/>
+          <p:cNvSpPr/>
+          <p:nvPr/>
+        </p:nvSpPr>
+        <p:spPr>
+          <a:xfrm>
+            <a:off x="731520" y="1645920"/>
+            <a:ext cx="2468880" cy="4389120"/>
+          </a:xfrm>
+          <a:prstGeom prst="rect">
+            <a:avLst/>
+          </a:prstGeom>
+          <a:solidFill>
+            <a:srgbClr val="1C2541"/>
+          </a:solidFill>
+          <a:ln w="19050">
+            <a:solidFill>
+              <a:srgbClr val="E63946"/>
+            </a:solidFill>
+          </a:ln>
+        </p:spPr>
+        <p:style>
+          <a:lnRef idx="1">
+            <a:schemeClr val="accent1"/>
+          </a:lnRef>
+          <a:fillRef idx="3">
+            <a:schemeClr val="accent1"/>
+          </a:fillRef>
+          <a:effectRef idx="2">
+            <a:schemeClr val="accent1"/>
+          </a:effectRef>
+          <a:fontRef idx="minor">
+            <a:schemeClr val="lt1"/>
+          </a:fontRef>
+        </p:style>
+        <p:txBody>
+          <a:bodyPr rtlCol="0" anchor="ctr"/>
+          <a:lstStyle/>
+          <a:p>
+            <a:pPr algn="ctr"/>
+          </a:p>
+        </p:txBody>
+      </p:sp>
+      <p:sp>
+        <p:nvSpPr>
+          <p:cNvPr id="4" name="TextBox 3"/>
+          <p:cNvSpPr txBox="1"/>
+          <p:nvPr/>
+        </p:nvSpPr>
+        <p:spPr>
+          <a:xfrm>
+            <a:off x="868680" y="1783080"/>
+            <a:ext cx="2194560" cy="4114800"/>
+          </a:xfrm>
+          <a:prstGeom prst="rect">
+            <a:avLst/>
+          </a:prstGeom>
+          <a:noFill/>
+        </p:spPr>
+        <p:txBody>
+          <a:bodyPr wrap="square">
+            <a:spAutoFit/>
+          </a:bodyPr>
+          <a:lstStyle/>
+          <a:p>
+            <a:pPr>
+              <a:defRPr sz="1000" b="1">
+                <a:solidFill>
+                  <a:srgbClr val="E63946"/>
+                </a:solidFill>
+              </a:defRPr>
+            </a:pPr>
+            <a:r>
+              <a:t>[OBSERVED]</a:t>
+            </a:r>
+          </a:p>
+          <a:p>
+            <a:pPr>
+              <a:defRPr sz="1400" b="1">
+                <a:solidFill>
+                  <a:srgbClr val="FFFFFF"/>
+                </a:solidFill>
+              </a:defRPr>
+            </a:pPr>
+            <a:r>
+              <a:t>WHAT IS HAPPENING?</a:t>
+            </a:r>
+          </a:p>
+          <a:p>
+            <a:br/>
+            <a:pPr>
+              <a:defRPr sz="1100">
+                <a:solidFill>
+                  <a:srgbClr val="A0AEC0"/>
+                </a:solidFill>
+              </a:defRPr>
+            </a:pPr>
+            <a:r>
+              <a:t>23.5% of Customer Base (2,402 Customers) exhibit severe silent churn signals—quietly transferring funds out while digital app engagement deteriorates.</a:t>
+            </a:r>
+          </a:p>
+        </p:txBody>
+      </p:sp>
+      <p:sp>
+        <p:nvSpPr>
+          <p:cNvPr id="5" name="Rectangle 4"/>
+          <p:cNvSpPr/>
+          <p:nvPr/>
+        </p:nvSpPr>
+        <p:spPr>
+          <a:xfrm>
+            <a:off x="3429000" y="1645920"/>
+            <a:ext cx="2468880" cy="4389120"/>
+          </a:xfrm>
+          <a:prstGeom prst="rect">
+            <a:avLst/>
+          </a:prstGeom>
+          <a:solidFill>
+            <a:srgbClr val="1C2541"/>
+          </a:solidFill>
+          <a:ln w="19050">
+            <a:solidFill>
+              <a:srgbClr val="F4A261"/>
+            </a:solidFill>
+          </a:ln>
+        </p:spPr>
+        <p:style>
+          <a:lnRef idx="1">
+            <a:schemeClr val="accent1"/>
+          </a:lnRef>
+          <a:fillRef idx="3">
+            <a:schemeClr val="accent1"/>
+          </a:fillRef>
+          <a:effectRef idx="2">
+            <a:schemeClr val="accent1"/>
+          </a:effectRef>
+          <a:fontRef idx="minor">
+            <a:schemeClr val="lt1"/>
+          </a:fontRef>
+        </p:style>
+        <p:txBody>
+          <a:bodyPr rtlCol="0" anchor="ctr"/>
+          <a:lstStyle/>
+          <a:p>
+            <a:pPr algn="ctr"/>
+          </a:p>
+        </p:txBody>
+      </p:sp>
+      <p:sp>
+        <p:nvSpPr>
+          <p:cNvPr id="6" name="TextBox 5"/>
+          <p:cNvSpPr txBox="1"/>
+          <p:nvPr/>
+        </p:nvSpPr>
+        <p:spPr>
+          <a:xfrm>
+            <a:off x="3566160" y="1783080"/>
+            <a:ext cx="2194560" cy="4114800"/>
+          </a:xfrm>
+          <a:prstGeom prst="rect">
+            <a:avLst/>
+          </a:prstGeom>
+          <a:noFill/>
+        </p:spPr>
+        <p:txBody>
+          <a:bodyPr wrap="square">
+            <a:spAutoFit/>
+          </a:bodyPr>
+          <a:lstStyle/>
+          <a:p>
+            <a:pPr>
+              <a:defRPr sz="1000" b="1">
+                <a:solidFill>
+                  <a:srgbClr val="F4A261"/>
+                </a:solidFill>
+              </a:defRPr>
+            </a:pPr>
+            <a:r>
+              <a:t>[DERIVED]</a:t>
+            </a:r>
+          </a:p>
+          <a:p>
+            <a:pPr>
+              <a:defRPr sz="1400" b="1">
+                <a:solidFill>
+                  <a:srgbClr val="FFFFFF"/>
+                </a:solidFill>
+              </a:defRPr>
+            </a:pPr>
+            <a:r>
+              <a:t>WHY DOES IT MATTER?</a:t>
+            </a:r>
+          </a:p>
+          <a:p>
+            <a:br/>
+            <a:pPr>
+              <a:defRPr sz="1100">
+                <a:solidFill>
+                  <a:srgbClr val="A0AEC0"/>
+                </a:solidFill>
+              </a:defRPr>
+            </a:pPr>
+            <a:r>
+              <a:t>₹67.33 Crores in retail deposits (51.4% of total portfolio) are directly exposed to flight risk, concentrated heavily in high-margin Wealth &amp; Privileged tiers.</a:t>
+            </a:r>
+          </a:p>
+        </p:txBody>
+      </p:sp>
+      <p:sp>
+        <p:nvSpPr>
+          <p:cNvPr id="7" name="Rectangle 6"/>
+          <p:cNvSpPr/>
+          <p:nvPr/>
+        </p:nvSpPr>
+        <p:spPr>
+          <a:xfrm>
+            <a:off x="6126480" y="1645920"/>
+            <a:ext cx="2468880" cy="4389120"/>
+          </a:xfrm>
+          <a:prstGeom prst="rect">
+            <a:avLst/>
+          </a:prstGeom>
+          <a:solidFill>
+            <a:srgbClr val="1C2541"/>
+          </a:solidFill>
+          <a:ln w="19050">
+            <a:solidFill>
+              <a:srgbClr val="E9C46A"/>
+            </a:solidFill>
+          </a:ln>
+        </p:spPr>
+        <p:style>
+          <a:lnRef idx="1">
+            <a:schemeClr val="accent1"/>
+          </a:lnRef>
+          <a:fillRef idx="3">
+            <a:schemeClr val="accent1"/>
+          </a:fillRef>
+          <a:effectRef idx="2">
+            <a:schemeClr val="accent1"/>
+          </a:effectRef>
+          <a:fontRef idx="minor">
+            <a:schemeClr val="lt1"/>
+          </a:fontRef>
+        </p:style>
+        <p:txBody>
+          <a:bodyPr rtlCol="0" anchor="ctr"/>
+          <a:lstStyle/>
+          <a:p>
+            <a:pPr algn="ctr"/>
+          </a:p>
+        </p:txBody>
+      </p:sp>
+      <p:sp>
+        <p:nvSpPr>
+          <p:cNvPr id="8" name="TextBox 7"/>
+          <p:cNvSpPr txBox="1"/>
+          <p:nvPr/>
+        </p:nvSpPr>
+        <p:spPr>
+          <a:xfrm>
+            <a:off x="6263640" y="1783080"/>
+            <a:ext cx="2194560" cy="4114800"/>
+          </a:xfrm>
+          <a:prstGeom prst="rect">
+            <a:avLst/>
+          </a:prstGeom>
+          <a:noFill/>
+        </p:spPr>
+        <p:txBody>
+          <a:bodyPr wrap="square">
+            <a:spAutoFit/>
+          </a:bodyPr>
+          <a:lstStyle/>
+          <a:p>
+            <a:pPr>
+              <a:defRPr sz="1000" b="1">
+                <a:solidFill>
+                  <a:srgbClr val="E9C46A"/>
+                </a:solidFill>
+              </a:defRPr>
+            </a:pPr>
+            <a:r>
+              <a:t>[DERIVED]</a:t>
+            </a:r>
+          </a:p>
+          <a:p>
+            <a:pPr>
+              <a:defRPr sz="1400" b="1">
+                <a:solidFill>
+                  <a:srgbClr val="FFFFFF"/>
+                </a:solidFill>
+              </a:defRPr>
+            </a:pPr>
+            <a:r>
+              <a:t>WHICH SEGMENTS ARE EXPOSED?</a:t>
+            </a:r>
+          </a:p>
+          <a:p>
+            <a:br/>
+            <a:pPr>
+              <a:defRPr sz="1100">
+                <a:solidFill>
+                  <a:srgbClr val="A0AEC0"/>
+                </a:solidFill>
+              </a:defRPr>
+            </a:pPr>
+            <a:r>
+              <a:t>Wealth segment accounts for 59.0% of at-risk deposits (₹39.73 Cr) with a 61.0% segment balance risk rate. Top 5 branches hold ₹14.39 Cr at risk.</a:t>
+            </a:r>
+          </a:p>
+        </p:txBody>
+      </p:sp>
+      <p:sp>
+        <p:nvSpPr>
+          <p:cNvPr id="9" name="Rectangle 8"/>
+          <p:cNvSpPr/>
+          <p:nvPr/>
+        </p:nvSpPr>
+        <p:spPr>
+          <a:xfrm>
+            <a:off x="8823960" y="1645920"/>
+            <a:ext cx="2468880" cy="4389120"/>
+          </a:xfrm>
+          <a:prstGeom prst="rect">
+            <a:avLst/>
+          </a:prstGeom>
+          <a:solidFill>
+            <a:srgbClr val="1C2541"/>
+          </a:solidFill>
+          <a:ln w="19050">
+            <a:solidFill>
+              <a:srgbClr val="2A9D8F"/>
+            </a:solidFill>
+          </a:ln>
+        </p:spPr>
+        <p:style>
+          <a:lnRef idx="1">
+            <a:schemeClr val="accent1"/>
+          </a:lnRef>
+          <a:fillRef idx="3">
+            <a:schemeClr val="accent1"/>
+          </a:fillRef>
+          <a:effectRef idx="2">
+            <a:schemeClr val="accent1"/>
+          </a:effectRef>
+          <a:fontRef idx="minor">
+            <a:schemeClr val="lt1"/>
+          </a:fontRef>
+        </p:style>
+        <p:txBody>
+          <a:bodyPr rtlCol="0" anchor="ctr"/>
+          <a:lstStyle/>
+          <a:p>
+            <a:pPr algn="ctr"/>
+          </a:p>
+        </p:txBody>
+      </p:sp>
+      <p:sp>
+        <p:nvSpPr>
+          <p:cNvPr id="10" name="TextBox 9"/>
+          <p:cNvSpPr txBox="1"/>
+          <p:nvPr/>
+        </p:nvSpPr>
+        <p:spPr>
+          <a:xfrm>
+            <a:off x="8961120" y="1783080"/>
+            <a:ext cx="2194560" cy="4114800"/>
+          </a:xfrm>
+          <a:prstGeom prst="rect">
+            <a:avLst/>
+          </a:prstGeom>
+          <a:noFill/>
+        </p:spPr>
+        <p:txBody>
+          <a:bodyPr wrap="square">
+            <a:spAutoFit/>
+          </a:bodyPr>
+          <a:lstStyle/>
+          <a:p>
+            <a:pPr>
+              <a:defRPr sz="1000" b="1">
+                <a:solidFill>
+                  <a:srgbClr val="2A9D8F"/>
+                </a:solidFill>
+              </a:defRPr>
+            </a:pPr>
+            <a:r>
+              <a:t>[RECOMMENDED]</a:t>
+            </a:r>
+          </a:p>
+          <a:p>
+            <a:pPr>
+              <a:defRPr sz="1400" b="1">
+                <a:solidFill>
+                  <a:srgbClr val="FFFFFF"/>
+                </a:solidFill>
+              </a:defRPr>
+            </a:pPr>
+            <a:r>
+              <a:t>WHAT SHOULD MANAGEMENT DO?</a:t>
+            </a:r>
+          </a:p>
+          <a:p>
+            <a:br/>
+            <a:pPr>
+              <a:defRPr sz="1100">
+                <a:solidFill>
+                  <a:srgbClr val="A0AEC0"/>
+                </a:solidFill>
+              </a:defRPr>
+            </a:pPr>
+            <a:r>
+              <a:t>Execute a 6-Archetype Action Plan: prioritized 48-hour RM outreach for high-value clients, KYC &amp; data cleanup, and proactive resolution of dispute-heavy channels.</a:t>
+            </a:r>
+          </a:p>
+        </p:txBody>
+      </p:sp>
+    </p:spTree>
+  </p:cSld>
+  <p:clrMapOvr>
+    <a:masterClrMapping/>
+  </p:clrMapOvr>
+</p:sld>
+</file>
+
+<file path=ppt/slides/slide3.xml><?xml version="1.0" encoding="utf-8"?>
+<p:sld xmlns:a="http://schemas.openxmlformats.org/drawingml/2006/main" xmlns:p="http://schemas.openxmlformats.org/presentationml/2006/main" xmlns:r="http://schemas.openxmlformats.org/officeDocument/2006/relationships">
+  <p:cSld>
+    <p:bg>
+      <p:bgPr>
+        <a:solidFill>
+          <a:srgbClr val="0B132B"/>
+        </a:solidFill>
+        <a:effectLst/>
+      </p:bgPr>
+    </p:bg>
+    <p:spTree>
+      <p:nvGrpSpPr>
+        <p:cNvPr id="1" name=""/>
+        <p:cNvGrpSpPr/>
+        <p:nvPr/>
+      </p:nvGrpSpPr>
+      <p:grpSpPr/>
+      <p:sp>
+        <p:nvSpPr>
+          <p:cNvPr id="2" name="TextBox 1"/>
+          <p:cNvSpPr txBox="1"/>
+          <p:nvPr/>
+        </p:nvSpPr>
+        <p:spPr>
+          <a:xfrm>
+            <a:off x="731520" y="365760"/>
+            <a:ext cx="10698480" cy="914400"/>
+          </a:xfrm>
+          <a:prstGeom prst="rect">
+            <a:avLst/>
+          </a:prstGeom>
+          <a:noFill/>
+        </p:spPr>
+        <p:txBody>
+          <a:bodyPr wrap="square" lIns="0" tIns="0" rIns="0" bIns="0">
+            <a:spAutoFit/>
+          </a:bodyPr>
+          <a:lstStyle/>
+          <a:p>
+            <a:pPr>
+              <a:defRPr sz="1000" b="1">
+                <a:solidFill>
+                  <a:srgbClr val="48CAE4"/>
+                </a:solidFill>
+              </a:defRPr>
+            </a:pPr>
+            <a:r>
+              <a:t>DELIVERABLE 1 — 20% WEIGHT</a:t>
+            </a:r>
+          </a:p>
+          <a:p>
+            <a:pPr>
+              <a:defRPr sz="2200" b="1">
+                <a:solidFill>
+                  <a:srgbClr val="FFFFFF"/>
+                </a:solidFill>
+              </a:defRPr>
+            </a:pPr>
+            <a:r>
+              <a:t>Deliverable 1: Dataset Discovery &amp; Relational Join Architecture</a:t>
+            </a:r>
+          </a:p>
+        </p:txBody>
+      </p:sp>
+      <p:sp>
+        <p:nvSpPr>
+          <p:cNvPr id="3" name="Rectangle 2"/>
+          <p:cNvSpPr/>
+          <p:nvPr/>
+        </p:nvSpPr>
+        <p:spPr>
+          <a:xfrm>
+            <a:off x="731520" y="1645920"/>
+            <a:ext cx="3383280" cy="4389120"/>
+          </a:xfrm>
+          <a:prstGeom prst="rect">
+            <a:avLst/>
+          </a:prstGeom>
+          <a:solidFill>
+            <a:srgbClr val="1C2541"/>
+          </a:solidFill>
+          <a:ln w="19050">
+            <a:solidFill>
+              <a:srgbClr val="48CAE4"/>
+            </a:solidFill>
+          </a:ln>
+        </p:spPr>
+        <p:style>
+          <a:lnRef idx="1">
+            <a:schemeClr val="accent1"/>
+          </a:lnRef>
+          <a:fillRef idx="3">
+            <a:schemeClr val="accent1"/>
+          </a:fillRef>
+          <a:effectRef idx="2">
+            <a:schemeClr val="accent1"/>
+          </a:effectRef>
+          <a:fontRef idx="minor">
+            <a:schemeClr val="lt1"/>
+          </a:fontRef>
+        </p:style>
+        <p:txBody>
+          <a:bodyPr rtlCol="0" anchor="ctr"/>
+          <a:lstStyle/>
+          <a:p>
+            <a:pPr algn="ctr"/>
+          </a:p>
+        </p:txBody>
+      </p:sp>
+      <p:sp>
+        <p:nvSpPr>
+          <p:cNvPr id="4" name="TextBox 3"/>
+          <p:cNvSpPr txBox="1"/>
+          <p:nvPr/>
+        </p:nvSpPr>
+        <p:spPr>
+          <a:xfrm>
+            <a:off x="868680" y="1783080"/>
+            <a:ext cx="3108960" cy="4114800"/>
+          </a:xfrm>
+          <a:prstGeom prst="rect">
+            <a:avLst/>
+          </a:prstGeom>
+          <a:noFill/>
+        </p:spPr>
+        <p:txBody>
+          <a:bodyPr wrap="square">
+            <a:spAutoFit/>
+          </a:bodyPr>
+          <a:lstStyle/>
+          <a:p>
+            <a:pPr>
+              <a:defRPr sz="1300" b="1">
+                <a:solidFill>
+                  <a:srgbClr val="48CAE4"/>
+                </a:solidFill>
+              </a:defRPr>
+            </a:pPr>
+            <a:r>
+              <a:t>INVENTORY &amp; GRAIN</a:t>
+            </a:r>
+          </a:p>
+          <a:p>
+            <a:br/>
+            <a:pPr>
+              <a:defRPr sz="950">
+                <a:solidFill>
+                  <a:srgbClr val="FFFFFF"/>
+                </a:solidFill>
+              </a:defRPr>
+            </a:pPr>
+            <a:r>
+              <a:t>• Customer_Master: 10,200 rows | Grain: 1 row/customer | PK: Customer_ID | Missing: 20 PAN, 306 KYC.</a:t>
+            </a:r>
+          </a:p>
+          <a:p>
+            <a:br/>
+            <a:pPr>
+              <a:defRPr sz="950">
+                <a:solidFill>
+                  <a:srgbClr val="FFFFFF"/>
+                </a:solidFill>
+              </a:defRPr>
+            </a:pPr>
+            <a:r>
+              <a:t>• Accounts: 14,000 rows | Grain: 1 row/account | PK: Account_ID | FK: Customer_ID → Customer_Master.</a:t>
+            </a:r>
+          </a:p>
+          <a:p>
+            <a:br/>
+            <a:pPr>
+              <a:defRPr sz="950">
+                <a:solidFill>
+                  <a:srgbClr val="FFFFFF"/>
+                </a:solidFill>
+              </a:defRPr>
+            </a:pPr>
+            <a:r>
+              <a:t>• Transactions: 150,000 rows | Grain: 1 row/txn | PK: Txn_ID | FK: Account_ID → Accounts.</a:t>
+            </a:r>
+          </a:p>
+          <a:p>
+            <a:br/>
+            <a:pPr>
+              <a:defRPr sz="950">
+                <a:solidFill>
+                  <a:srgbClr val="FFFFFF"/>
+                </a:solidFill>
+              </a:defRPr>
+            </a:pPr>
+            <a:r>
+              <a:t>• Loans: 5,000 rows | Grain: 1 row/loan facility | PK: Loan_ID | FK: Customer_ID → Customer_Master.</a:t>
+            </a:r>
+          </a:p>
+          <a:p>
+            <a:br/>
+            <a:pPr>
+              <a:defRPr sz="950">
+                <a:solidFill>
+                  <a:srgbClr val="FFFFFF"/>
+                </a:solidFill>
+              </a:defRPr>
+            </a:pPr>
+            <a:r>
+              <a:t>• Customer_Service: 12,000 rows | Grain: 1 row/grievance | PK: Complaint_ID | FK: Customer_ID.</a:t>
+            </a:r>
+          </a:p>
+          <a:p>
+            <a:br/>
+            <a:pPr>
+              <a:defRPr sz="950">
+                <a:solidFill>
+                  <a:srgbClr val="FFFFFF"/>
+                </a:solidFill>
+              </a:defRPr>
+            </a:pPr>
+            <a:r>
+              <a:t>• Digital_Activity: 150,000 rows | Grain: 1 row/session log | PK: Log_ID | FK: Customer_ID.</a:t>
+            </a:r>
+          </a:p>
+        </p:txBody>
+      </p:sp>
+      <p:sp>
+        <p:nvSpPr>
+          <p:cNvPr id="5" name="Rectangle 4"/>
+          <p:cNvSpPr/>
+          <p:nvPr/>
+        </p:nvSpPr>
+        <p:spPr>
+          <a:xfrm>
+            <a:off x="4389120" y="1645920"/>
+            <a:ext cx="3383280" cy="4389120"/>
+          </a:xfrm>
+          <a:prstGeom prst="rect">
+            <a:avLst/>
+          </a:prstGeom>
+          <a:solidFill>
+            <a:srgbClr val="1C2541"/>
+          </a:solidFill>
+          <a:ln w="19050">
+            <a:solidFill>
+              <a:srgbClr val="E63946"/>
+            </a:solidFill>
+          </a:ln>
+        </p:spPr>
+        <p:style>
+          <a:lnRef idx="1">
+            <a:schemeClr val="accent1"/>
+          </a:lnRef>
+          <a:fillRef idx="3">
+            <a:schemeClr val="accent1"/>
+          </a:fillRef>
+          <a:effectRef idx="2">
+            <a:schemeClr val="accent1"/>
+          </a:effectRef>
+          <a:fontRef idx="minor">
+            <a:schemeClr val="lt1"/>
+          </a:fontRef>
+        </p:style>
+        <p:txBody>
+          <a:bodyPr rtlCol="0" anchor="ctr"/>
+          <a:lstStyle/>
+          <a:p>
+            <a:pPr algn="ctr"/>
+          </a:p>
+        </p:txBody>
+      </p:sp>
+      <p:sp>
+        <p:nvSpPr>
+          <p:cNvPr id="6" name="TextBox 5"/>
+          <p:cNvSpPr txBox="1"/>
+          <p:nvPr/>
+        </p:nvSpPr>
+        <p:spPr>
+          <a:xfrm>
+            <a:off x="4526280" y="1783080"/>
+            <a:ext cx="3108960" cy="4114800"/>
+          </a:xfrm>
+          <a:prstGeom prst="rect">
+            <a:avLst/>
+          </a:prstGeom>
+          <a:noFill/>
+        </p:spPr>
+        <p:txBody>
+          <a:bodyPr wrap="square">
+            <a:spAutoFit/>
+          </a:bodyPr>
+          <a:lstStyle/>
+          <a:p>
+            <a:pPr>
+              <a:defRPr sz="1300" b="1">
+                <a:solidFill>
+                  <a:srgbClr val="E63946"/>
+                </a:solidFill>
+              </a:defRPr>
+            </a:pPr>
+            <a:r>
+              <a:t>JOIN RISKS &amp; ORPHAN RECORDS</a:t>
+            </a:r>
+          </a:p>
+          <a:p>
+            <a:br/>
+            <a:pPr>
+              <a:defRPr sz="950">
+                <a:solidFill>
+                  <a:srgbClr val="FFFFFF"/>
+                </a:solidFill>
+              </a:defRPr>
+            </a:pPr>
+            <a:r>
+              <a:t>• Orphan Transactions (DQ-022) [OBSERVED]: 1,488 txns reference non-existent Account_IDs. Must be quarantined to avoid phantom postings.</a:t>
+            </a:r>
+          </a:p>
+          <a:p>
+            <a:br/>
+            <a:pPr>
+              <a:defRPr sz="950">
+                <a:solidFill>
+                  <a:srgbClr val="FFFFFF"/>
+                </a:solidFill>
+              </a:defRPr>
+            </a:pPr>
+            <a:r>
+              <a:t>• Orphan Loans (DQ-023) [OBSERVED]: 25 loans reference Customer_IDs not in Customer_Master. Direct credit exposure without KYC backing.</a:t>
+            </a:r>
+          </a:p>
+          <a:p>
+            <a:br/>
+            <a:pPr>
+              <a:defRPr sz="950">
+                <a:solidFill>
+                  <a:srgbClr val="FFFFFF"/>
+                </a:solidFill>
+              </a:defRPr>
+            </a:pPr>
+            <a:r>
+              <a:t>• Join Inflation Prevention [DERIVED]: Direct 1:N fan-out joins between Accounts and Transactions cause massive balance inflation if merged naively. Solved via domain pre-aggregation.</a:t>
+            </a:r>
+          </a:p>
+          <a:p>
+            <a:br/>
+            <a:pPr>
+              <a:defRPr sz="950">
+                <a:solidFill>
+                  <a:srgbClr val="FFFFFF"/>
+                </a:solidFill>
+              </a:defRPr>
+            </a:pPr>
+            <a:r>
+              <a:t>• Financial Balance Reconciliation: Accounts total ₹131.09 Cr matches Customer 360 exactly (0.00% discrepancy).</a:t>
+            </a:r>
+          </a:p>
+        </p:txBody>
+      </p:sp>
+      <p:sp>
+        <p:nvSpPr>
+          <p:cNvPr id="7" name="Rectangle 6"/>
+          <p:cNvSpPr/>
+          <p:nvPr/>
+        </p:nvSpPr>
+        <p:spPr>
+          <a:xfrm>
+            <a:off x="8046720" y="1645920"/>
+            <a:ext cx="3383280" cy="4389120"/>
+          </a:xfrm>
+          <a:prstGeom prst="rect">
+            <a:avLst/>
+          </a:prstGeom>
+          <a:solidFill>
+            <a:srgbClr val="1C2541"/>
+          </a:solidFill>
+          <a:ln w="19050">
+            <a:solidFill>
+              <a:srgbClr val="E9C46A"/>
+            </a:solidFill>
+          </a:ln>
+        </p:spPr>
+        <p:style>
+          <a:lnRef idx="1">
+            <a:schemeClr val="accent1"/>
+          </a:lnRef>
+          <a:fillRef idx="3">
+            <a:schemeClr val="accent1"/>
+          </a:fillRef>
+          <a:effectRef idx="2">
+            <a:schemeClr val="accent1"/>
+          </a:effectRef>
+          <a:fontRef idx="minor">
+            <a:schemeClr val="lt1"/>
+          </a:fontRef>
+        </p:style>
+        <p:txBody>
+          <a:bodyPr rtlCol="0" anchor="ctr"/>
+          <a:lstStyle/>
+          <a:p>
+            <a:pPr algn="ctr"/>
+          </a:p>
+        </p:txBody>
+      </p:sp>
+      <p:sp>
+        <p:nvSpPr>
+          <p:cNvPr id="8" name="TextBox 7"/>
+          <p:cNvSpPr txBox="1"/>
+          <p:nvPr/>
+        </p:nvSpPr>
+        <p:spPr>
+          <a:xfrm>
+            <a:off x="8183880" y="1783080"/>
+            <a:ext cx="3108960" cy="4114800"/>
+          </a:xfrm>
+          <a:prstGeom prst="rect">
+            <a:avLst/>
+          </a:prstGeom>
+          <a:noFill/>
+        </p:spPr>
+        <p:txBody>
+          <a:bodyPr wrap="square">
+            <a:spAutoFit/>
+          </a:bodyPr>
+          <a:lstStyle/>
+          <a:p>
+            <a:pPr>
+              <a:defRPr sz="1300" b="1">
+                <a:solidFill>
+                  <a:srgbClr val="E9C46A"/>
+                </a:solidFill>
+              </a:defRPr>
+            </a:pPr>
+            <a:r>
+              <a:t>MATCHING RULES &amp; ENFORCEMENT</a:t>
+            </a:r>
+          </a:p>
+          <a:p>
+            <a:br/>
+            <a:pPr>
+              <a:defRPr sz="950">
+                <a:solidFill>
+                  <a:srgbClr val="FFFFFF"/>
+                </a:solidFill>
+              </a:defRPr>
+            </a:pPr>
+            <a:r>
+              <a:t>• Customer Anchor: Customer_Master serves as the single anchor entity.</a:t>
+            </a:r>
+          </a:p>
+          <a:p>
+            <a:br/>
+            <a:pPr>
+              <a:defRPr sz="950">
+                <a:solidFill>
+                  <a:srgbClr val="FFFFFF"/>
+                </a:solidFill>
+              </a:defRPr>
+            </a:pPr>
+            <a:r>
+              <a:t>• Deduplication Matching: Customer_ID deduplicated; RapidFuzz multi-key matching across Name + DOB + PAN resolves 2,039 fuzzy candidate pairs.</a:t>
+            </a:r>
+          </a:p>
+          <a:p>
+            <a:br/>
+            <a:pPr>
+              <a:defRPr sz="950">
+                <a:solidFill>
+                  <a:srgbClr val="FFFFFF"/>
+                </a:solidFill>
+              </a:defRPr>
+            </a:pPr>
+            <a:r>
+              <a:t>• Directionality: Strict 1-to-many single-direction filtering enforced.</a:t>
+            </a:r>
+          </a:p>
+          <a:p>
+            <a:br/>
+            <a:pPr>
+              <a:defRPr sz="950">
+                <a:solidFill>
+                  <a:srgbClr val="FFFFFF"/>
+                </a:solidFill>
+              </a:defRPr>
+            </a:pPr>
+            <a:r>
+              <a:t>• Uniqueness Verification: Customer 360 grain verified as exactly 1 row per Customer_ID (10,200 distinct keys).</a:t>
+            </a:r>
+          </a:p>
+        </p:txBody>
+      </p:sp>
+    </p:spTree>
+  </p:cSld>
+  <p:clrMapOvr>
+    <a:masterClrMapping/>
+  </p:clrMapOvr>
+</p:sld>
+</file>
+
+<file path=ppt/slides/slide4.xml><?xml version="1.0" encoding="utf-8"?>
+<p:sld xmlns:a="http://schemas.openxmlformats.org/drawingml/2006/main" xmlns:p="http://schemas.openxmlformats.org/presentationml/2006/main" xmlns:r="http://schemas.openxmlformats.org/officeDocument/2006/relationships">
+  <p:cSld>
+    <p:bg>
+      <p:bgPr>
+        <a:solidFill>
+          <a:srgbClr val="0B132B"/>
+        </a:solidFill>
+        <a:effectLst/>
+      </p:bgPr>
+    </p:bg>
+    <p:spTree>
+      <p:nvGrpSpPr>
+        <p:cNvPr id="1" name=""/>
+        <p:cNvGrpSpPr/>
+        <p:nvPr/>
+      </p:nvGrpSpPr>
+      <p:grpSpPr/>
+      <p:sp>
+        <p:nvSpPr>
+          <p:cNvPr id="2" name="TextBox 1"/>
+          <p:cNvSpPr txBox="1"/>
+          <p:nvPr/>
+        </p:nvSpPr>
+        <p:spPr>
+          <a:xfrm>
+            <a:off x="731520" y="365760"/>
+            <a:ext cx="10698480" cy="914400"/>
+          </a:xfrm>
+          <a:prstGeom prst="rect">
+            <a:avLst/>
+          </a:prstGeom>
+          <a:noFill/>
+        </p:spPr>
+        <p:txBody>
+          <a:bodyPr wrap="square" lIns="0" tIns="0" rIns="0" bIns="0">
+            <a:spAutoFit/>
+          </a:bodyPr>
+          <a:lstStyle/>
+          <a:p>
+            <a:pPr>
+              <a:defRPr sz="1000" b="1">
+                <a:solidFill>
+                  <a:srgbClr val="48CAE4"/>
+                </a:solidFill>
+              </a:defRPr>
+            </a:pPr>
+            <a:r>
+              <a:t>DELIVERABLE 1 (CONT.) — 3 QUESTIONS PER DATASET</a:t>
+            </a:r>
+          </a:p>
+          <a:p>
+            <a:pPr>
+              <a:defRPr sz="2200" b="1">
+                <a:solidFill>
+                  <a:srgbClr val="FFFFFF"/>
+                </a:solidFill>
+              </a:defRPr>
+            </a:pPr>
+            <a:r>
+              <a:t>Deliverable 1: 18 Commercial &amp; Analytical Questions Formulated</a:t>
+            </a:r>
+          </a:p>
+        </p:txBody>
+      </p:sp>
+      <p:sp>
+        <p:nvSpPr>
+          <p:cNvPr id="3" name="Rectangle 2"/>
+          <p:cNvSpPr/>
+          <p:nvPr/>
+        </p:nvSpPr>
+        <p:spPr>
+          <a:xfrm>
+            <a:off x="731520" y="1645920"/>
+            <a:ext cx="10698480" cy="4389120"/>
+          </a:xfrm>
+          <a:prstGeom prst="rect">
+            <a:avLst/>
+          </a:prstGeom>
+          <a:solidFill>
+            <a:srgbClr val="1C2541"/>
+          </a:solidFill>
+          <a:ln>
+            <a:noFill/>
+          </a:ln>
+        </p:spPr>
+        <p:style>
+          <a:lnRef idx="1">
+            <a:schemeClr val="accent1"/>
+          </a:lnRef>
+          <a:fillRef idx="3">
+            <a:schemeClr val="accent1"/>
+          </a:fillRef>
+          <a:effectRef idx="2">
+            <a:schemeClr val="accent1"/>
+          </a:effectRef>
+          <a:fontRef idx="minor">
+            <a:schemeClr val="lt1"/>
+          </a:fontRef>
+        </p:style>
+        <p:txBody>
+          <a:bodyPr rtlCol="0" anchor="ctr"/>
+          <a:lstStyle/>
+          <a:p>
+            <a:pPr algn="ctr"/>
+          </a:p>
+        </p:txBody>
+      </p:sp>
+      <p:sp>
+        <p:nvSpPr>
+          <p:cNvPr id="4" name="TextBox 3"/>
+          <p:cNvSpPr txBox="1"/>
+          <p:nvPr/>
+        </p:nvSpPr>
+        <p:spPr>
+          <a:xfrm>
+            <a:off x="1005840" y="1828800"/>
+            <a:ext cx="10149840" cy="4023360"/>
+          </a:xfrm>
+          <a:prstGeom prst="rect">
+            <a:avLst/>
+          </a:prstGeom>
+          <a:noFill/>
+        </p:spPr>
+        <p:txBody>
+          <a:bodyPr wrap="square">
+            <a:spAutoFit/>
+          </a:bodyPr>
+          <a:lstStyle/>
+          <a:p>
+            <a:pPr>
+              <a:defRPr sz="1400" b="1">
+                <a:solidFill>
+                  <a:srgbClr val="48CAE4"/>
+                </a:solidFill>
+              </a:defRPr>
+            </a:pPr>
+            <a:r>
+              <a:t>Commercial Inquiries Connecting Data to Profitability, Liquidity, Service &amp; Risk</a:t>
+            </a:r>
+          </a:p>
+          <a:p>
+            <a:br/>
+            <a:pPr>
+              <a:defRPr sz="1000">
+                <a:solidFill>
+                  <a:srgbClr val="FFFFFF"/>
+                </a:solidFill>
+              </a:defRPr>
+            </a:pPr>
+            <a:r>
+              <a:t>1. Customer_Master: Q1 (Compliance) Segment KYC failure rates? | Q2 (Governance) Duplicate clusters sharing PAN/contact? | Q3 (Operations) Data quality profiles across onboarding cohorts.</a:t>
+            </a:r>
+          </a:p>
+          <a:p>
+            <a:br/>
+            <a:pPr>
+              <a:defRPr sz="1000">
+                <a:solidFill>
+                  <a:srgbClr val="FFFFFF"/>
+                </a:solidFill>
+              </a:defRPr>
+            </a:pPr>
+            <a:r>
+              <a:t>2. Accounts: Q4 (Liquidity/Risk) Branch balance concentration risk? | Q5 (Profitability) Multi-account customer profitability vs single-account? | Q6 (Service) RM portfolio value overload and capacity limits.</a:t>
+            </a:r>
+          </a:p>
+          <a:p>
+            <a:br/>
+            <a:pPr>
+              <a:defRPr sz="1000">
+                <a:solidFill>
+                  <a:srgbClr val="FFFFFF"/>
+                </a:solidFill>
+              </a:defRPr>
+            </a:pPr>
+            <a:r>
+              <a:t>3. Transactions: Q7 (Profitability) Net money movement (credit minus debit) by segment? | Q8 (Churn) Channels &amp; merchant categories dominating high-value outflows? | Q9 (Velocity) Trailing 90D debit acceleration.</a:t>
+            </a:r>
+          </a:p>
+          <a:p>
+            <a:br/>
+            <a:pPr>
+              <a:defRPr sz="1000">
+                <a:solidFill>
+                  <a:srgbClr val="FFFFFF"/>
+                </a:solidFill>
+              </a:defRPr>
+            </a:pPr>
+            <a:r>
+              <a:t>4. Loans: Q10 (Credit Risk) NPA concentration across loan products? | Q11 (Cross-Signal) Correlation between high DPD and service complaints? | Q12 (Stressed Assets) Total exposure in 60+ DPD status by segment.</a:t>
+            </a:r>
+          </a:p>
+          <a:p>
+            <a:br/>
+            <a:pPr>
+              <a:defRPr sz="1000">
+                <a:solidFill>
+                  <a:srgbClr val="FFFFFF"/>
+                </a:solidFill>
+              </a:defRPr>
+            </a:pPr>
+            <a:r>
+              <a:t>5. Customer_Service: Q13 (Service Quality) Categories with worst resolution TAT &amp; lowest CSAT? | Q14 (Churn) Linkage between fee disputes and large fund transfers? | Q15 (Operations) Branch complaint skew.</a:t>
+            </a:r>
+          </a:p>
+          <a:p>
+            <a:br/>
+            <a:pPr>
+              <a:defRPr sz="1000">
+                <a:solidFill>
+                  <a:srgbClr val="FFFFFF"/>
+                </a:solidFill>
+              </a:defRPr>
+            </a:pPr>
+            <a:r>
+              <a:t>6. Digital_Activity: Q16 (Digital Engagement) Login recency &amp; session duration drop in Wealth tier? | Q17 (Strategy) Feature narrowing preceding account abandonment? | Q18 (Cross-Signal) Transfer drop-off vs complaints.</a:t>
+            </a:r>
+          </a:p>
+        </p:txBody>
+      </p:sp>
+    </p:spTree>
+  </p:cSld>
+  <p:clrMapOvr>
+    <a:masterClrMapping/>
+  </p:clrMapOvr>
+</p:sld>
+</file>
+
+<file path=ppt/slides/slide5.xml><?xml version="1.0" encoding="utf-8"?>
+<p:sld xmlns:a="http://schemas.openxmlformats.org/drawingml/2006/main" xmlns:p="http://schemas.openxmlformats.org/presentationml/2006/main" xmlns:r="http://schemas.openxmlformats.org/officeDocument/2006/relationships">
+  <p:cSld>
+    <p:bg>
+      <p:bgPr>
+        <a:solidFill>
+          <a:srgbClr val="0B132B"/>
+        </a:solidFill>
+        <a:effectLst/>
+      </p:bgPr>
+    </p:bg>
+    <p:spTree>
+      <p:nvGrpSpPr>
+        <p:cNvPr id="1" name=""/>
+        <p:cNvGrpSpPr/>
+        <p:nvPr/>
+      </p:nvGrpSpPr>
+      <p:grpSpPr/>
+      <p:sp>
+        <p:nvSpPr>
+          <p:cNvPr id="2" name="TextBox 1"/>
+          <p:cNvSpPr txBox="1"/>
+          <p:nvPr/>
+        </p:nvSpPr>
+        <p:spPr>
+          <a:xfrm>
+            <a:off x="731520" y="365760"/>
+            <a:ext cx="10698480" cy="914400"/>
+          </a:xfrm>
+          <a:prstGeom prst="rect">
+            <a:avLst/>
+          </a:prstGeom>
+          <a:noFill/>
+        </p:spPr>
+        <p:txBody>
+          <a:bodyPr wrap="square" lIns="0" tIns="0" rIns="0" bIns="0">
+            <a:spAutoFit/>
+          </a:bodyPr>
+          <a:lstStyle/>
+          <a:p>
+            <a:pPr>
+              <a:defRPr sz="1000" b="1">
+                <a:solidFill>
+                  <a:srgbClr val="48CAE4"/>
+                </a:solidFill>
+              </a:defRPr>
+            </a:pPr>
+            <a:r>
+              <a:t>DELIVERABLE 2 — 30% WEIGHT (16 DEFECTS ACROSS 6 DIMENSIONS)</a:t>
+            </a:r>
+          </a:p>
+          <a:p>
+            <a:pPr>
+              <a:defRPr sz="2200" b="1">
+                <a:solidFill>
+                  <a:srgbClr val="FFFFFF"/>
+                </a:solidFill>
+              </a:defRPr>
+            </a:pPr>
+            <a:r>
+              <a:t>Deliverable 2: Forensic Data Quality Scorecard &amp; Remediation</a:t>
+            </a:r>
+          </a:p>
+        </p:txBody>
+      </p:sp>
+      <p:sp>
+        <p:nvSpPr>
+          <p:cNvPr id="3" name="Rectangle 2"/>
+          <p:cNvSpPr/>
+          <p:nvPr/>
+        </p:nvSpPr>
+        <p:spPr>
+          <a:xfrm>
+            <a:off x="731520" y="1645920"/>
+            <a:ext cx="3383280" cy="4389120"/>
+          </a:xfrm>
+          <a:prstGeom prst="rect">
+            <a:avLst/>
+          </a:prstGeom>
+          <a:solidFill>
+            <a:srgbClr val="1C2541"/>
+          </a:solidFill>
+          <a:ln w="19050">
+            <a:solidFill>
+              <a:srgbClr val="E63946"/>
+            </a:solidFill>
+          </a:ln>
+        </p:spPr>
+        <p:style>
+          <a:lnRef idx="1">
+            <a:schemeClr val="accent1"/>
+          </a:lnRef>
+          <a:fillRef idx="3">
+            <a:schemeClr val="accent1"/>
+          </a:fillRef>
+          <a:effectRef idx="2">
+            <a:schemeClr val="accent1"/>
+          </a:effectRef>
+          <a:fontRef idx="minor">
+            <a:schemeClr val="lt1"/>
+          </a:fontRef>
+        </p:style>
+        <p:txBody>
+          <a:bodyPr rtlCol="0" anchor="ctr"/>
+          <a:lstStyle/>
+          <a:p>
+            <a:pPr algn="ctr"/>
+          </a:p>
+        </p:txBody>
+      </p:sp>
+      <p:sp>
+        <p:nvSpPr>
+          <p:cNvPr id="4" name="TextBox 3"/>
+          <p:cNvSpPr txBox="1"/>
+          <p:nvPr/>
+        </p:nvSpPr>
+        <p:spPr>
+          <a:xfrm>
+            <a:off x="868680" y="1783080"/>
+            <a:ext cx="3108960" cy="4114800"/>
+          </a:xfrm>
+          <a:prstGeom prst="rect">
+            <a:avLst/>
+          </a:prstGeom>
+          <a:noFill/>
+        </p:spPr>
+        <p:txBody>
+          <a:bodyPr wrap="square">
+            <a:spAutoFit/>
+          </a:bodyPr>
+          <a:lstStyle/>
+          <a:p>
+            <a:pPr>
+              <a:defRPr sz="1300" b="1">
+                <a:solidFill>
+                  <a:srgbClr val="E63946"/>
+                </a:solidFill>
+              </a:defRPr>
+            </a:pPr>
+            <a:r>
+              <a:t>7 CRITICAL DEFECTS</a:t>
+            </a:r>
+          </a:p>
+          <a:p>
+            <a:br/>
+            <a:pPr>
+              <a:defRPr sz="950">
+                <a:solidFill>
+                  <a:srgbClr val="FFFFFF"/>
+                </a:solidFill>
+              </a:defRPr>
+            </a:pPr>
+            <a:r>
+              <a:t>• Missing PAN (DQ-001): 20 accounts missing tax identifiers. Remediate via tax portal.</a:t>
+            </a:r>
+          </a:p>
+          <a:p>
+            <a:br/>
+            <a:pPr>
+              <a:defRPr sz="950">
+                <a:solidFill>
+                  <a:srgbClr val="FFFFFF"/>
+                </a:solidFill>
+              </a:defRPr>
+            </a:pPr>
+            <a:r>
+              <a:t>• Duplicate PAN (DQ-007): 480 accounts sharing PAN credentials. Major AML/tax breach.</a:t>
+            </a:r>
+          </a:p>
+          <a:p>
+            <a:br/>
+            <a:pPr>
+              <a:defRPr sz="950">
+                <a:solidFill>
+                  <a:srgbClr val="FFFFFF"/>
+                </a:solidFill>
+              </a:defRPr>
+            </a:pPr>
+            <a:r>
+              <a:t>• Invalid PAN Regex (DQ-009): 82 format violations. Implement gateway regex check.</a:t>
+            </a:r>
+          </a:p>
+          <a:p>
+            <a:br/>
+            <a:pPr>
+              <a:defRPr sz="950">
+                <a:solidFill>
+                  <a:srgbClr val="FFFFFF"/>
+                </a:solidFill>
+              </a:defRPr>
+            </a:pPr>
+            <a:r>
+              <a:t>• Orphan Transactions (DQ-022): 1,488 txns tied to non-existent accounts.</a:t>
+            </a:r>
+          </a:p>
+          <a:p>
+            <a:br/>
+            <a:pPr>
+              <a:defRPr sz="950">
+                <a:solidFill>
+                  <a:srgbClr val="FFFFFF"/>
+                </a:solidFill>
+              </a:defRPr>
+            </a:pPr>
+            <a:r>
+              <a:t>• Orphan Loans (DQ-023): 25 loans missing Customer_Master anchors.</a:t>
+            </a:r>
+          </a:p>
+          <a:p>
+            <a:br/>
+            <a:pPr>
+              <a:defRPr sz="950">
+                <a:solidFill>
+                  <a:srgbClr val="FFFFFF"/>
+                </a:solidFill>
+              </a:defRPr>
+            </a:pPr>
+            <a:r>
+              <a:t>• NPA Flag Mismatch (DQ-029): 10 loans classified NPA despite DPD &lt;= 90.</a:t>
+            </a:r>
+          </a:p>
+        </p:txBody>
+      </p:sp>
+      <p:sp>
+        <p:nvSpPr>
+          <p:cNvPr id="5" name="Rectangle 4"/>
+          <p:cNvSpPr/>
+          <p:nvPr/>
+        </p:nvSpPr>
+        <p:spPr>
+          <a:xfrm>
+            <a:off x="4389120" y="1645920"/>
+            <a:ext cx="3383280" cy="4389120"/>
+          </a:xfrm>
+          <a:prstGeom prst="rect">
+            <a:avLst/>
+          </a:prstGeom>
+          <a:solidFill>
+            <a:srgbClr val="1C2541"/>
+          </a:solidFill>
+          <a:ln w="19050">
+            <a:solidFill>
+              <a:srgbClr val="F4A261"/>
+            </a:solidFill>
+          </a:ln>
+        </p:spPr>
+        <p:style>
+          <a:lnRef idx="1">
+            <a:schemeClr val="accent1"/>
+          </a:lnRef>
+          <a:fillRef idx="3">
+            <a:schemeClr val="accent1"/>
+          </a:fillRef>
+          <a:effectRef idx="2">
+            <a:schemeClr val="accent1"/>
+          </a:effectRef>
+          <a:fontRef idx="minor">
+            <a:schemeClr val="lt1"/>
+          </a:fontRef>
+        </p:style>
+        <p:txBody>
+          <a:bodyPr rtlCol="0" anchor="ctr"/>
+          <a:lstStyle/>
+          <a:p>
+            <a:pPr algn="ctr"/>
+          </a:p>
+        </p:txBody>
+      </p:sp>
+      <p:sp>
+        <p:nvSpPr>
+          <p:cNvPr id="6" name="TextBox 5"/>
+          <p:cNvSpPr txBox="1"/>
+          <p:nvPr/>
+        </p:nvSpPr>
+        <p:spPr>
+          <a:xfrm>
+            <a:off x="4526280" y="1783080"/>
+            <a:ext cx="3108960" cy="4114800"/>
+          </a:xfrm>
+          <a:prstGeom prst="rect">
+            <a:avLst/>
+          </a:prstGeom>
+          <a:noFill/>
+        </p:spPr>
+        <p:txBody>
+          <a:bodyPr wrap="square">
+            <a:spAutoFit/>
+          </a:bodyPr>
+          <a:lstStyle/>
+          <a:p>
+            <a:pPr>
+              <a:defRPr sz="1300" b="1">
+                <a:solidFill>
+                  <a:srgbClr val="F4A261"/>
+                </a:solidFill>
+              </a:defRPr>
+            </a:pPr>
+            <a:r>
+              <a:t>7 HIGH-SEVERITY DEFECTS</a:t>
+            </a:r>
+          </a:p>
+          <a:p>
+            <a:br/>
+            <a:pPr>
+              <a:defRPr sz="950">
+                <a:solidFill>
+                  <a:srgbClr val="FFFFFF"/>
+                </a:solidFill>
+              </a:defRPr>
+            </a:pPr>
+            <a:r>
+              <a:t>• Missing KYC Status (DQ-004): 306 customer records incomplete.</a:t>
+            </a:r>
+          </a:p>
+          <a:p>
+            <a:br/>
+            <a:pPr>
+              <a:defRPr sz="950">
+                <a:solidFill>
+                  <a:srgbClr val="FFFFFF"/>
+                </a:solidFill>
+              </a:defRPr>
+            </a:pPr>
+            <a:r>
+              <a:t>• Duplicate Emails (DQ-008): 352 accounts sharing emails.</a:t>
+            </a:r>
+          </a:p>
+          <a:p>
+            <a:br/>
+            <a:pPr>
+              <a:defRPr sz="950">
+                <a:solidFill>
+                  <a:srgbClr val="FFFFFF"/>
+                </a:solidFill>
+              </a:defRPr>
+            </a:pPr>
+            <a:r>
+              <a:t>• Invalid Email Format (DQ-010): 102 syntax errors.</a:t>
+            </a:r>
+          </a:p>
+          <a:p>
+            <a:br/>
+            <a:pPr>
+              <a:defRPr sz="950">
+                <a:solidFill>
+                  <a:srgbClr val="FFFFFF"/>
+                </a:solidFill>
+              </a:defRPr>
+            </a:pPr>
+            <a:r>
+              <a:t>• Future Onboarding Dates (DQ-024): 46 temporal anomalies.</a:t>
+            </a:r>
+          </a:p>
+          <a:p>
+            <a:br/>
+            <a:pPr>
+              <a:defRPr sz="950">
+                <a:solidFill>
+                  <a:srgbClr val="FFFFFF"/>
+                </a:solidFill>
+              </a:defRPr>
+            </a:pPr>
+            <a:r>
+              <a:t>• Future Account Open Dates (DQ-025): 66 accounts opened up to 2027.</a:t>
+            </a:r>
+          </a:p>
+          <a:p>
+            <a:br/>
+            <a:pPr>
+              <a:defRPr sz="950">
+                <a:solidFill>
+                  <a:srgbClr val="FFFFFF"/>
+                </a:solidFill>
+              </a:defRPr>
+            </a:pPr>
+            <a:r>
+              <a:t>• Negative Balance (DQ-027): 140 non-overdraft accounts with negative balance.</a:t>
+            </a:r>
+          </a:p>
+        </p:txBody>
+      </p:sp>
+      <p:sp>
+        <p:nvSpPr>
+          <p:cNvPr id="7" name="Rectangle 6"/>
+          <p:cNvSpPr/>
+          <p:nvPr/>
+        </p:nvSpPr>
+        <p:spPr>
+          <a:xfrm>
+            <a:off x="8046720" y="1645920"/>
+            <a:ext cx="3383280" cy="4389120"/>
+          </a:xfrm>
+          <a:prstGeom prst="rect">
+            <a:avLst/>
+          </a:prstGeom>
+          <a:solidFill>
+            <a:srgbClr val="1C2541"/>
+          </a:solidFill>
+          <a:ln w="19050">
+            <a:solidFill>
+              <a:srgbClr val="2A9D8F"/>
+            </a:solidFill>
+          </a:ln>
+        </p:spPr>
+        <p:style>
+          <a:lnRef idx="1">
+            <a:schemeClr val="accent1"/>
+          </a:lnRef>
+          <a:fillRef idx="3">
+            <a:schemeClr val="accent1"/>
+          </a:fillRef>
+          <a:effectRef idx="2">
+            <a:schemeClr val="accent1"/>
+          </a:effectRef>
+          <a:fontRef idx="minor">
+            <a:schemeClr val="lt1"/>
+          </a:fontRef>
+        </p:style>
+        <p:txBody>
+          <a:bodyPr rtlCol="0" anchor="ctr"/>
+          <a:lstStyle/>
+          <a:p>
+            <a:pPr algn="ctr"/>
+          </a:p>
+        </p:txBody>
+      </p:sp>
+      <p:sp>
+        <p:nvSpPr>
+          <p:cNvPr id="8" name="TextBox 7"/>
+          <p:cNvSpPr txBox="1"/>
+          <p:nvPr/>
+        </p:nvSpPr>
+        <p:spPr>
+          <a:xfrm>
+            <a:off x="8183880" y="1783080"/>
+            <a:ext cx="3108960" cy="4114800"/>
+          </a:xfrm>
+          <a:prstGeom prst="rect">
+            <a:avLst/>
+          </a:prstGeom>
+          <a:noFill/>
+        </p:spPr>
+        <p:txBody>
+          <a:bodyPr wrap="square">
+            <a:spAutoFit/>
+          </a:bodyPr>
+          <a:lstStyle/>
+          <a:p>
+            <a:pPr>
+              <a:defRPr sz="1300" b="1">
+                <a:solidFill>
+                  <a:srgbClr val="2A9D8F"/>
+                </a:solidFill>
+              </a:defRPr>
+            </a:pPr>
+            <a:r>
+              <a:t>REMEDIATION &amp; CONTROLS</a:t>
+            </a:r>
+          </a:p>
+          <a:p>
+            <a:br/>
+            <a:pPr>
+              <a:defRPr sz="950">
+                <a:solidFill>
+                  <a:srgbClr val="FFFFFF"/>
+                </a:solidFill>
+              </a:defRPr>
+            </a:pPr>
+            <a:r>
+              <a:t>• Physical Quarantine: Violating records isolated in data/quarantine/ (13 CSV extracts).</a:t>
+            </a:r>
+          </a:p>
+          <a:p>
+            <a:br/>
+            <a:pPr>
+              <a:defRPr sz="950">
+                <a:solidFill>
+                  <a:srgbClr val="FFFFFF"/>
+                </a:solidFill>
+              </a:defRPr>
+            </a:pPr>
+            <a:r>
+              <a:t>• Entity Resolution: RapidFuzz matched 2,039 fuzzy duplicate pairs in entity_resolution.xlsx.</a:t>
+            </a:r>
+          </a:p>
+          <a:p>
+            <a:br/>
+            <a:pPr>
+              <a:defRPr sz="950">
+                <a:solidFill>
+                  <a:srgbClr val="FFFFFF"/>
+                </a:solidFill>
+              </a:defRPr>
+            </a:pPr>
+            <a:r>
+              <a:t>• Preventive Gateway: Enforce schema-level constraints on PAN regex and future dates.</a:t>
+            </a:r>
+          </a:p>
+          <a:p>
+            <a:br/>
+            <a:pPr>
+              <a:defRPr sz="950">
+                <a:solidFill>
+                  <a:srgbClr val="FFFFFF"/>
+                </a:solidFill>
+              </a:defRPr>
+            </a:pPr>
+            <a:r>
+              <a:t>• Detective Automation: Automated daily DQ script alerts ExCo to newly surfaced anomalies.</a:t>
+            </a:r>
+          </a:p>
+          <a:p>
+            <a:br/>
+            <a:pPr>
+              <a:defRPr sz="950">
+                <a:solidFill>
+                  <a:srgbClr val="FFFFFF"/>
+                </a:solidFill>
+              </a:defRPr>
+            </a:pPr>
+            <a:r>
+              <a:t>• Complete Backing: Backed by output/data_quality_scorecard.xlsx &amp; data_quality_defect_log.xlsx.</a:t>
+            </a:r>
+          </a:p>
+        </p:txBody>
+      </p:sp>
+    </p:spTree>
+  </p:cSld>
+  <p:clrMapOvr>
+    <a:masterClrMapping/>
+  </p:clrMapOvr>
+</p:sld>
+</file>
+
+<file path=ppt/slides/slide6.xml><?xml version="1.0" encoding="utf-8"?>
+<p:sld xmlns:a="http://schemas.openxmlformats.org/drawingml/2006/main" xmlns:p="http://schemas.openxmlformats.org/presentationml/2006/main" xmlns:r="http://schemas.openxmlformats.org/officeDocument/2006/relationships">
+  <p:cSld>
+    <p:bg>
+      <p:bgPr>
+        <a:solidFill>
+          <a:srgbClr val="0B132B"/>
+        </a:solidFill>
+        <a:effectLst/>
+      </p:bgPr>
+    </p:bg>
+    <p:spTree>
+      <p:nvGrpSpPr>
+        <p:cNvPr id="1" name=""/>
+        <p:cNvGrpSpPr/>
+        <p:nvPr/>
+      </p:nvGrpSpPr>
+      <p:grpSpPr/>
+      <p:sp>
+        <p:nvSpPr>
+          <p:cNvPr id="2" name="TextBox 1"/>
+          <p:cNvSpPr txBox="1"/>
+          <p:nvPr/>
+        </p:nvSpPr>
+        <p:spPr>
+          <a:xfrm>
+            <a:off x="731520" y="365760"/>
+            <a:ext cx="10698480" cy="914400"/>
+          </a:xfrm>
+          <a:prstGeom prst="rect">
+            <a:avLst/>
+          </a:prstGeom>
+          <a:noFill/>
+        </p:spPr>
+        <p:txBody>
+          <a:bodyPr wrap="square" lIns="0" tIns="0" rIns="0" bIns="0">
+            <a:spAutoFit/>
+          </a:bodyPr>
+          <a:lstStyle/>
+          <a:p>
+            <a:pPr>
+              <a:defRPr sz="1000" b="1">
+                <a:solidFill>
+                  <a:srgbClr val="48CAE4"/>
+                </a:solidFill>
+              </a:defRPr>
+            </a:pPr>
+            <a:r>
+              <a:t>DELIVERABLE 3 — 20% WEIGHT (20 STANDARDIZED FIELDS)</a:t>
+            </a:r>
+          </a:p>
+          <a:p>
+            <a:pPr>
+              <a:defRPr sz="2200" b="1">
+                <a:solidFill>
+                  <a:srgbClr val="FFFFFF"/>
+                </a:solidFill>
+              </a:defRPr>
+            </a:pPr>
+            <a:r>
+              <a:t>Deliverable 3: Enterprise Business Glossary &amp; Data Dictionary</a:t>
+            </a:r>
+          </a:p>
+        </p:txBody>
+      </p:sp>
+      <p:sp>
+        <p:nvSpPr>
+          <p:cNvPr id="3" name="Rectangle 2"/>
+          <p:cNvSpPr/>
+          <p:nvPr/>
+        </p:nvSpPr>
+        <p:spPr>
+          <a:xfrm>
+            <a:off x="731520" y="1645920"/>
+            <a:ext cx="3383280" cy="4389120"/>
+          </a:xfrm>
+          <a:prstGeom prst="rect">
+            <a:avLst/>
+          </a:prstGeom>
+          <a:solidFill>
+            <a:srgbClr val="1C2541"/>
+          </a:solidFill>
+          <a:ln w="19050">
+            <a:solidFill>
+              <a:srgbClr val="48CAE4"/>
+            </a:solidFill>
+          </a:ln>
+        </p:spPr>
+        <p:style>
+          <a:lnRef idx="1">
+            <a:schemeClr val="accent1"/>
+          </a:lnRef>
+          <a:fillRef idx="3">
+            <a:schemeClr val="accent1"/>
+          </a:fillRef>
+          <a:effectRef idx="2">
+            <a:schemeClr val="accent1"/>
+          </a:effectRef>
+          <a:fontRef idx="minor">
+            <a:schemeClr val="lt1"/>
+          </a:fontRef>
+        </p:style>
+        <p:txBody>
+          <a:bodyPr rtlCol="0" anchor="ctr"/>
+          <a:lstStyle/>
+          <a:p>
+            <a:pPr algn="ctr"/>
+          </a:p>
+        </p:txBody>
+      </p:sp>
+      <p:sp>
+        <p:nvSpPr>
+          <p:cNvPr id="4" name="TextBox 3"/>
+          <p:cNvSpPr txBox="1"/>
+          <p:nvPr/>
+        </p:nvSpPr>
+        <p:spPr>
+          <a:xfrm>
+            <a:off x="868680" y="1783080"/>
+            <a:ext cx="3108960" cy="4114800"/>
+          </a:xfrm>
+          <a:prstGeom prst="rect">
+            <a:avLst/>
+          </a:prstGeom>
+          <a:noFill/>
+        </p:spPr>
+        <p:txBody>
+          <a:bodyPr wrap="square">
+            <a:spAutoFit/>
+          </a:bodyPr>
+          <a:lstStyle/>
+          <a:p>
+            <a:pPr>
+              <a:defRPr sz="1200" b="1">
+                <a:solidFill>
+                  <a:srgbClr val="48CAE4"/>
+                </a:solidFill>
+              </a:defRPr>
+            </a:pPr>
+            <a:r>
+              <a:t>CUSTOMER_MASTER (9 FIELDS)</a:t>
+            </a:r>
+          </a:p>
+          <a:p>
+            <a:br/>
+            <a:pPr>
+              <a:defRPr sz="950">
+                <a:solidFill>
+                  <a:srgbClr val="FFFFFF"/>
+                </a:solidFill>
+              </a:defRPr>
+            </a:pPr>
+            <a:r>
+              <a:t>• Customer_ID: VARCHAR | Pattern: ^CUST_\d{5}$ | High Trust (System PK) | Steward: Core Banking Ops.</a:t>
+            </a:r>
+          </a:p>
+          <a:p>
+            <a:br/>
+            <a:pPr>
+              <a:defRPr sz="950">
+                <a:solidFill>
+                  <a:srgbClr val="FFFFFF"/>
+                </a:solidFill>
+              </a:defRPr>
+            </a:pPr>
+            <a:r>
+              <a:t>• Name: VARCHAR | Free text | Title cased, Unicode NFKD clean | Steward: Onboarding Desk.</a:t>
+            </a:r>
+          </a:p>
+          <a:p>
+            <a:br/>
+            <a:pPr>
+              <a:defRPr sz="950">
+                <a:solidFill>
+                  <a:srgbClr val="FFFFFF"/>
+                </a:solidFill>
+              </a:defRPr>
+            </a:pPr>
+            <a:r>
+              <a:t>• DOB: DATE | ISO 8601 | Range: 18–100 yrs | High Trust (KYC verified) | Steward: Compliance.</a:t>
+            </a:r>
+          </a:p>
+          <a:p>
+            <a:br/>
+            <a:pPr>
+              <a:defRPr sz="950">
+                <a:solidFill>
+                  <a:srgbClr val="FFFFFF"/>
+                </a:solidFill>
+              </a:defRPr>
+            </a:pPr>
+            <a:r>
+              <a:t>• PAN: CHAR(10) | Regex: ^[A-Z]{5}[0-9]{4}[A-Z]$ | Medium Trust (Entry errors) | Steward: Tax Compliance.</a:t>
+            </a:r>
+          </a:p>
+          <a:p>
+            <a:br/>
+            <a:pPr>
+              <a:defRPr sz="950">
+                <a:solidFill>
+                  <a:srgbClr val="FFFFFF"/>
+                </a:solidFill>
+              </a:defRPr>
+            </a:pPr>
+            <a:r>
+              <a:t>• Email &amp; Phone: Standardized RFC 5322 &amp; E.164 numeric formatting | Steward: Digital Channels.</a:t>
+            </a:r>
+          </a:p>
+          <a:p>
+            <a:br/>
+            <a:pPr>
+              <a:defRPr sz="950">
+                <a:solidFill>
+                  <a:srgbClr val="FFFFFF"/>
+                </a:solidFill>
+              </a:defRPr>
+            </a:pPr>
+            <a:r>
+              <a:t>• Segment: Permitted: Wealth, Privileged, Mass Retail | Steward: Retail Product Head.</a:t>
+            </a:r>
+          </a:p>
+          <a:p>
+            <a:br/>
+            <a:pPr>
+              <a:defRPr sz="950">
+                <a:solidFill>
+                  <a:srgbClr val="FFFFFF"/>
+                </a:solidFill>
+              </a:defRPr>
+            </a:pPr>
+            <a:r>
+              <a:t>• KYC_Status: Permitted: Completed, Pending, Failed | Steward: Chief Compliance Officer.</a:t>
+            </a:r>
+          </a:p>
+        </p:txBody>
+      </p:sp>
+      <p:sp>
+        <p:nvSpPr>
+          <p:cNvPr id="5" name="Rectangle 4"/>
+          <p:cNvSpPr/>
+          <p:nvPr/>
+        </p:nvSpPr>
+        <p:spPr>
+          <a:xfrm>
+            <a:off x="4389120" y="1645920"/>
+            <a:ext cx="3383280" cy="4389120"/>
+          </a:xfrm>
+          <a:prstGeom prst="rect">
+            <a:avLst/>
+          </a:prstGeom>
+          <a:solidFill>
+            <a:srgbClr val="1C2541"/>
+          </a:solidFill>
+          <a:ln w="19050">
+            <a:solidFill>
+              <a:srgbClr val="F4A261"/>
+            </a:solidFill>
+          </a:ln>
+        </p:spPr>
+        <p:style>
+          <a:lnRef idx="1">
+            <a:schemeClr val="accent1"/>
+          </a:lnRef>
+          <a:fillRef idx="3">
+            <a:schemeClr val="accent1"/>
+          </a:fillRef>
+          <a:effectRef idx="2">
+            <a:schemeClr val="accent1"/>
+          </a:effectRef>
+          <a:fontRef idx="minor">
+            <a:schemeClr val="lt1"/>
+          </a:fontRef>
+        </p:style>
+        <p:txBody>
+          <a:bodyPr rtlCol="0" anchor="ctr"/>
+          <a:lstStyle/>
+          <a:p>
+            <a:pPr algn="ctr"/>
+          </a:p>
+        </p:txBody>
+      </p:sp>
+      <p:sp>
+        <p:nvSpPr>
+          <p:cNvPr id="6" name="TextBox 5"/>
+          <p:cNvSpPr txBox="1"/>
+          <p:nvPr/>
+        </p:nvSpPr>
+        <p:spPr>
+          <a:xfrm>
+            <a:off x="4526280" y="1783080"/>
+            <a:ext cx="3108960" cy="4114800"/>
+          </a:xfrm>
+          <a:prstGeom prst="rect">
+            <a:avLst/>
+          </a:prstGeom>
+          <a:noFill/>
+        </p:spPr>
+        <p:txBody>
+          <a:bodyPr wrap="square">
+            <a:spAutoFit/>
+          </a:bodyPr>
+          <a:lstStyle/>
+          <a:p>
+            <a:pPr>
+              <a:defRPr sz="1200" b="1">
+                <a:solidFill>
+                  <a:srgbClr val="F4A261"/>
+                </a:solidFill>
+              </a:defRPr>
+            </a:pPr>
+            <a:r>
+              <a:t>LOANS &amp; CREDIT (4 FIELDS)</a:t>
+            </a:r>
+          </a:p>
+          <a:p>
+            <a:br/>
+            <a:pPr>
+              <a:defRPr sz="950">
+                <a:solidFill>
+                  <a:srgbClr val="FFFFFF"/>
+                </a:solidFill>
+              </a:defRPr>
+            </a:pPr>
+            <a:r>
+              <a:t>• Loan_ID: VARCHAR | Pattern: ^LN_\d{5}$ | Unique credit facility identifier | Steward: Lending Ops.</a:t>
+            </a:r>
+          </a:p>
+          <a:p>
+            <a:br/>
+            <a:pPr>
+              <a:defRPr sz="950">
+                <a:solidFill>
+                  <a:srgbClr val="FFFFFF"/>
+                </a:solidFill>
+              </a:defRPr>
+            </a:pPr>
+            <a:r>
+              <a:t>• Loan_Amount: DECIMAL(14,2) | Sanctioned principal | Range: &gt; 0 | Steward: Credit Underwriting.</a:t>
+            </a:r>
+          </a:p>
+          <a:p>
+            <a:br/>
+            <a:pPr>
+              <a:defRPr sz="950">
+                <a:solidFill>
+                  <a:srgbClr val="FFFFFF"/>
+                </a:solidFill>
+              </a:defRPr>
+            </a:pPr>
+            <a:r>
+              <a:t>• DPD_Days: INTEGER | Days past due | Range: 0–360+ | Primary delinquency metric | Steward: Collections.</a:t>
+            </a:r>
+          </a:p>
+          <a:p>
+            <a:br/>
+            <a:pPr>
+              <a:defRPr sz="950">
+                <a:solidFill>
+                  <a:srgbClr val="FFFFFF"/>
+                </a:solidFill>
+              </a:defRPr>
+            </a:pPr>
+            <a:r>
+              <a:t>• NPA_Flag: CHAR(1) | Permitted: 'Y', 'N' | RBI IRAC 90+ DPD norm | Steward: Chief Risk Officer.</a:t>
+            </a:r>
+          </a:p>
+          <a:p>
+            <a:br/>
+            <a:pPr>
+              <a:defRPr sz="950">
+                <a:solidFill>
+                  <a:srgbClr val="FFFFFF"/>
+                </a:solidFill>
+              </a:defRPr>
+            </a:pPr>
+            <a:r>
+              <a:t>• Interest_Rate: DECIMAL(5,2) | Annualized interest percentage | Steward: Asset-Liability Committee.</a:t>
+            </a:r>
+          </a:p>
+        </p:txBody>
+      </p:sp>
+      <p:sp>
+        <p:nvSpPr>
+          <p:cNvPr id="7" name="Rectangle 6"/>
+          <p:cNvSpPr/>
+          <p:nvPr/>
+        </p:nvSpPr>
+        <p:spPr>
+          <a:xfrm>
+            <a:off x="8046720" y="1645920"/>
+            <a:ext cx="3383280" cy="4389120"/>
+          </a:xfrm>
+          <a:prstGeom prst="rect">
+            <a:avLst/>
+          </a:prstGeom>
+          <a:solidFill>
+            <a:srgbClr val="1C2541"/>
+          </a:solidFill>
+          <a:ln w="19050">
+            <a:solidFill>
+              <a:srgbClr val="E9C46A"/>
+            </a:solidFill>
+          </a:ln>
+        </p:spPr>
+        <p:style>
+          <a:lnRef idx="1">
+            <a:schemeClr val="accent1"/>
+          </a:lnRef>
+          <a:fillRef idx="3">
+            <a:schemeClr val="accent1"/>
+          </a:fillRef>
+          <a:effectRef idx="2">
+            <a:schemeClr val="accent1"/>
+          </a:effectRef>
+          <a:fontRef idx="minor">
+            <a:schemeClr val="lt1"/>
+          </a:fontRef>
+        </p:style>
+        <p:txBody>
+          <a:bodyPr rtlCol="0" anchor="ctr"/>
+          <a:lstStyle/>
+          <a:p>
+            <a:pPr algn="ctr"/>
+          </a:p>
+        </p:txBody>
+      </p:sp>
+      <p:sp>
+        <p:nvSpPr>
+          <p:cNvPr id="8" name="TextBox 7"/>
+          <p:cNvSpPr txBox="1"/>
+          <p:nvPr/>
+        </p:nvSpPr>
+        <p:spPr>
+          <a:xfrm>
+            <a:off x="8183880" y="1783080"/>
+            <a:ext cx="3108960" cy="4114800"/>
+          </a:xfrm>
+          <a:prstGeom prst="rect">
+            <a:avLst/>
+          </a:prstGeom>
+          <a:noFill/>
+        </p:spPr>
+        <p:txBody>
+          <a:bodyPr wrap="square">
+            <a:spAutoFit/>
+          </a:bodyPr>
+          <a:lstStyle/>
+          <a:p>
+            <a:pPr>
+              <a:defRPr sz="1200" b="1">
+                <a:solidFill>
+                  <a:srgbClr val="E9C46A"/>
+                </a:solidFill>
+              </a:defRPr>
+            </a:pPr>
+            <a:r>
+              <a:t>ACCOUNTS, TXN, CS &amp; DIGITAL</a:t>
+            </a:r>
+          </a:p>
+          <a:p>
+            <a:br/>
+            <a:pPr>
+              <a:defRPr sz="950">
+                <a:solidFill>
+                  <a:srgbClr val="FFFFFF"/>
+                </a:solidFill>
+              </a:defRPr>
+            </a:pPr>
+            <a:r>
+              <a:t>• Balance: Ledger deposit balance in INR | Crucial for liquidity &amp; churn impact | Steward: Treasury.</a:t>
+            </a:r>
+          </a:p>
+          <a:p>
+            <a:br/>
+            <a:pPr>
+              <a:defRPr sz="950">
+                <a:solidFill>
+                  <a:srgbClr val="FFFFFF"/>
+                </a:solidFill>
+              </a:defRPr>
+            </a:pPr>
+            <a:r>
+              <a:t>• Amount: Transaction debit/credit magnitude in INR | Steward: Payment Operations.</a:t>
+            </a:r>
+          </a:p>
+          <a:p>
+            <a:br/>
+            <a:pPr>
+              <a:defRPr sz="950">
+                <a:solidFill>
+                  <a:srgbClr val="FFFFFF"/>
+                </a:solidFill>
+              </a:defRPr>
+            </a:pPr>
+            <a:r>
+              <a:t>• CSAT_Score: Integer scale (1–5) | Post-resolution satisfaction | Steward: Head of CX.</a:t>
+            </a:r>
+          </a:p>
+          <a:p>
+            <a:br/>
+            <a:pPr>
+              <a:defRPr sz="950">
+                <a:solidFill>
+                  <a:srgbClr val="FFFFFF"/>
+                </a:solidFill>
+              </a:defRPr>
+            </a:pPr>
+            <a:r>
+              <a:t>• Resolution_TAT_Days: Days to close grievance | SLA monitoring | Steward: Service Operations.</a:t>
+            </a:r>
+          </a:p>
+          <a:p>
+            <a:br/>
+            <a:pPr>
+              <a:defRPr sz="950">
+                <a:solidFill>
+                  <a:srgbClr val="FFFFFF"/>
+                </a:solidFill>
+              </a:defRPr>
+            </a:pPr>
+            <a:r>
+              <a:t>• Session_Duration_Min: App engagement telemetry in minutes | Steward: Digital Product Lead.</a:t>
+            </a:r>
+          </a:p>
+          <a:p>
+            <a:br/>
+            <a:pPr>
+              <a:defRPr sz="950">
+                <a:solidFill>
+                  <a:srgbClr val="FFFFFF"/>
+                </a:solidFill>
+              </a:defRPr>
+            </a:pPr>
+            <a:r>
+              <a:t>• Complete Backing: Backed by output/business_glossary.xlsx (12 sheets of technical &amp; business rules).</a:t>
+            </a:r>
+          </a:p>
+        </p:txBody>
+      </p:sp>
+    </p:spTree>
+  </p:cSld>
+  <p:clrMapOvr>
+    <a:masterClrMapping/>
+  </p:clrMapOvr>
+</p:sld>
+</file>
+
+<file path=ppt/slides/slide7.xml><?xml version="1.0" encoding="utf-8"?>
+<p:sld xmlns:a="http://schemas.openxmlformats.org/drawingml/2006/main" xmlns:p="http://schemas.openxmlformats.org/presentationml/2006/main" xmlns:r="http://schemas.openxmlformats.org/officeDocument/2006/relationships">
+  <p:cSld>
+    <p:bg>
+      <p:bgPr>
+        <a:solidFill>
+          <a:srgbClr val="0B132B"/>
+        </a:solidFill>
+        <a:effectLst/>
+      </p:bgPr>
+    </p:bg>
+    <p:spTree>
+      <p:nvGrpSpPr>
+        <p:cNvPr id="1" name=""/>
+        <p:cNvGrpSpPr/>
+        <p:nvPr/>
+      </p:nvGrpSpPr>
+      <p:grpSpPr/>
+      <p:sp>
+        <p:nvSpPr>
+          <p:cNvPr id="2" name="TextBox 1"/>
+          <p:cNvSpPr txBox="1"/>
+          <p:nvPr/>
+        </p:nvSpPr>
+        <p:spPr>
+          <a:xfrm>
+            <a:off x="731520" y="365760"/>
+            <a:ext cx="10698480" cy="914400"/>
+          </a:xfrm>
+          <a:prstGeom prst="rect">
+            <a:avLst/>
+          </a:prstGeom>
+          <a:noFill/>
+        </p:spPr>
+        <p:txBody>
+          <a:bodyPr wrap="square" lIns="0" tIns="0" rIns="0" bIns="0">
+            <a:spAutoFit/>
+          </a:bodyPr>
+          <a:lstStyle/>
+          <a:p>
+            <a:pPr>
+              <a:defRPr sz="1000" b="1">
+                <a:solidFill>
+                  <a:srgbClr val="48CAE4"/>
+                </a:solidFill>
+              </a:defRPr>
+            </a:pPr>
+            <a:r>
+              <a:t>DELIVERABLE 4 — 30% WEIGHT (MULTI-DIMENSIONAL SCORING)</a:t>
+            </a:r>
+          </a:p>
+          <a:p>
+            <a:pPr>
+              <a:defRPr sz="2200" b="1">
+                <a:solidFill>
+                  <a:srgbClr val="FFFFFF"/>
+                </a:solidFill>
+              </a:defRPr>
+            </a:pPr>
+            <a:r>
+              <a:t>Deliverable 4: Customer 360 &amp; Silent Churn Scoring Model</a:t>
+            </a:r>
+          </a:p>
+        </p:txBody>
+      </p:sp>
+      <p:sp>
+        <p:nvSpPr>
+          <p:cNvPr id="3" name="Rectangle 2"/>
+          <p:cNvSpPr/>
+          <p:nvPr/>
+        </p:nvSpPr>
+        <p:spPr>
+          <a:xfrm>
+            <a:off x="731520" y="1645920"/>
+            <a:ext cx="10698480" cy="4389120"/>
+          </a:xfrm>
+          <a:prstGeom prst="rect">
+            <a:avLst/>
+          </a:prstGeom>
+          <a:solidFill>
+            <a:srgbClr val="1C2541"/>
+          </a:solidFill>
+          <a:ln>
+            <a:noFill/>
+          </a:ln>
+        </p:spPr>
+        <p:style>
+          <a:lnRef idx="1">
+            <a:schemeClr val="accent1"/>
+          </a:lnRef>
+          <a:fillRef idx="3">
+            <a:schemeClr val="accent1"/>
+          </a:fillRef>
+          <a:effectRef idx="2">
+            <a:schemeClr val="accent1"/>
+          </a:effectRef>
+          <a:fontRef idx="minor">
+            <a:schemeClr val="lt1"/>
+          </a:fontRef>
+        </p:style>
+        <p:txBody>
+          <a:bodyPr rtlCol="0" anchor="ctr"/>
+          <a:lstStyle/>
+          <a:p>
+            <a:pPr algn="ctr"/>
+          </a:p>
+        </p:txBody>
+      </p:sp>
+      <p:sp>
+        <p:nvSpPr>
+          <p:cNvPr id="4" name="TextBox 3"/>
+          <p:cNvSpPr txBox="1"/>
+          <p:nvPr/>
+        </p:nvSpPr>
+        <p:spPr>
+          <a:xfrm>
+            <a:off x="1005840" y="1828800"/>
+            <a:ext cx="10149840" cy="4023360"/>
+          </a:xfrm>
+          <a:prstGeom prst="rect">
+            <a:avLst/>
+          </a:prstGeom>
+          <a:noFill/>
+        </p:spPr>
+        <p:txBody>
+          <a:bodyPr wrap="square">
+            <a:spAutoFit/>
+          </a:bodyPr>
+          <a:lstStyle/>
+          <a:p>
+            <a:pPr>
+              <a:defRPr sz="1500" b="1">
+                <a:solidFill>
+                  <a:srgbClr val="48CAE4"/>
+                </a:solidFill>
+              </a:defRPr>
+            </a:pPr>
+            <a:r>
+              <a:t>Mathematical Formulation of the Silent Churn Risk Index (0–100 Scale)</a:t>
+            </a:r>
+          </a:p>
+          <a:p>
+            <a:br/>
+            <a:pPr>
+              <a:defRPr sz="1000">
+                <a:solidFill>
+                  <a:srgbClr val="FFFFFF"/>
+                </a:solidFill>
+              </a:defRPr>
+            </a:pPr>
+            <a:r>
+              <a:t>• Silent Churn Risk Index = Dim 1 (Customer Value) + Dim 2 (Outflow Signal) + Dim 3 (Digital Decay) + Dim 4 (Service Friction) + Dim 5 (Credit Stress) + Dim 6 (Data Confidence Adjustment).</a:t>
+            </a:r>
+          </a:p>
+          <a:p>
+            <a:br/>
+            <a:pPr>
+              <a:defRPr sz="1000">
+                <a:solidFill>
+                  <a:srgbClr val="FFFFFF"/>
+                </a:solidFill>
+              </a:defRPr>
+            </a:pPr>
+            <a:r>
+              <a:t>• Dim 1 — Customer Value (0–20 pts): Balances (40%), Account diversity (15%), Loan relationship (15%), Segment tier (30%). Measures business impact if customer leaves.</a:t>
+            </a:r>
+          </a:p>
+          <a:p>
+            <a:br/>
+            <a:pPr>
+              <a:defRPr sz="1000">
+                <a:solidFill>
+                  <a:srgbClr val="FFFFFF"/>
+                </a:solidFill>
+              </a:defRPr>
+            </a:pPr>
+            <a:r>
+              <a:t>• Dim 2 — Outflow Signal (0–25 pts): Recent debit volume (40%), Trailing 90D debit acceleration ratio (30%), Transaction count drop (30%). Detects active capital flight.</a:t>
+            </a:r>
+          </a:p>
+          <a:p>
+            <a:br/>
+            <a:pPr>
+              <a:defRPr sz="1000">
+                <a:solidFill>
+                  <a:srgbClr val="FFFFFF"/>
+                </a:solidFill>
+              </a:defRPr>
+            </a:pPr>
+            <a:r>
+              <a:t>• Dim 3 — Digital Deterioration (0–20 pts): Login recency (35%), Session frequency (35%), Digital engagement trend (30%). Identifies digital disengagement 60 days before closure.</a:t>
+            </a:r>
+          </a:p>
+          <a:p>
+            <a:br/>
+            <a:pPr>
+              <a:defRPr sz="1000">
+                <a:solidFill>
+                  <a:srgbClr val="FFFFFF"/>
+                </a:solidFill>
+              </a:defRPr>
+            </a:pPr>
+            <a:r>
+              <a:t>• Dim 4 — Service Friction (0–20 pts): Complaint count (25%), Recent complaints (25%), Inverted CSAT score (30%), Resolution TAT (20%). Emotional catalyst for churn.</a:t>
+            </a:r>
+          </a:p>
+          <a:p>
+            <a:br/>
+            <a:pPr>
+              <a:defRPr sz="1000">
+                <a:solidFill>
+                  <a:srgbClr val="FFFFFF"/>
+                </a:solidFill>
+              </a:defRPr>
+            </a:pPr>
+            <a:r>
+              <a:t>• Dim 5 — Credit Stress (0–10 pts): Max DPD (60%), NPA flag (40%). Financial distress deteriorating relationship.</a:t>
+            </a:r>
+          </a:p>
+          <a:p>
+            <a:br/>
+            <a:pPr>
+              <a:defRPr sz="1000">
+                <a:solidFill>
+                  <a:srgbClr val="FFFFFF"/>
+                </a:solidFill>
+              </a:defRPr>
+            </a:pPr>
+            <a:r>
+              <a:t>• Dim 6 — Data Confidence Adjustment (0–5 pts): KYC gaps, missing contact records, orphan keys. Penalizes unreliable data.</a:t>
+            </a:r>
+          </a:p>
+        </p:txBody>
+      </p:sp>
+    </p:spTree>
+  </p:cSld>
+  <p:clrMapOvr>
+    <a:masterClrMapping/>
+  </p:clrMapOvr>
+</p:sld>
+</file>
+
+<file path=ppt/slides/slide8.xml><?xml version="1.0" encoding="utf-8"?>
+<p:sld xmlns:a="http://schemas.openxmlformats.org/drawingml/2006/main" xmlns:p="http://schemas.openxmlformats.org/presentationml/2006/main" xmlns:r="http://schemas.openxmlformats.org/officeDocument/2006/relationships">
+  <p:cSld>
+    <p:bg>
+      <p:bgPr>
+        <a:solidFill>
+          <a:srgbClr val="0B132B"/>
+        </a:solidFill>
+        <a:effectLst/>
+      </p:bgPr>
+    </p:bg>
+    <p:spTree>
+      <p:nvGrpSpPr>
+        <p:cNvPr id="1" name=""/>
+        <p:cNvGrpSpPr/>
+        <p:nvPr/>
+      </p:nvGrpSpPr>
+      <p:grpSpPr/>
+      <p:sp>
+        <p:nvSpPr>
+          <p:cNvPr id="2" name="TextBox 1"/>
+          <p:cNvSpPr txBox="1"/>
+          <p:nvPr/>
+        </p:nvSpPr>
+        <p:spPr>
+          <a:xfrm>
+            <a:off x="731520" y="365760"/>
+            <a:ext cx="10698480" cy="914400"/>
+          </a:xfrm>
+          <a:prstGeom prst="rect">
+            <a:avLst/>
+          </a:prstGeom>
+          <a:noFill/>
+        </p:spPr>
+        <p:txBody>
+          <a:bodyPr wrap="square" lIns="0" tIns="0" rIns="0" bIns="0">
+            <a:spAutoFit/>
+          </a:bodyPr>
+          <a:lstStyle/>
+          <a:p>
+            <a:pPr>
+              <a:defRPr sz="1000" b="1">
+                <a:solidFill>
+                  <a:srgbClr val="48CAE4"/>
+                </a:solidFill>
+              </a:defRPr>
+            </a:pPr>
+            <a:r>
+              <a:t>DELIVERABLE 4 (CONT.) — FINANCIAL EXPOSURE</a:t>
+            </a:r>
+          </a:p>
+          <a:p>
+            <a:pPr>
+              <a:defRPr sz="2200" b="1">
+                <a:solidFill>
+                  <a:srgbClr val="FFFFFF"/>
+                </a:solidFill>
+              </a:defRPr>
+            </a:pPr>
+            <a:r>
+              <a:t>Deliverable 4: Portfolio Exposure — Customer Value vs. Risk</a:t>
+            </a:r>
+          </a:p>
+        </p:txBody>
+      </p:sp>
+      <p:sp>
+        <p:nvSpPr>
+          <p:cNvPr id="3" name="Rectangle 2"/>
+          <p:cNvSpPr/>
+          <p:nvPr/>
+        </p:nvSpPr>
+        <p:spPr>
+          <a:xfrm>
+            <a:off x="731520" y="1645920"/>
+            <a:ext cx="3383280" cy="1280160"/>
+          </a:xfrm>
+          <a:prstGeom prst="rect">
+            <a:avLst/>
+          </a:prstGeom>
+          <a:solidFill>
+            <a:srgbClr val="1C2541"/>
+          </a:solidFill>
+          <a:ln w="19050">
+            <a:solidFill>
+              <a:srgbClr val="48CAE4"/>
+            </a:solidFill>
+          </a:ln>
+        </p:spPr>
+        <p:style>
+          <a:lnRef idx="1">
+            <a:schemeClr val="accent1"/>
+          </a:lnRef>
+          <a:fillRef idx="3">
+            <a:schemeClr val="accent1"/>
+          </a:fillRef>
+          <a:effectRef idx="2">
+            <a:schemeClr val="accent1"/>
+          </a:effectRef>
+          <a:fontRef idx="minor">
+            <a:schemeClr val="lt1"/>
+          </a:fontRef>
+        </p:style>
+        <p:txBody>
+          <a:bodyPr rtlCol="0" anchor="ctr"/>
+          <a:lstStyle/>
+          <a:p>
+            <a:pPr algn="ctr"/>
+          </a:p>
+        </p:txBody>
+      </p:sp>
+      <p:sp>
+        <p:nvSpPr>
+          <p:cNvPr id="4" name="TextBox 3"/>
+          <p:cNvSpPr txBox="1"/>
+          <p:nvPr/>
+        </p:nvSpPr>
+        <p:spPr>
+          <a:xfrm>
+            <a:off x="868680" y="1737360"/>
+            <a:ext cx="3108960" cy="1097280"/>
+          </a:xfrm>
+          <a:prstGeom prst="rect">
+            <a:avLst/>
+          </a:prstGeom>
+          <a:noFill/>
+        </p:spPr>
+        <p:txBody>
+          <a:bodyPr wrap="none">
+            <a:spAutoFit/>
+          </a:bodyPr>
+          <a:lstStyle/>
+          <a:p>
+            <a:pPr>
+              <a:defRPr sz="900">
+                <a:solidFill>
+                  <a:srgbClr val="A0AEC0"/>
+                </a:solidFill>
+              </a:defRPr>
+            </a:pPr>
+            <a:r>
+              <a:t>TOTAL RETAIL DEPOSIT PORTFOLIO</a:t>
+            </a:r>
+          </a:p>
+          <a:p>
+            <a:pPr>
+              <a:defRPr sz="2200" b="1">
+                <a:solidFill>
+                  <a:srgbClr val="48CAE4"/>
+                </a:solidFill>
+              </a:defRPr>
+            </a:pPr>
+            <a:r>
+              <a:t>₹131.09 Cr</a:t>
+            </a:r>
+          </a:p>
+          <a:p>
+            <a:pPr>
+              <a:defRPr sz="1000">
+                <a:solidFill>
+                  <a:srgbClr val="FFFFFF"/>
+                </a:solidFill>
+              </a:defRPr>
+            </a:pPr>
+            <a:r>
+              <a:t>10,200 Customers</a:t>
+            </a:r>
+          </a:p>
+        </p:txBody>
+      </p:sp>
+      <p:sp>
+        <p:nvSpPr>
+          <p:cNvPr id="5" name="Rectangle 4"/>
+          <p:cNvSpPr/>
+          <p:nvPr/>
+        </p:nvSpPr>
+        <p:spPr>
+          <a:xfrm>
+            <a:off x="4389120" y="1645920"/>
+            <a:ext cx="3383280" cy="1280160"/>
+          </a:xfrm>
+          <a:prstGeom prst="rect">
+            <a:avLst/>
+          </a:prstGeom>
+          <a:solidFill>
+            <a:srgbClr val="1C2541"/>
+          </a:solidFill>
+          <a:ln w="19050">
+            <a:solidFill>
+              <a:srgbClr val="E63946"/>
+            </a:solidFill>
+          </a:ln>
+        </p:spPr>
+        <p:style>
+          <a:lnRef idx="1">
+            <a:schemeClr val="accent1"/>
+          </a:lnRef>
+          <a:fillRef idx="3">
+            <a:schemeClr val="accent1"/>
+          </a:fillRef>
+          <a:effectRef idx="2">
+            <a:schemeClr val="accent1"/>
+          </a:effectRef>
+          <a:fontRef idx="minor">
+            <a:schemeClr val="lt1"/>
+          </a:fontRef>
+        </p:style>
+        <p:txBody>
+          <a:bodyPr rtlCol="0" anchor="ctr"/>
+          <a:lstStyle/>
+          <a:p>
+            <a:pPr algn="ctr"/>
+          </a:p>
+        </p:txBody>
+      </p:sp>
+      <p:sp>
+        <p:nvSpPr>
+          <p:cNvPr id="6" name="TextBox 5"/>
+          <p:cNvSpPr txBox="1"/>
+          <p:nvPr/>
+        </p:nvSpPr>
+        <p:spPr>
+          <a:xfrm>
+            <a:off x="4526280" y="1737360"/>
+            <a:ext cx="3108960" cy="1097280"/>
+          </a:xfrm>
+          <a:prstGeom prst="rect">
+            <a:avLst/>
+          </a:prstGeom>
+          <a:noFill/>
+        </p:spPr>
+        <p:txBody>
+          <a:bodyPr wrap="none">
+            <a:spAutoFit/>
+          </a:bodyPr>
+          <a:lstStyle/>
+          <a:p>
+            <a:pPr>
+              <a:defRPr sz="900">
+                <a:solidFill>
+                  <a:srgbClr val="A0AEC0"/>
+                </a:solidFill>
+              </a:defRPr>
+            </a:pPr>
+            <a:r>
+              <a:t>TOTAL BALANCE AT CHURN RISK</a:t>
+            </a:r>
+          </a:p>
+          <a:p>
+            <a:pPr>
+              <a:defRPr sz="2200" b="1">
+                <a:solidFill>
+                  <a:srgbClr val="E63946"/>
+                </a:solidFill>
+              </a:defRPr>
+            </a:pPr>
+            <a:r>
+              <a:t>₹67.33 Cr</a:t>
+            </a:r>
+          </a:p>
+          <a:p>
+            <a:pPr>
+              <a:defRPr sz="1000">
+                <a:solidFill>
+                  <a:srgbClr val="FFFFFF"/>
+                </a:solidFill>
+              </a:defRPr>
+            </a:pPr>
+            <a:r>
+              <a:t>51.4% of Portfolio Liabilities</a:t>
+            </a:r>
+          </a:p>
+        </p:txBody>
+      </p:sp>
+      <p:sp>
+        <p:nvSpPr>
+          <p:cNvPr id="7" name="Rectangle 6"/>
+          <p:cNvSpPr/>
+          <p:nvPr/>
+        </p:nvSpPr>
+        <p:spPr>
+          <a:xfrm>
+            <a:off x="8046720" y="1645920"/>
+            <a:ext cx="3383280" cy="1280160"/>
+          </a:xfrm>
+          <a:prstGeom prst="rect">
+            <a:avLst/>
+          </a:prstGeom>
+          <a:solidFill>
+            <a:srgbClr val="1C2541"/>
+          </a:solidFill>
+          <a:ln w="19050">
+            <a:solidFill>
+              <a:srgbClr val="E9C46A"/>
+            </a:solidFill>
+          </a:ln>
+        </p:spPr>
+        <p:style>
+          <a:lnRef idx="1">
+            <a:schemeClr val="accent1"/>
+          </a:lnRef>
+          <a:fillRef idx="3">
+            <a:schemeClr val="accent1"/>
+          </a:fillRef>
+          <a:effectRef idx="2">
+            <a:schemeClr val="accent1"/>
+          </a:effectRef>
+          <a:fontRef idx="minor">
+            <a:schemeClr val="lt1"/>
+          </a:fontRef>
+        </p:style>
+        <p:txBody>
+          <a:bodyPr rtlCol="0" anchor="ctr"/>
+          <a:lstStyle/>
+          <a:p>
+            <a:pPr algn="ctr"/>
+          </a:p>
+        </p:txBody>
+      </p:sp>
+      <p:sp>
+        <p:nvSpPr>
+          <p:cNvPr id="8" name="TextBox 7"/>
+          <p:cNvSpPr txBox="1"/>
+          <p:nvPr/>
+        </p:nvSpPr>
+        <p:spPr>
+          <a:xfrm>
+            <a:off x="8183880" y="1737360"/>
+            <a:ext cx="3108960" cy="1097280"/>
+          </a:xfrm>
+          <a:prstGeom prst="rect">
+            <a:avLst/>
+          </a:prstGeom>
+          <a:noFill/>
+        </p:spPr>
+        <p:txBody>
+          <a:bodyPr wrap="none">
+            <a:spAutoFit/>
+          </a:bodyPr>
+          <a:lstStyle/>
+          <a:p>
+            <a:pPr>
+              <a:defRPr sz="900">
+                <a:solidFill>
+                  <a:srgbClr val="A0AEC0"/>
+                </a:solidFill>
+              </a:defRPr>
+            </a:pPr>
+            <a:r>
+              <a:t>WEALTH SEGMENT EXPOSURE</a:t>
+            </a:r>
+          </a:p>
+          <a:p>
+            <a:pPr>
+              <a:defRPr sz="2200" b="1">
+                <a:solidFill>
+                  <a:srgbClr val="E9C46A"/>
+                </a:solidFill>
+              </a:defRPr>
+            </a:pPr>
+            <a:r>
+              <a:t>₹39.73 Cr</a:t>
+            </a:r>
+          </a:p>
+          <a:p>
+            <a:pPr>
+              <a:defRPr sz="1000">
+                <a:solidFill>
+                  <a:srgbClr val="FFFFFF"/>
+                </a:solidFill>
+              </a:defRPr>
+            </a:pPr>
+            <a:r>
+              <a:t>59.0% of Total Balance at Risk</a:t>
+            </a:r>
+          </a:p>
+        </p:txBody>
+      </p:sp>
+      <p:sp>
+        <p:nvSpPr>
+          <p:cNvPr id="9" name="Rectangle 8"/>
+          <p:cNvSpPr/>
+          <p:nvPr/>
+        </p:nvSpPr>
+        <p:spPr>
+          <a:xfrm>
+            <a:off x="731520" y="3108960"/>
+            <a:ext cx="10698480" cy="3108960"/>
+          </a:xfrm>
+          <a:prstGeom prst="rect">
+            <a:avLst/>
+          </a:prstGeom>
+          <a:solidFill>
+            <a:srgbClr val="1C2541"/>
+          </a:solidFill>
+          <a:ln>
+            <a:noFill/>
+          </a:ln>
+        </p:spPr>
+        <p:style>
+          <a:lnRef idx="1">
+            <a:schemeClr val="accent1"/>
+          </a:lnRef>
+          <a:fillRef idx="3">
+            <a:schemeClr val="accent1"/>
+          </a:fillRef>
+          <a:effectRef idx="2">
+            <a:schemeClr val="accent1"/>
+          </a:effectRef>
+          <a:fontRef idx="minor">
+            <a:schemeClr val="lt1"/>
+          </a:fontRef>
+        </p:style>
+        <p:txBody>
+          <a:bodyPr rtlCol="0" anchor="ctr"/>
+          <a:lstStyle/>
+          <a:p>
+            <a:pPr algn="ctr"/>
+          </a:p>
+        </p:txBody>
+      </p:sp>
+      <p:sp>
+        <p:nvSpPr>
+          <p:cNvPr id="10" name="TextBox 9"/>
+          <p:cNvSpPr txBox="1"/>
+          <p:nvPr/>
+        </p:nvSpPr>
+        <p:spPr>
+          <a:xfrm>
+            <a:off x="1005840" y="3291840"/>
+            <a:ext cx="10149840" cy="2743200"/>
+          </a:xfrm>
+          <a:prstGeom prst="rect">
+            <a:avLst/>
+          </a:prstGeom>
+          <a:noFill/>
+        </p:spPr>
+        <p:txBody>
+          <a:bodyPr wrap="square">
+            <a:spAutoFit/>
+          </a:bodyPr>
+          <a:lstStyle/>
+          <a:p>
+            <a:pPr>
+              <a:defRPr sz="1500" b="1">
+                <a:solidFill>
+                  <a:srgbClr val="FFFFFF"/>
+                </a:solidFill>
+              </a:defRPr>
+            </a:pPr>
+            <a:r>
+              <a:t>Segment Exposure Matrix [DERIVED]</a:t>
+            </a:r>
+          </a:p>
+          <a:p>
+            <a:br/>
+            <a:pPr>
+              <a:defRPr sz="1100">
+                <a:solidFill>
+                  <a:srgbClr val="A0AEC0"/>
+                </a:solidFill>
+              </a:defRPr>
+            </a:pPr>
+            <a:r>
+              <a:t>• Wealth Tier: 865 Customers (8.5% of base) | Total Deposits: ₹65.13 Cr | High Risk: 463 Customers (53.5%) | Balance at Risk: ₹39.73 Cr (61.0% of segment). Severe capital concentration.</a:t>
+            </a:r>
+          </a:p>
+          <a:p>
+            <a:br/>
+            <a:pPr>
+              <a:defRPr sz="1100">
+                <a:solidFill>
+                  <a:srgbClr val="A0AEC0"/>
+                </a:solidFill>
+              </a:defRPr>
+            </a:pPr>
+            <a:r>
+              <a:t>• Privileged Tier: 2,099 Customers (20.6% of base) | Total Deposits: ₹37.83 Cr | High Risk: 824 Customers (39.3%) | Balance at Risk: ₹19.67 Cr (52.0% of segment). High digital banking sensitivity.</a:t>
+            </a:r>
+          </a:p>
+          <a:p>
+            <a:br/>
+            <a:pPr>
+              <a:defRPr sz="1100">
+                <a:solidFill>
+                  <a:srgbClr val="A0AEC0"/>
+                </a:solidFill>
+              </a:defRPr>
+            </a:pPr>
+            <a:r>
+              <a:t>• Mass Retail Tier: 7,236 Customers (70.9% of base) | Total Deposits: ₹28.12 Cr | High Risk: 1,115 Customers (15.4%) | Balance at Risk: ₹7.94 Cr (28.2% of segment). Service friction &amp; fee dispute drivers.</a:t>
+            </a:r>
+          </a:p>
+          <a:p>
+            <a:br/>
+            <a:pPr>
+              <a:defRPr sz="1100">
+                <a:solidFill>
+                  <a:srgbClr val="A0AEC0"/>
+                </a:solidFill>
+              </a:defRPr>
+            </a:pPr>
+            <a:r>
+              <a:t>• Strategic Takeaway [RECOMMENDED]: Retention efforts must not be democratic. Wealth accounts carry ₹39.73 Cr in at-risk balances (5x the entire Mass Retail exposure). Immediate frontline focus on top 463 at-risk Wealth accounts.</a:t>
+            </a:r>
+          </a:p>
+        </p:txBody>
+      </p:sp>
+    </p:spTree>
+  </p:cSld>
+  <p:clrMapOvr>
+    <a:masterClrMapping/>
+  </p:clrMapOvr>
+</p:sld>
+</file>
+
+<file path=ppt/slides/slide9.xml><?xml version="1.0" encoding="utf-8"?>
+<p:sld xmlns:a="http://schemas.openxmlformats.org/drawingml/2006/main" xmlns:p="http://schemas.openxmlformats.org/presentationml/2006/main" xmlns:r="http://schemas.openxmlformats.org/officeDocument/2006/relationships">
+  <p:cSld>
+    <p:bg>
+      <p:bgPr>
+        <a:solidFill>
+          <a:srgbClr val="0B132B"/>
+        </a:solidFill>
+        <a:effectLst/>
+      </p:bgPr>
+    </p:bg>
+    <p:spTree>
+      <p:nvGrpSpPr>
+        <p:cNvPr id="1" name=""/>
+        <p:cNvGrpSpPr/>
+        <p:nvPr/>
+      </p:nvGrpSpPr>
+      <p:grpSpPr/>
+      <p:sp>
+        <p:nvSpPr>
+          <p:cNvPr id="2" name="TextBox 1"/>
+          <p:cNvSpPr txBox="1"/>
+          <p:nvPr/>
+        </p:nvSpPr>
+        <p:spPr>
+          <a:xfrm>
+            <a:off x="731520" y="365760"/>
+            <a:ext cx="10698480" cy="914400"/>
+          </a:xfrm>
+          <a:prstGeom prst="rect">
+            <a:avLst/>
+          </a:prstGeom>
+          <a:noFill/>
+        </p:spPr>
+        <p:txBody>
+          <a:bodyPr wrap="square" lIns="0" tIns="0" rIns="0" bIns="0">
+            <a:spAutoFit/>
+          </a:bodyPr>
+          <a:lstStyle/>
+          <a:p>
+            <a:pPr>
+              <a:defRPr sz="1000" b="1">
+                <a:solidFill>
+                  <a:srgbClr val="48CAE4"/>
+                </a:solidFill>
+              </a:defRPr>
+            </a:pPr>
+            <a:r>
+              <a:t>DELIVERABLE 4 (CONT.) — BEHAVIORAL TRIANGULATION</a:t>
+            </a:r>
+          </a:p>
+          <a:p>
+            <a:pPr>
+              <a:defRPr sz="2200" b="1">
+                <a:solidFill>
+                  <a:srgbClr val="FFFFFF"/>
+                </a:solidFill>
+              </a:defRPr>
+            </a:pPr>
+            <a:r>
+              <a:t>Deliverable 4: Triangulated Early Warning Churn Indicators</a:t>
+            </a:r>
+          </a:p>
+        </p:txBody>
+      </p:sp>
+      <p:sp>
+        <p:nvSpPr>
+          <p:cNvPr id="3" name="Rectangle 2"/>
+          <p:cNvSpPr/>
+          <p:nvPr/>
+        </p:nvSpPr>
+        <p:spPr>
+          <a:xfrm>
+            <a:off x="731520" y="1645920"/>
+            <a:ext cx="3383280" cy="4389120"/>
+          </a:xfrm>
+          <a:prstGeom prst="rect">
+            <a:avLst/>
+          </a:prstGeom>
+          <a:solidFill>
+            <a:srgbClr val="1C2541"/>
+          </a:solidFill>
+          <a:ln w="19050">
+            <a:solidFill>
+              <a:srgbClr val="E63946"/>
+            </a:solidFill>
+          </a:ln>
+        </p:spPr>
+        <p:style>
+          <a:lnRef idx="1">
+            <a:schemeClr val="accent1"/>
+          </a:lnRef>
+          <a:fillRef idx="3">
+            <a:schemeClr val="accent1"/>
+          </a:fillRef>
+          <a:effectRef idx="2">
+            <a:schemeClr val="accent1"/>
+          </a:effectRef>
+          <a:fontRef idx="minor">
+            <a:schemeClr val="lt1"/>
+          </a:fontRef>
+        </p:style>
+        <p:txBody>
+          <a:bodyPr rtlCol="0" anchor="ctr"/>
+          <a:lstStyle/>
+          <a:p>
+            <a:pPr algn="ctr"/>
+          </a:p>
+        </p:txBody>
+      </p:sp>
+      <p:sp>
+        <p:nvSpPr>
+          <p:cNvPr id="4" name="TextBox 3"/>
+          <p:cNvSpPr txBox="1"/>
+          <p:nvPr/>
+        </p:nvSpPr>
+        <p:spPr>
+          <a:xfrm>
+            <a:off x="868680" y="1783080"/>
+            <a:ext cx="3108960" cy="4114800"/>
+          </a:xfrm>
+          <a:prstGeom prst="rect">
+            <a:avLst/>
+          </a:prstGeom>
+          <a:noFill/>
+        </p:spPr>
+        <p:txBody>
+          <a:bodyPr wrap="square">
+            <a:spAutoFit/>
+          </a:bodyPr>
+          <a:lstStyle/>
+          <a:p>
+            <a:pPr>
+              <a:defRPr sz="900">
+                <a:solidFill>
+                  <a:srgbClr val="E63946"/>
+                </a:solidFill>
+              </a:defRPr>
+            </a:pPr>
+            <a:r>
+              <a:t>Dimension 2 (Weight: 25%)</a:t>
+            </a:r>
+          </a:p>
+          <a:p>
+            <a:pPr>
+              <a:defRPr sz="1300" b="1">
+                <a:solidFill>
+                  <a:srgbClr val="FFFFFF"/>
+                </a:solidFill>
+              </a:defRPr>
+            </a:pPr>
+            <a:r>
+              <a:t>MONEY OUTFLOW SIGNALS</a:t>
+            </a:r>
+          </a:p>
+          <a:p>
+            <a:br/>
+            <a:pPr>
+              <a:defRPr sz="1000">
+                <a:solidFill>
+                  <a:srgbClr val="A0AEC0"/>
+                </a:solidFill>
+              </a:defRPr>
+            </a:pPr>
+            <a:r>
+              <a:t>• Outflow Volume: 2,599 customers show recent debit spikes &gt; 75th percentile.</a:t>
+            </a:r>
+          </a:p>
+          <a:p>
+            <a:br/>
+            <a:pPr>
+              <a:defRPr sz="1000">
+                <a:solidFill>
+                  <a:srgbClr val="A0AEC0"/>
+                </a:solidFill>
+              </a:defRPr>
+            </a:pPr>
+            <a:r>
+              <a:t>• Outflow Velocity: Ratio of 90D debit to historical debit accelerating by &gt; 2.0x.</a:t>
+            </a:r>
+          </a:p>
+          <a:p>
+            <a:br/>
+            <a:pPr>
+              <a:defRPr sz="1000">
+                <a:solidFill>
+                  <a:srgbClr val="A0AEC0"/>
+                </a:solidFill>
+              </a:defRPr>
+            </a:pPr>
+            <a:r>
+              <a:t>• Transfer Activity: Rapid UPI/NetBanking transfers to external institutions without commensurate inward credit.</a:t>
+            </a:r>
+          </a:p>
+        </p:txBody>
+      </p:sp>
+      <p:sp>
+        <p:nvSpPr>
+          <p:cNvPr id="5" name="Rectangle 4"/>
+          <p:cNvSpPr/>
+          <p:nvPr/>
+        </p:nvSpPr>
+        <p:spPr>
+          <a:xfrm>
+            <a:off x="4389120" y="1645920"/>
+            <a:ext cx="3383280" cy="4389120"/>
+          </a:xfrm>
+          <a:prstGeom prst="rect">
+            <a:avLst/>
+          </a:prstGeom>
+          <a:solidFill>
+            <a:srgbClr val="1C2541"/>
+          </a:solidFill>
+          <a:ln w="19050">
+            <a:solidFill>
+              <a:srgbClr val="F4A261"/>
+            </a:solidFill>
+          </a:ln>
+        </p:spPr>
+        <p:style>
+          <a:lnRef idx="1">
+            <a:schemeClr val="accent1"/>
+          </a:lnRef>
+          <a:fillRef idx="3">
+            <a:schemeClr val="accent1"/>
+          </a:fillRef>
+          <a:effectRef idx="2">
+            <a:schemeClr val="accent1"/>
+          </a:effectRef>
+          <a:fontRef idx="minor">
+            <a:schemeClr val="lt1"/>
+          </a:fontRef>
+        </p:style>
+        <p:txBody>
+          <a:bodyPr rtlCol="0" anchor="ctr"/>
+          <a:lstStyle/>
+          <a:p>
+            <a:pPr algn="ctr"/>
+          </a:p>
+        </p:txBody>
+      </p:sp>
+      <p:sp>
+        <p:nvSpPr>
+          <p:cNvPr id="6" name="TextBox 5"/>
+          <p:cNvSpPr txBox="1"/>
+          <p:nvPr/>
+        </p:nvSpPr>
+        <p:spPr>
+          <a:xfrm>
+            <a:off x="4526280" y="1783080"/>
+            <a:ext cx="3108960" cy="4114800"/>
+          </a:xfrm>
+          <a:prstGeom prst="rect">
+            <a:avLst/>
+          </a:prstGeom>
+          <a:noFill/>
+        </p:spPr>
+        <p:txBody>
+          <a:bodyPr wrap="square">
+            <a:spAutoFit/>
+          </a:bodyPr>
+          <a:lstStyle/>
+          <a:p>
+            <a:pPr>
+              <a:defRPr sz="900">
+                <a:solidFill>
+                  <a:srgbClr val="F4A261"/>
+                </a:solidFill>
+              </a:defRPr>
+            </a:pPr>
+            <a:r>
+              <a:t>Dimension 3 (Weight: 20%)</a:t>
+            </a:r>
+          </a:p>
+          <a:p>
+            <a:pPr>
+              <a:defRPr sz="1300" b="1">
+                <a:solidFill>
+                  <a:srgbClr val="FFFFFF"/>
+                </a:solidFill>
+              </a:defRPr>
+            </a:pPr>
+            <a:r>
+              <a:t>DIGITAL DETERIORATION</a:t>
+            </a:r>
+          </a:p>
+          <a:p>
+            <a:br/>
+            <a:pPr>
+              <a:defRPr sz="1000">
+                <a:solidFill>
+                  <a:srgbClr val="A0AEC0"/>
+                </a:solidFill>
+              </a:defRPr>
+            </a:pPr>
+            <a:r>
+              <a:t>• Login Inactivity: 3,781 customers exhibit significant drop in session recency (&gt; 45 days since login).</a:t>
+            </a:r>
+          </a:p>
+          <a:p>
+            <a:br/>
+            <a:pPr>
+              <a:defRPr sz="1000">
+                <a:solidFill>
+                  <a:srgbClr val="A0AEC0"/>
+                </a:solidFill>
+              </a:defRPr>
+            </a:pPr>
+            <a:r>
+              <a:t>• Feature Abandonment: App usage drops from transaction features to purely checking balances.</a:t>
+            </a:r>
+          </a:p>
+          <a:p>
+            <a:br/>
+            <a:pPr>
+              <a:defRPr sz="1000">
+                <a:solidFill>
+                  <a:srgbClr val="A0AEC0"/>
+                </a:solidFill>
+              </a:defRPr>
+            </a:pPr>
+            <a:r>
+              <a:t>• Session Duration: 35% decline in monthly app time preceding primary fund transfers.</a:t>
             </a:r>
           </a:p>
         </p:txBody>
@@ -5317,14 +10025,26 @@
           <a:lstStyle/>
           <a:p>
             <a:pPr>
+              <a:defRPr sz="900">
+                <a:solidFill>
+                  <a:srgbClr val="48CAE4"/>
+                </a:solidFill>
+              </a:defRPr>
+            </a:pPr>
+            <a:r>
+              <a:t>Dimension 4 (Weight: 20%)</a:t>
+            </a:r>
+          </a:p>
+          <a:p>
+            <a:pPr>
               <a:defRPr sz="1300" b="1">
                 <a:solidFill>
-                  <a:srgbClr val="48CAE4"/>
-                </a:solidFill>
-              </a:defRPr>
-            </a:pPr>
-            <a:r>
-              <a:t>GOVERNANCE COUNCIL</a:t>
+                  <a:srgbClr val="FFFFFF"/>
+                </a:solidFill>
+              </a:defRPr>
+            </a:pPr>
+            <a:r>
+              <a:t>SERVICE FRICTION SIGNALS</a:t>
             </a:r>
           </a:p>
           <a:p>
@@ -5337,7 +10057,7 @@
               </a:defRPr>
             </a:pPr>
             <a:r>
-              <a:t>• Enterprise Data Governance Council: Monthly ExCo review of DQ Scorecards.</a:t>
+              <a:t>• Grievance Clustering: 1,480 customers logged multiple grievances within 90 days.</a:t>
             </a:r>
           </a:p>
           <a:p>
@@ -5350,7 +10070,7 @@
               </a:defRPr>
             </a:pPr>
             <a:r>
-              <a:t>• SLA &amp; Penalties: Branch operations evaluated on KYC remediation and data entry defect rates.</a:t>
+              <a:t>• CSAT Collapse: Severe churn correlation among customers giving CSAT &lt;= 2.</a:t>
             </a:r>
           </a:p>
           <a:p>
@@ -5363,3627 +10083,7 @@
               </a:defRPr>
             </a:pPr>
             <a:r>
-              <a:t>• Audit Readiness: Complete traceability from raw CSV to Power BI model with zero data leakage.</a:t>
-            </a:r>
-          </a:p>
-        </p:txBody>
-      </p:sp>
-    </p:spTree>
-  </p:cSld>
-  <p:clrMapOvr>
-    <a:masterClrMapping/>
-  </p:clrMapOvr>
-</p:sld>
-</file>
-
-<file path=ppt/slides/slide12.xml><?xml version="1.0" encoding="utf-8"?>
-<p:sld xmlns:a="http://schemas.openxmlformats.org/drawingml/2006/main" xmlns:p="http://schemas.openxmlformats.org/presentationml/2006/main" xmlns:r="http://schemas.openxmlformats.org/officeDocument/2006/relationships">
-  <p:cSld>
-    <p:bg>
-      <p:bgPr>
-        <a:solidFill>
-          <a:srgbClr val="0B132B"/>
-        </a:solidFill>
-        <a:effectLst/>
-      </p:bgPr>
-    </p:bg>
-    <p:spTree>
-      <p:nvGrpSpPr>
-        <p:cNvPr id="1" name=""/>
-        <p:cNvGrpSpPr/>
-        <p:nvPr/>
-      </p:nvGrpSpPr>
-      <p:grpSpPr/>
-      <p:sp>
-        <p:nvSpPr>
-          <p:cNvPr id="2" name="TextBox 1"/>
-          <p:cNvSpPr txBox="1"/>
-          <p:nvPr/>
-        </p:nvSpPr>
-        <p:spPr>
-          <a:xfrm>
-            <a:off x="731520" y="365760"/>
-            <a:ext cx="10698480" cy="914400"/>
-          </a:xfrm>
-          <a:prstGeom prst="rect">
-            <a:avLst/>
-          </a:prstGeom>
-          <a:noFill/>
-        </p:spPr>
-        <p:txBody>
-          <a:bodyPr wrap="square" lIns="0" tIns="0" rIns="0" bIns="0">
-            <a:spAutoFit/>
-          </a:bodyPr>
-          <a:lstStyle/>
-          <a:p>
-            <a:pPr>
-              <a:defRPr sz="1000" b="1">
-                <a:solidFill>
-                  <a:srgbClr val="48CAE4"/>
-                </a:solidFill>
-              </a:defRPr>
-            </a:pPr>
-            <a:r>
-              <a:t>ROADMAP</a:t>
-            </a:r>
-          </a:p>
-          <a:p>
-            <a:pPr>
-              <a:defRPr sz="2200" b="1">
-                <a:solidFill>
-                  <a:srgbClr val="FFFFFF"/>
-                </a:solidFill>
-              </a:defRPr>
-            </a:pPr>
-            <a:r>
-              <a:t>Strategic Execution Roadmap: 30-60-90 Day Phasing</a:t>
-            </a:r>
-          </a:p>
-        </p:txBody>
-      </p:sp>
-      <p:sp>
-        <p:nvSpPr>
-          <p:cNvPr id="3" name="Rectangle 2"/>
-          <p:cNvSpPr/>
-          <p:nvPr/>
-        </p:nvSpPr>
-        <p:spPr>
-          <a:xfrm>
-            <a:off x="731520" y="1645920"/>
-            <a:ext cx="3383280" cy="4389120"/>
-          </a:xfrm>
-          <a:prstGeom prst="rect">
-            <a:avLst/>
-          </a:prstGeom>
-          <a:solidFill>
-            <a:srgbClr val="1C2541"/>
-          </a:solidFill>
-          <a:ln w="19050">
-            <a:solidFill>
-              <a:srgbClr val="E63946"/>
-            </a:solidFill>
-          </a:ln>
-        </p:spPr>
-        <p:style>
-          <a:lnRef idx="1">
-            <a:schemeClr val="accent1"/>
-          </a:lnRef>
-          <a:fillRef idx="3">
-            <a:schemeClr val="accent1"/>
-          </a:fillRef>
-          <a:effectRef idx="2">
-            <a:schemeClr val="accent1"/>
-          </a:effectRef>
-          <a:fontRef idx="minor">
-            <a:schemeClr val="lt1"/>
-          </a:fontRef>
-        </p:style>
-        <p:txBody>
-          <a:bodyPr rtlCol="0" anchor="ctr"/>
-          <a:lstStyle/>
-          <a:p>
-            <a:pPr algn="ctr"/>
-          </a:p>
-        </p:txBody>
-      </p:sp>
-      <p:sp>
-        <p:nvSpPr>
-          <p:cNvPr id="4" name="TextBox 3"/>
-          <p:cNvSpPr txBox="1"/>
-          <p:nvPr/>
-        </p:nvSpPr>
-        <p:spPr>
-          <a:xfrm>
-            <a:off x="868680" y="1783080"/>
-            <a:ext cx="3108960" cy="4114800"/>
-          </a:xfrm>
-          <a:prstGeom prst="rect">
-            <a:avLst/>
-          </a:prstGeom>
-          <a:noFill/>
-        </p:spPr>
-        <p:txBody>
-          <a:bodyPr wrap="square">
-            <a:spAutoFit/>
-          </a:bodyPr>
-          <a:lstStyle/>
-          <a:p>
-            <a:pPr>
-              <a:defRPr sz="1200" b="1">
-                <a:solidFill>
-                  <a:srgbClr val="E63946"/>
-                </a:solidFill>
-              </a:defRPr>
-            </a:pPr>
-            <a:r>
-              <a:t>DAYS 1–30: TRIAGE &amp; HIGH-VALUE RETENTION</a:t>
-            </a:r>
-          </a:p>
-          <a:p>
-            <a:br/>
-            <a:pPr>
-              <a:defRPr sz="1000">
-                <a:solidFill>
-                  <a:srgbClr val="A0AEC0"/>
-                </a:solidFill>
-              </a:defRPr>
-            </a:pPr>
-            <a:r>
-              <a:t>• Deploy RM Outreach Console to all Wealth Relationship Managers.</a:t>
-            </a:r>
-          </a:p>
-          <a:p>
-            <a:br/>
-            <a:pPr>
-              <a:defRPr sz="1000">
-                <a:solidFill>
-                  <a:srgbClr val="A0AEC0"/>
-                </a:solidFill>
-              </a:defRPr>
-            </a:pPr>
-            <a:r>
-              <a:t>• Contact Top 198 Archetype A customers (protect ₹112.4 Cr).</a:t>
-            </a:r>
-          </a:p>
-          <a:p>
-            <a:br/>
-            <a:pPr>
-              <a:defRPr sz="1000">
-                <a:solidFill>
-                  <a:srgbClr val="A0AEC0"/>
-                </a:solidFill>
-              </a:defRPr>
-            </a:pPr>
-            <a:r>
-              <a:t>• Remediate 480 duplicate PAN identities and 306 missing KYC records.</a:t>
-            </a:r>
-          </a:p>
-          <a:p>
-            <a:br/>
-            <a:pPr>
-              <a:defRPr sz="1000">
-                <a:solidFill>
-                  <a:srgbClr val="A0AEC0"/>
-                </a:solidFill>
-              </a:defRPr>
-            </a:pPr>
-            <a:r>
-              <a:t>• Establish weekly DQ exception monitoring meetings.</a:t>
-            </a:r>
-          </a:p>
-        </p:txBody>
-      </p:sp>
-      <p:sp>
-        <p:nvSpPr>
-          <p:cNvPr id="5" name="Rectangle 4"/>
-          <p:cNvSpPr/>
-          <p:nvPr/>
-        </p:nvSpPr>
-        <p:spPr>
-          <a:xfrm>
-            <a:off x="4389120" y="1645920"/>
-            <a:ext cx="3383280" cy="4389120"/>
-          </a:xfrm>
-          <a:prstGeom prst="rect">
-            <a:avLst/>
-          </a:prstGeom>
-          <a:solidFill>
-            <a:srgbClr val="1C2541"/>
-          </a:solidFill>
-          <a:ln w="19050">
-            <a:solidFill>
-              <a:srgbClr val="F4A261"/>
-            </a:solidFill>
-          </a:ln>
-        </p:spPr>
-        <p:style>
-          <a:lnRef idx="1">
-            <a:schemeClr val="accent1"/>
-          </a:lnRef>
-          <a:fillRef idx="3">
-            <a:schemeClr val="accent1"/>
-          </a:fillRef>
-          <a:effectRef idx="2">
-            <a:schemeClr val="accent1"/>
-          </a:effectRef>
-          <a:fontRef idx="minor">
-            <a:schemeClr val="lt1"/>
-          </a:fontRef>
-        </p:style>
-        <p:txBody>
-          <a:bodyPr rtlCol="0" anchor="ctr"/>
-          <a:lstStyle/>
-          <a:p>
-            <a:pPr algn="ctr"/>
-          </a:p>
-        </p:txBody>
-      </p:sp>
-      <p:sp>
-        <p:nvSpPr>
-          <p:cNvPr id="6" name="TextBox 5"/>
-          <p:cNvSpPr txBox="1"/>
-          <p:nvPr/>
-        </p:nvSpPr>
-        <p:spPr>
-          <a:xfrm>
-            <a:off x="4526280" y="1783080"/>
-            <a:ext cx="3108960" cy="4114800"/>
-          </a:xfrm>
-          <a:prstGeom prst="rect">
-            <a:avLst/>
-          </a:prstGeom>
-          <a:noFill/>
-        </p:spPr>
-        <p:txBody>
-          <a:bodyPr wrap="square">
-            <a:spAutoFit/>
-          </a:bodyPr>
-          <a:lstStyle/>
-          <a:p>
-            <a:pPr>
-              <a:defRPr sz="1200" b="1">
-                <a:solidFill>
-                  <a:srgbClr val="F4A261"/>
-                </a:solidFill>
-              </a:defRPr>
-            </a:pPr>
-            <a:r>
-              <a:t>DAYS 31–60: OPERATIONAL REPAIR &amp; BRANCH INTERVENTION</a:t>
-            </a:r>
-          </a:p>
-          <a:p>
-            <a:br/>
-            <a:pPr>
-              <a:defRPr sz="1000">
-                <a:solidFill>
-                  <a:srgbClr val="A0AEC0"/>
-                </a:solidFill>
-              </a:defRPr>
-            </a:pPr>
-            <a:r>
-              <a:t>• Dispatch service recovery squads to Top 5 risk branches (BR-104, BR-112, etc.).</a:t>
-            </a:r>
-          </a:p>
-          <a:p>
-            <a:br/>
-            <a:pPr>
-              <a:defRPr sz="1000">
-                <a:solidFill>
-                  <a:srgbClr val="A0AEC0"/>
-                </a:solidFill>
-              </a:defRPr>
-            </a:pPr>
-            <a:r>
-              <a:t>• Implement 7-day SLA cap on Transaction Dispute complaint categories.</a:t>
-            </a:r>
-          </a:p>
-          <a:p>
-            <a:br/>
-            <a:pPr>
-              <a:defRPr sz="1000">
-                <a:solidFill>
-                  <a:srgbClr val="A0AEC0"/>
-                </a:solidFill>
-              </a:defRPr>
-            </a:pPr>
-            <a:r>
-              <a:t>• Launch mobile app re-engagement push for 3,781 inactive digital accounts.</a:t>
-            </a:r>
-          </a:p>
-          <a:p>
-            <a:br/>
-            <a:pPr>
-              <a:defRPr sz="1000">
-                <a:solidFill>
-                  <a:srgbClr val="A0AEC0"/>
-                </a:solidFill>
-              </a:defRPr>
-            </a:pPr>
-            <a:r>
-              <a:t>• Ingest daily Power BI dashboards for regional directors.</a:t>
-            </a:r>
-          </a:p>
-        </p:txBody>
-      </p:sp>
-      <p:sp>
-        <p:nvSpPr>
-          <p:cNvPr id="7" name="Rectangle 6"/>
-          <p:cNvSpPr/>
-          <p:nvPr/>
-        </p:nvSpPr>
-        <p:spPr>
-          <a:xfrm>
-            <a:off x="8046720" y="1645920"/>
-            <a:ext cx="3383280" cy="4389120"/>
-          </a:xfrm>
-          <a:prstGeom prst="rect">
-            <a:avLst/>
-          </a:prstGeom>
-          <a:solidFill>
-            <a:srgbClr val="1C2541"/>
-          </a:solidFill>
-          <a:ln w="19050">
-            <a:solidFill>
-              <a:srgbClr val="2A9D8F"/>
-            </a:solidFill>
-          </a:ln>
-        </p:spPr>
-        <p:style>
-          <a:lnRef idx="1">
-            <a:schemeClr val="accent1"/>
-          </a:lnRef>
-          <a:fillRef idx="3">
-            <a:schemeClr val="accent1"/>
-          </a:fillRef>
-          <a:effectRef idx="2">
-            <a:schemeClr val="accent1"/>
-          </a:effectRef>
-          <a:fontRef idx="minor">
-            <a:schemeClr val="lt1"/>
-          </a:fontRef>
-        </p:style>
-        <p:txBody>
-          <a:bodyPr rtlCol="0" anchor="ctr"/>
-          <a:lstStyle/>
-          <a:p>
-            <a:pPr algn="ctr"/>
-          </a:p>
-        </p:txBody>
-      </p:sp>
-      <p:sp>
-        <p:nvSpPr>
-          <p:cNvPr id="8" name="TextBox 7"/>
-          <p:cNvSpPr txBox="1"/>
-          <p:nvPr/>
-        </p:nvSpPr>
-        <p:spPr>
-          <a:xfrm>
-            <a:off x="8183880" y="1783080"/>
-            <a:ext cx="3108960" cy="4114800"/>
-          </a:xfrm>
-          <a:prstGeom prst="rect">
-            <a:avLst/>
-          </a:prstGeom>
-          <a:noFill/>
-        </p:spPr>
-        <p:txBody>
-          <a:bodyPr wrap="square">
-            <a:spAutoFit/>
-          </a:bodyPr>
-          <a:lstStyle/>
-          <a:p>
-            <a:pPr>
-              <a:defRPr sz="1200" b="1">
-                <a:solidFill>
-                  <a:srgbClr val="2A9D8F"/>
-                </a:solidFill>
-              </a:defRPr>
-            </a:pPr>
-            <a:r>
-              <a:t>DAYS 61–90: INSTITUTIONALIZATION &amp; AUTOMATION</a:t>
-            </a:r>
-          </a:p>
-          <a:p>
-            <a:br/>
-            <a:pPr>
-              <a:defRPr sz="1000">
-                <a:solidFill>
-                  <a:srgbClr val="A0AEC0"/>
-                </a:solidFill>
-              </a:defRPr>
-            </a:pPr>
-            <a:r>
-              <a:t>• Automate daily lakehouse ingestion pipeline from core banking systems.</a:t>
-            </a:r>
-          </a:p>
-          <a:p>
-            <a:br/>
-            <a:pPr>
-              <a:defRPr sz="1000">
-                <a:solidFill>
-                  <a:srgbClr val="A0AEC0"/>
-                </a:solidFill>
-              </a:defRPr>
-            </a:pPr>
-            <a:r>
-              <a:t>• Integrate Silent Churn Risk Index into frontline CRM screen (real-time risk badge).</a:t>
-            </a:r>
-          </a:p>
-          <a:p>
-            <a:br/>
-            <a:pPr>
-              <a:defRPr sz="1000">
-                <a:solidFill>
-                  <a:srgbClr val="A0AEC0"/>
-                </a:solidFill>
-              </a:defRPr>
-            </a:pPr>
-            <a:r>
-              <a:t>• Calibrate credit stress early-warning triggers with loan collection units.</a:t>
-            </a:r>
-          </a:p>
-          <a:p>
-            <a:br/>
-            <a:pPr>
-              <a:defRPr sz="1000">
-                <a:solidFill>
-                  <a:srgbClr val="A0AEC0"/>
-                </a:solidFill>
-              </a:defRPr>
-            </a:pPr>
-            <a:r>
-              <a:t>• Measure net deposit retention: Target ₹150+ Cr in preserved retail deposits.</a:t>
-            </a:r>
-          </a:p>
-        </p:txBody>
-      </p:sp>
-    </p:spTree>
-  </p:cSld>
-  <p:clrMapOvr>
-    <a:masterClrMapping/>
-  </p:clrMapOvr>
-</p:sld>
-</file>
-
-<file path=ppt/slides/slide2.xml><?xml version="1.0" encoding="utf-8"?>
-<p:sld xmlns:a="http://schemas.openxmlformats.org/drawingml/2006/main" xmlns:p="http://schemas.openxmlformats.org/presentationml/2006/main" xmlns:r="http://schemas.openxmlformats.org/officeDocument/2006/relationships">
-  <p:cSld>
-    <p:bg>
-      <p:bgPr>
-        <a:solidFill>
-          <a:srgbClr val="0B132B"/>
-        </a:solidFill>
-        <a:effectLst/>
-      </p:bgPr>
-    </p:bg>
-    <p:spTree>
-      <p:nvGrpSpPr>
-        <p:cNvPr id="1" name=""/>
-        <p:cNvGrpSpPr/>
-        <p:nvPr/>
-      </p:nvGrpSpPr>
-      <p:grpSpPr/>
-      <p:sp>
-        <p:nvSpPr>
-          <p:cNvPr id="2" name="TextBox 1"/>
-          <p:cNvSpPr txBox="1"/>
-          <p:nvPr/>
-        </p:nvSpPr>
-        <p:spPr>
-          <a:xfrm>
-            <a:off x="731520" y="365760"/>
-            <a:ext cx="10698480" cy="914400"/>
-          </a:xfrm>
-          <a:prstGeom prst="rect">
-            <a:avLst/>
-          </a:prstGeom>
-          <a:noFill/>
-        </p:spPr>
-        <p:txBody>
-          <a:bodyPr wrap="square" lIns="0" tIns="0" rIns="0" bIns="0">
-            <a:spAutoFit/>
-          </a:bodyPr>
-          <a:lstStyle/>
-          <a:p>
-            <a:pPr>
-              <a:defRPr sz="1000" b="1">
-                <a:solidFill>
-                  <a:srgbClr val="48CAE4"/>
-                </a:solidFill>
-              </a:defRPr>
-            </a:pPr>
-            <a:r>
-              <a:t>STRATEGIC OVERVIEW</a:t>
-            </a:r>
-          </a:p>
-          <a:p>
-            <a:pPr>
-              <a:defRPr sz="2200" b="1">
-                <a:solidFill>
-                  <a:srgbClr val="FFFFFF"/>
-                </a:solidFill>
-              </a:defRPr>
-            </a:pPr>
-            <a:r>
-              <a:t>Executive Summary: Diagnosing Silent Attrition</a:t>
-            </a:r>
-          </a:p>
-        </p:txBody>
-      </p:sp>
-      <p:sp>
-        <p:nvSpPr>
-          <p:cNvPr id="3" name="Rectangle 2"/>
-          <p:cNvSpPr/>
-          <p:nvPr/>
-        </p:nvSpPr>
-        <p:spPr>
-          <a:xfrm>
-            <a:off x="731520" y="1645920"/>
-            <a:ext cx="2468880" cy="4389120"/>
-          </a:xfrm>
-          <a:prstGeom prst="rect">
-            <a:avLst/>
-          </a:prstGeom>
-          <a:solidFill>
-            <a:srgbClr val="1C2541"/>
-          </a:solidFill>
-          <a:ln w="19050">
-            <a:solidFill>
-              <a:srgbClr val="E63946"/>
-            </a:solidFill>
-          </a:ln>
-        </p:spPr>
-        <p:style>
-          <a:lnRef idx="1">
-            <a:schemeClr val="accent1"/>
-          </a:lnRef>
-          <a:fillRef idx="3">
-            <a:schemeClr val="accent1"/>
-          </a:fillRef>
-          <a:effectRef idx="2">
-            <a:schemeClr val="accent1"/>
-          </a:effectRef>
-          <a:fontRef idx="minor">
-            <a:schemeClr val="lt1"/>
-          </a:fontRef>
-        </p:style>
-        <p:txBody>
-          <a:bodyPr rtlCol="0" anchor="ctr"/>
-          <a:lstStyle/>
-          <a:p>
-            <a:pPr algn="ctr"/>
-          </a:p>
-        </p:txBody>
-      </p:sp>
-      <p:sp>
-        <p:nvSpPr>
-          <p:cNvPr id="4" name="TextBox 3"/>
-          <p:cNvSpPr txBox="1"/>
-          <p:nvPr/>
-        </p:nvSpPr>
-        <p:spPr>
-          <a:xfrm>
-            <a:off x="868680" y="1783080"/>
-            <a:ext cx="2194560" cy="4114800"/>
-          </a:xfrm>
-          <a:prstGeom prst="rect">
-            <a:avLst/>
-          </a:prstGeom>
-          <a:noFill/>
-        </p:spPr>
-        <p:txBody>
-          <a:bodyPr wrap="square">
-            <a:spAutoFit/>
-          </a:bodyPr>
-          <a:lstStyle/>
-          <a:p>
-            <a:pPr>
-              <a:defRPr sz="1000" b="1">
-                <a:solidFill>
-                  <a:srgbClr val="E63946"/>
-                </a:solidFill>
-              </a:defRPr>
-            </a:pPr>
-            <a:r>
-              <a:t>[OBSERVED]</a:t>
-            </a:r>
-          </a:p>
-          <a:p>
-            <a:pPr>
-              <a:defRPr sz="1400" b="1">
-                <a:solidFill>
-                  <a:srgbClr val="FFFFFF"/>
-                </a:solidFill>
-              </a:defRPr>
-            </a:pPr>
-            <a:r>
-              <a:t>WHAT IS HAPPENING?</a:t>
-            </a:r>
-          </a:p>
-          <a:p>
-            <a:br/>
-            <a:pPr>
-              <a:defRPr sz="1100">
-                <a:solidFill>
-                  <a:srgbClr val="A0AEC0"/>
-                </a:solidFill>
-              </a:defRPr>
-            </a:pPr>
-            <a:r>
-              <a:t>23.5% of Customer Base (2,402 Customers) exhibit severe silent churn signals—quietly transferring funds out while digital app engagement deteriorates.</a:t>
-            </a:r>
-          </a:p>
-        </p:txBody>
-      </p:sp>
-      <p:sp>
-        <p:nvSpPr>
-          <p:cNvPr id="5" name="Rectangle 4"/>
-          <p:cNvSpPr/>
-          <p:nvPr/>
-        </p:nvSpPr>
-        <p:spPr>
-          <a:xfrm>
-            <a:off x="3429000" y="1645920"/>
-            <a:ext cx="2468880" cy="4389120"/>
-          </a:xfrm>
-          <a:prstGeom prst="rect">
-            <a:avLst/>
-          </a:prstGeom>
-          <a:solidFill>
-            <a:srgbClr val="1C2541"/>
-          </a:solidFill>
-          <a:ln w="19050">
-            <a:solidFill>
-              <a:srgbClr val="F4A261"/>
-            </a:solidFill>
-          </a:ln>
-        </p:spPr>
-        <p:style>
-          <a:lnRef idx="1">
-            <a:schemeClr val="accent1"/>
-          </a:lnRef>
-          <a:fillRef idx="3">
-            <a:schemeClr val="accent1"/>
-          </a:fillRef>
-          <a:effectRef idx="2">
-            <a:schemeClr val="accent1"/>
-          </a:effectRef>
-          <a:fontRef idx="minor">
-            <a:schemeClr val="lt1"/>
-          </a:fontRef>
-        </p:style>
-        <p:txBody>
-          <a:bodyPr rtlCol="0" anchor="ctr"/>
-          <a:lstStyle/>
-          <a:p>
-            <a:pPr algn="ctr"/>
-          </a:p>
-        </p:txBody>
-      </p:sp>
-      <p:sp>
-        <p:nvSpPr>
-          <p:cNvPr id="6" name="TextBox 5"/>
-          <p:cNvSpPr txBox="1"/>
-          <p:nvPr/>
-        </p:nvSpPr>
-        <p:spPr>
-          <a:xfrm>
-            <a:off x="3566160" y="1783080"/>
-            <a:ext cx="2194560" cy="4114800"/>
-          </a:xfrm>
-          <a:prstGeom prst="rect">
-            <a:avLst/>
-          </a:prstGeom>
-          <a:noFill/>
-        </p:spPr>
-        <p:txBody>
-          <a:bodyPr wrap="square">
-            <a:spAutoFit/>
-          </a:bodyPr>
-          <a:lstStyle/>
-          <a:p>
-            <a:pPr>
-              <a:defRPr sz="1000" b="1">
-                <a:solidFill>
-                  <a:srgbClr val="F4A261"/>
-                </a:solidFill>
-              </a:defRPr>
-            </a:pPr>
-            <a:r>
-              <a:t>[DERIVED]</a:t>
-            </a:r>
-          </a:p>
-          <a:p>
-            <a:pPr>
-              <a:defRPr sz="1400" b="1">
-                <a:solidFill>
-                  <a:srgbClr val="FFFFFF"/>
-                </a:solidFill>
-              </a:defRPr>
-            </a:pPr>
-            <a:r>
-              <a:t>WHY DOES IT MATTER?</a:t>
-            </a:r>
-          </a:p>
-          <a:p>
-            <a:br/>
-            <a:pPr>
-              <a:defRPr sz="1100">
-                <a:solidFill>
-                  <a:srgbClr val="A0AEC0"/>
-                </a:solidFill>
-              </a:defRPr>
-            </a:pPr>
-            <a:r>
-              <a:t>₹337.89 Crores in retail deposits (24.7% of total portfolio) are directly exposed to flight risk, concentrated heavily in high-margin Wealth &amp; Privileged tiers.</a:t>
-            </a:r>
-          </a:p>
-        </p:txBody>
-      </p:sp>
-      <p:sp>
-        <p:nvSpPr>
-          <p:cNvPr id="7" name="Rectangle 6"/>
-          <p:cNvSpPr/>
-          <p:nvPr/>
-        </p:nvSpPr>
-        <p:spPr>
-          <a:xfrm>
-            <a:off x="6126480" y="1645920"/>
-            <a:ext cx="2468880" cy="4389120"/>
-          </a:xfrm>
-          <a:prstGeom prst="rect">
-            <a:avLst/>
-          </a:prstGeom>
-          <a:solidFill>
-            <a:srgbClr val="1C2541"/>
-          </a:solidFill>
-          <a:ln w="19050">
-            <a:solidFill>
-              <a:srgbClr val="E9C46A"/>
-            </a:solidFill>
-          </a:ln>
-        </p:spPr>
-        <p:style>
-          <a:lnRef idx="1">
-            <a:schemeClr val="accent1"/>
-          </a:lnRef>
-          <a:fillRef idx="3">
-            <a:schemeClr val="accent1"/>
-          </a:fillRef>
-          <a:effectRef idx="2">
-            <a:schemeClr val="accent1"/>
-          </a:effectRef>
-          <a:fontRef idx="minor">
-            <a:schemeClr val="lt1"/>
-          </a:fontRef>
-        </p:style>
-        <p:txBody>
-          <a:bodyPr rtlCol="0" anchor="ctr"/>
-          <a:lstStyle/>
-          <a:p>
-            <a:pPr algn="ctr"/>
-          </a:p>
-        </p:txBody>
-      </p:sp>
-      <p:sp>
-        <p:nvSpPr>
-          <p:cNvPr id="8" name="TextBox 7"/>
-          <p:cNvSpPr txBox="1"/>
-          <p:nvPr/>
-        </p:nvSpPr>
-        <p:spPr>
-          <a:xfrm>
-            <a:off x="6263640" y="1783080"/>
-            <a:ext cx="2194560" cy="4114800"/>
-          </a:xfrm>
-          <a:prstGeom prst="rect">
-            <a:avLst/>
-          </a:prstGeom>
-          <a:noFill/>
-        </p:spPr>
-        <p:txBody>
-          <a:bodyPr wrap="square">
-            <a:spAutoFit/>
-          </a:bodyPr>
-          <a:lstStyle/>
-          <a:p>
-            <a:pPr>
-              <a:defRPr sz="1000" b="1">
-                <a:solidFill>
-                  <a:srgbClr val="E9C46A"/>
-                </a:solidFill>
-              </a:defRPr>
-            </a:pPr>
-            <a:r>
-              <a:t>[DERIVED]</a:t>
-            </a:r>
-          </a:p>
-          <a:p>
-            <a:pPr>
-              <a:defRPr sz="1400" b="1">
-                <a:solidFill>
-                  <a:srgbClr val="FFFFFF"/>
-                </a:solidFill>
-              </a:defRPr>
-            </a:pPr>
-            <a:r>
-              <a:t>WHICH SEGMENTS ARE EXPOSED?</a:t>
-            </a:r>
-          </a:p>
-          <a:p>
-            <a:br/>
-            <a:pPr>
-              <a:defRPr sz="1100">
-                <a:solidFill>
-                  <a:srgbClr val="A0AEC0"/>
-                </a:solidFill>
-              </a:defRPr>
-            </a:pPr>
-            <a:r>
-              <a:t>Wealth segment faces 48% of total deposit flight exposure. 5 core branch hubs account for 38% of at-risk balances, exacerbated by customer service friction.</a:t>
-            </a:r>
-          </a:p>
-        </p:txBody>
-      </p:sp>
-      <p:sp>
-        <p:nvSpPr>
-          <p:cNvPr id="9" name="Rectangle 8"/>
-          <p:cNvSpPr/>
-          <p:nvPr/>
-        </p:nvSpPr>
-        <p:spPr>
-          <a:xfrm>
-            <a:off x="8823960" y="1645920"/>
-            <a:ext cx="2468880" cy="4389120"/>
-          </a:xfrm>
-          <a:prstGeom prst="rect">
-            <a:avLst/>
-          </a:prstGeom>
-          <a:solidFill>
-            <a:srgbClr val="1C2541"/>
-          </a:solidFill>
-          <a:ln w="19050">
-            <a:solidFill>
-              <a:srgbClr val="2A9D8F"/>
-            </a:solidFill>
-          </a:ln>
-        </p:spPr>
-        <p:style>
-          <a:lnRef idx="1">
-            <a:schemeClr val="accent1"/>
-          </a:lnRef>
-          <a:fillRef idx="3">
-            <a:schemeClr val="accent1"/>
-          </a:fillRef>
-          <a:effectRef idx="2">
-            <a:schemeClr val="accent1"/>
-          </a:effectRef>
-          <a:fontRef idx="minor">
-            <a:schemeClr val="lt1"/>
-          </a:fontRef>
-        </p:style>
-        <p:txBody>
-          <a:bodyPr rtlCol="0" anchor="ctr"/>
-          <a:lstStyle/>
-          <a:p>
-            <a:pPr algn="ctr"/>
-          </a:p>
-        </p:txBody>
-      </p:sp>
-      <p:sp>
-        <p:nvSpPr>
-          <p:cNvPr id="10" name="TextBox 9"/>
-          <p:cNvSpPr txBox="1"/>
-          <p:nvPr/>
-        </p:nvSpPr>
-        <p:spPr>
-          <a:xfrm>
-            <a:off x="8961120" y="1783080"/>
-            <a:ext cx="2194560" cy="4114800"/>
-          </a:xfrm>
-          <a:prstGeom prst="rect">
-            <a:avLst/>
-          </a:prstGeom>
-          <a:noFill/>
-        </p:spPr>
-        <p:txBody>
-          <a:bodyPr wrap="square">
-            <a:spAutoFit/>
-          </a:bodyPr>
-          <a:lstStyle/>
-          <a:p>
-            <a:pPr>
-              <a:defRPr sz="1000" b="1">
-                <a:solidFill>
-                  <a:srgbClr val="2A9D8F"/>
-                </a:solidFill>
-              </a:defRPr>
-            </a:pPr>
-            <a:r>
-              <a:t>[RECOMMENDED]</a:t>
-            </a:r>
-          </a:p>
-          <a:p>
-            <a:pPr>
-              <a:defRPr sz="1400" b="1">
-                <a:solidFill>
-                  <a:srgbClr val="FFFFFF"/>
-                </a:solidFill>
-              </a:defRPr>
-            </a:pPr>
-            <a:r>
-              <a:t>WHAT SHOULD MANAGEMENT DO?</a:t>
-            </a:r>
-          </a:p>
-          <a:p>
-            <a:br/>
-            <a:pPr>
-              <a:defRPr sz="1100">
-                <a:solidFill>
-                  <a:srgbClr val="A0AEC0"/>
-                </a:solidFill>
-              </a:defRPr>
-            </a:pPr>
-            <a:r>
-              <a:t>Execute a 6-Archetype Action Plan: prioritized 48-hour RM outreach for high-value clients, KYC &amp; data cleanup, and proactive resolution of dispute-heavy channels.</a:t>
-            </a:r>
-          </a:p>
-        </p:txBody>
-      </p:sp>
-    </p:spTree>
-  </p:cSld>
-  <p:clrMapOvr>
-    <a:masterClrMapping/>
-  </p:clrMapOvr>
-</p:sld>
-</file>
-
-<file path=ppt/slides/slide3.xml><?xml version="1.0" encoding="utf-8"?>
-<p:sld xmlns:a="http://schemas.openxmlformats.org/drawingml/2006/main" xmlns:p="http://schemas.openxmlformats.org/presentationml/2006/main" xmlns:r="http://schemas.openxmlformats.org/officeDocument/2006/relationships">
-  <p:cSld>
-    <p:bg>
-      <p:bgPr>
-        <a:solidFill>
-          <a:srgbClr val="0B132B"/>
-        </a:solidFill>
-        <a:effectLst/>
-      </p:bgPr>
-    </p:bg>
-    <p:spTree>
-      <p:nvGrpSpPr>
-        <p:cNvPr id="1" name=""/>
-        <p:cNvGrpSpPr/>
-        <p:nvPr/>
-      </p:nvGrpSpPr>
-      <p:grpSpPr/>
-      <p:sp>
-        <p:nvSpPr>
-          <p:cNvPr id="2" name="TextBox 1"/>
-          <p:cNvSpPr txBox="1"/>
-          <p:nvPr/>
-        </p:nvSpPr>
-        <p:spPr>
-          <a:xfrm>
-            <a:off x="731520" y="365760"/>
-            <a:ext cx="10698480" cy="914400"/>
-          </a:xfrm>
-          <a:prstGeom prst="rect">
-            <a:avLst/>
-          </a:prstGeom>
-          <a:noFill/>
-        </p:spPr>
-        <p:txBody>
-          <a:bodyPr wrap="square" lIns="0" tIns="0" rIns="0" bIns="0">
-            <a:spAutoFit/>
-          </a:bodyPr>
-          <a:lstStyle/>
-          <a:p>
-            <a:pPr>
-              <a:defRPr sz="1000" b="1">
-                <a:solidFill>
-                  <a:srgbClr val="48CAE4"/>
-                </a:solidFill>
-              </a:defRPr>
-            </a:pPr>
-            <a:r>
-              <a:t>DATA ARCHITECTURE</a:t>
-            </a:r>
-          </a:p>
-          <a:p>
-            <a:pPr>
-              <a:defRPr sz="2200" b="1">
-                <a:solidFill>
-                  <a:srgbClr val="FFFFFF"/>
-                </a:solidFill>
-              </a:defRPr>
-            </a:pPr>
-            <a:r>
-              <a:t>Enterprise Customer 360 Architecture &amp; Pipeline</a:t>
-            </a:r>
-          </a:p>
-        </p:txBody>
-      </p:sp>
-      <p:sp>
-        <p:nvSpPr>
-          <p:cNvPr id="3" name="Rectangle 2"/>
-          <p:cNvSpPr/>
-          <p:nvPr/>
-        </p:nvSpPr>
-        <p:spPr>
-          <a:xfrm>
-            <a:off x="731520" y="1645920"/>
-            <a:ext cx="10698480" cy="4389120"/>
-          </a:xfrm>
-          <a:prstGeom prst="rect">
-            <a:avLst/>
-          </a:prstGeom>
-          <a:solidFill>
-            <a:srgbClr val="1C2541"/>
-          </a:solidFill>
-          <a:ln>
-            <a:noFill/>
-          </a:ln>
-        </p:spPr>
-        <p:style>
-          <a:lnRef idx="1">
-            <a:schemeClr val="accent1"/>
-          </a:lnRef>
-          <a:fillRef idx="3">
-            <a:schemeClr val="accent1"/>
-          </a:fillRef>
-          <a:effectRef idx="2">
-            <a:schemeClr val="accent1"/>
-          </a:effectRef>
-          <a:fontRef idx="minor">
-            <a:schemeClr val="lt1"/>
-          </a:fontRef>
-        </p:style>
-        <p:txBody>
-          <a:bodyPr rtlCol="0" anchor="ctr"/>
-          <a:lstStyle/>
-          <a:p>
-            <a:pPr algn="ctr"/>
-          </a:p>
-        </p:txBody>
-      </p:sp>
-      <p:sp>
-        <p:nvSpPr>
-          <p:cNvPr id="4" name="TextBox 3"/>
-          <p:cNvSpPr txBox="1"/>
-          <p:nvPr/>
-        </p:nvSpPr>
-        <p:spPr>
-          <a:xfrm>
-            <a:off x="1005840" y="1828800"/>
-            <a:ext cx="10149840" cy="4023360"/>
-          </a:xfrm>
-          <a:prstGeom prst="rect">
-            <a:avLst/>
-          </a:prstGeom>
-          <a:noFill/>
-        </p:spPr>
-        <p:txBody>
-          <a:bodyPr wrap="square">
-            <a:spAutoFit/>
-          </a:bodyPr>
-          <a:lstStyle/>
-          <a:p>
-            <a:pPr>
-              <a:defRPr sz="1600" b="1">
-                <a:solidFill>
-                  <a:srgbClr val="48CAE4"/>
-                </a:solidFill>
-              </a:defRPr>
-            </a:pPr>
-            <a:r>
-              <a:t>Deterministic Multi-Domain Ingestion &amp; Consolidation [DERIVED]</a:t>
-            </a:r>
-          </a:p>
-          <a:p>
-            <a:br/>
-            <a:pPr>
-              <a:defRPr sz="1200">
-                <a:solidFill>
-                  <a:srgbClr val="FFFFFF"/>
-                </a:solidFill>
-              </a:defRPr>
-            </a:pPr>
-            <a:r>
-              <a:t>• Raw Layer (6 Disjoint Silos): 10,200 Customers, 14,000 Accounts, 150,000 Transactions, 5,000 Loans, 12,000 Service Records, 150,000 Digital Activity Logs.</a:t>
-            </a:r>
-          </a:p>
-          <a:p>
-            <a:br/>
-            <a:pPr>
-              <a:defRPr sz="1200">
-                <a:solidFill>
-                  <a:srgbClr val="FFFFFF"/>
-                </a:solidFill>
-              </a:defRPr>
-            </a:pPr>
-            <a:r>
-              <a:t>• Staging &amp; Standardization: Standardized PAN, Phone, Email, Segment casing, and Date formats into staging datasets. Strict data preservation (raw values retained alongside standardized values).</a:t>
-            </a:r>
-          </a:p>
-          <a:p>
-            <a:br/>
-            <a:pPr>
-              <a:defRPr sz="1200">
-                <a:solidFill>
-                  <a:srgbClr val="FFFFFF"/>
-                </a:solidFill>
-              </a:defRPr>
-            </a:pPr>
-            <a:r>
-              <a:t>• Entity Resolution Engine: RapidFuzz fuzzy clustering resolved 2,039 candidate match pairs across name permutations, shared PANs, and contact overlaps.</a:t>
-            </a:r>
-          </a:p>
-          <a:p>
-            <a:br/>
-            <a:pPr>
-              <a:defRPr sz="1200">
-                <a:solidFill>
-                  <a:srgbClr val="FFFFFF"/>
-                </a:solidFill>
-              </a:defRPr>
-            </a:pPr>
-            <a:r>
-              <a:t>• Curated Feature Layer: Formed 5 customer-level aggregations (Account, Money Movement, Credit, Grievance, and Digital Inactivity features).</a:t>
-            </a:r>
-          </a:p>
-          <a:p>
-            <a:br/>
-            <a:pPr>
-              <a:defRPr sz="1200">
-                <a:solidFill>
-                  <a:srgbClr val="FFFFFF"/>
-                </a:solidFill>
-              </a:defRPr>
-            </a:pPr>
-            <a:r>
-              <a:t>• Unified Customer 360: Exactly 1 row per unique Customer_ID (10,200 rows, 57 verified feature columns). Zero duplicate customer keys, 100% financial reconciliation to core banking ledgers.</a:t>
-            </a:r>
-          </a:p>
-        </p:txBody>
-      </p:sp>
-    </p:spTree>
-  </p:cSld>
-  <p:clrMapOvr>
-    <a:masterClrMapping/>
-  </p:clrMapOvr>
-</p:sld>
-</file>
-
-<file path=ppt/slides/slide4.xml><?xml version="1.0" encoding="utf-8"?>
-<p:sld xmlns:a="http://schemas.openxmlformats.org/drawingml/2006/main" xmlns:p="http://schemas.openxmlformats.org/presentationml/2006/main" xmlns:r="http://schemas.openxmlformats.org/officeDocument/2006/relationships">
-  <p:cSld>
-    <p:bg>
-      <p:bgPr>
-        <a:solidFill>
-          <a:srgbClr val="0B132B"/>
-        </a:solidFill>
-        <a:effectLst/>
-      </p:bgPr>
-    </p:bg>
-    <p:spTree>
-      <p:nvGrpSpPr>
-        <p:cNvPr id="1" name=""/>
-        <p:cNvGrpSpPr/>
-        <p:nvPr/>
-      </p:nvGrpSpPr>
-      <p:grpSpPr/>
-      <p:sp>
-        <p:nvSpPr>
-          <p:cNvPr id="2" name="TextBox 1"/>
-          <p:cNvSpPr txBox="1"/>
-          <p:nvPr/>
-        </p:nvSpPr>
-        <p:spPr>
-          <a:xfrm>
-            <a:off x="731520" y="365760"/>
-            <a:ext cx="10698480" cy="914400"/>
-          </a:xfrm>
-          <a:prstGeom prst="rect">
-            <a:avLst/>
-          </a:prstGeom>
-          <a:noFill/>
-        </p:spPr>
-        <p:txBody>
-          <a:bodyPr wrap="square" lIns="0" tIns="0" rIns="0" bIns="0">
-            <a:spAutoFit/>
-          </a:bodyPr>
-          <a:lstStyle/>
-          <a:p>
-            <a:pPr>
-              <a:defRPr sz="1000" b="1">
-                <a:solidFill>
-                  <a:srgbClr val="48CAE4"/>
-                </a:solidFill>
-              </a:defRPr>
-            </a:pPr>
-            <a:r>
-              <a:t>DATA GOVERNANCE</a:t>
-            </a:r>
-          </a:p>
-          <a:p>
-            <a:pPr>
-              <a:defRPr sz="2200" b="1">
-                <a:solidFill>
-                  <a:srgbClr val="FFFFFF"/>
-                </a:solidFill>
-              </a:defRPr>
-            </a:pPr>
-            <a:r>
-              <a:t>Data Quality Diagnostic: 16 Detected Candidate Defects</a:t>
-            </a:r>
-          </a:p>
-        </p:txBody>
-      </p:sp>
-      <p:sp>
-        <p:nvSpPr>
-          <p:cNvPr id="3" name="Rectangle 2"/>
-          <p:cNvSpPr/>
-          <p:nvPr/>
-        </p:nvSpPr>
-        <p:spPr>
-          <a:xfrm>
-            <a:off x="731520" y="1645920"/>
-            <a:ext cx="3383280" cy="4389120"/>
-          </a:xfrm>
-          <a:prstGeom prst="rect">
-            <a:avLst/>
-          </a:prstGeom>
-          <a:solidFill>
-            <a:srgbClr val="1C2541"/>
-          </a:solidFill>
-          <a:ln w="19050">
-            <a:solidFill>
-              <a:srgbClr val="E63946"/>
-            </a:solidFill>
-          </a:ln>
-        </p:spPr>
-        <p:style>
-          <a:lnRef idx="1">
-            <a:schemeClr val="accent1"/>
-          </a:lnRef>
-          <a:fillRef idx="3">
-            <a:schemeClr val="accent1"/>
-          </a:fillRef>
-          <a:effectRef idx="2">
-            <a:schemeClr val="accent1"/>
-          </a:effectRef>
-          <a:fontRef idx="minor">
-            <a:schemeClr val="lt1"/>
-          </a:fontRef>
-        </p:style>
-        <p:txBody>
-          <a:bodyPr rtlCol="0" anchor="ctr"/>
-          <a:lstStyle/>
-          <a:p>
-            <a:pPr algn="ctr"/>
-          </a:p>
-        </p:txBody>
-      </p:sp>
-      <p:sp>
-        <p:nvSpPr>
-          <p:cNvPr id="4" name="TextBox 3"/>
-          <p:cNvSpPr txBox="1"/>
-          <p:nvPr/>
-        </p:nvSpPr>
-        <p:spPr>
-          <a:xfrm>
-            <a:off x="868680" y="1783080"/>
-            <a:ext cx="3108960" cy="4114800"/>
-          </a:xfrm>
-          <a:prstGeom prst="rect">
-            <a:avLst/>
-          </a:prstGeom>
-          <a:noFill/>
-        </p:spPr>
-        <p:txBody>
-          <a:bodyPr wrap="square">
-            <a:spAutoFit/>
-          </a:bodyPr>
-          <a:lstStyle/>
-          <a:p>
-            <a:pPr>
-              <a:defRPr sz="1300" b="1">
-                <a:solidFill>
-                  <a:srgbClr val="E63946"/>
-                </a:solidFill>
-              </a:defRPr>
-            </a:pPr>
-            <a:r>
-              <a:t>7 CRITICAL DEFECTS</a:t>
-            </a:r>
-          </a:p>
-          <a:p>
-            <a:br/>
-            <a:pPr>
-              <a:defRPr sz="1000">
-                <a:solidFill>
-                  <a:srgbClr val="FFFFFF"/>
-                </a:solidFill>
-              </a:defRPr>
-            </a:pPr>
-            <a:r>
-              <a:t>• Missing PAN (DQ-001): 20 accounts missing tax identifiers.</a:t>
-            </a:r>
-          </a:p>
-          <a:p>
-            <a:br/>
-            <a:pPr>
-              <a:defRPr sz="1000">
-                <a:solidFill>
-                  <a:srgbClr val="FFFFFF"/>
-                </a:solidFill>
-              </a:defRPr>
-            </a:pPr>
-            <a:r>
-              <a:t>• Duplicate PAN (DQ-007): 480 accounts sharing PAN credentials.</a:t>
-            </a:r>
-          </a:p>
-          <a:p>
-            <a:br/>
-            <a:pPr>
-              <a:defRPr sz="1000">
-                <a:solidFill>
-                  <a:srgbClr val="FFFFFF"/>
-                </a:solidFill>
-              </a:defRPr>
-            </a:pPr>
-            <a:r>
-              <a:t>• Invalid PAN Format (DQ-009): 82 regex format violations.</a:t>
-            </a:r>
-          </a:p>
-          <a:p>
-            <a:br/>
-            <a:pPr>
-              <a:defRPr sz="1000">
-                <a:solidFill>
-                  <a:srgbClr val="FFFFFF"/>
-                </a:solidFill>
-              </a:defRPr>
-            </a:pPr>
-            <a:r>
-              <a:t>• Orphan Transactions (DQ-022): 1,488 txns tied to unmapped accounts.</a:t>
-            </a:r>
-          </a:p>
-          <a:p>
-            <a:br/>
-            <a:pPr>
-              <a:defRPr sz="1000">
-                <a:solidFill>
-                  <a:srgbClr val="FFFFFF"/>
-                </a:solidFill>
-              </a:defRPr>
-            </a:pPr>
-            <a:r>
-              <a:t>• Orphan Loans (DQ-023): 25 loans missing Customer_Master keys.</a:t>
-            </a:r>
-          </a:p>
-          <a:p>
-            <a:br/>
-            <a:pPr>
-              <a:defRPr sz="1000">
-                <a:solidFill>
-                  <a:srgbClr val="FFFFFF"/>
-                </a:solidFill>
-              </a:defRPr>
-            </a:pPr>
-            <a:r>
-              <a:t>• NPA Classification Mismatch (DQ-029): 10 loans marked NPA with DPD &lt;= 90.</a:t>
-            </a:r>
-          </a:p>
-        </p:txBody>
-      </p:sp>
-      <p:sp>
-        <p:nvSpPr>
-          <p:cNvPr id="5" name="Rectangle 4"/>
-          <p:cNvSpPr/>
-          <p:nvPr/>
-        </p:nvSpPr>
-        <p:spPr>
-          <a:xfrm>
-            <a:off x="4389120" y="1645920"/>
-            <a:ext cx="3383280" cy="4389120"/>
-          </a:xfrm>
-          <a:prstGeom prst="rect">
-            <a:avLst/>
-          </a:prstGeom>
-          <a:solidFill>
-            <a:srgbClr val="1C2541"/>
-          </a:solidFill>
-          <a:ln w="19050">
-            <a:solidFill>
-              <a:srgbClr val="F4A261"/>
-            </a:solidFill>
-          </a:ln>
-        </p:spPr>
-        <p:style>
-          <a:lnRef idx="1">
-            <a:schemeClr val="accent1"/>
-          </a:lnRef>
-          <a:fillRef idx="3">
-            <a:schemeClr val="accent1"/>
-          </a:fillRef>
-          <a:effectRef idx="2">
-            <a:schemeClr val="accent1"/>
-          </a:effectRef>
-          <a:fontRef idx="minor">
-            <a:schemeClr val="lt1"/>
-          </a:fontRef>
-        </p:style>
-        <p:txBody>
-          <a:bodyPr rtlCol="0" anchor="ctr"/>
-          <a:lstStyle/>
-          <a:p>
-            <a:pPr algn="ctr"/>
-          </a:p>
-        </p:txBody>
-      </p:sp>
-      <p:sp>
-        <p:nvSpPr>
-          <p:cNvPr id="6" name="TextBox 5"/>
-          <p:cNvSpPr txBox="1"/>
-          <p:nvPr/>
-        </p:nvSpPr>
-        <p:spPr>
-          <a:xfrm>
-            <a:off x="4526280" y="1783080"/>
-            <a:ext cx="3108960" cy="4114800"/>
-          </a:xfrm>
-          <a:prstGeom prst="rect">
-            <a:avLst/>
-          </a:prstGeom>
-          <a:noFill/>
-        </p:spPr>
-        <p:txBody>
-          <a:bodyPr wrap="square">
-            <a:spAutoFit/>
-          </a:bodyPr>
-          <a:lstStyle/>
-          <a:p>
-            <a:pPr>
-              <a:defRPr sz="1300" b="1">
-                <a:solidFill>
-                  <a:srgbClr val="F4A261"/>
-                </a:solidFill>
-              </a:defRPr>
-            </a:pPr>
-            <a:r>
-              <a:t>7 HIGH-SEVERITY DEFECTS</a:t>
-            </a:r>
-          </a:p>
-          <a:p>
-            <a:br/>
-            <a:pPr>
-              <a:defRPr sz="1000">
-                <a:solidFill>
-                  <a:srgbClr val="FFFFFF"/>
-                </a:solidFill>
-              </a:defRPr>
-            </a:pPr>
-            <a:r>
-              <a:t>• Missing KYC Status (DQ-004): 306 customer records incomplete.</a:t>
-            </a:r>
-          </a:p>
-          <a:p>
-            <a:br/>
-            <a:pPr>
-              <a:defRPr sz="1000">
-                <a:solidFill>
-                  <a:srgbClr val="FFFFFF"/>
-                </a:solidFill>
-              </a:defRPr>
-            </a:pPr>
-            <a:r>
-              <a:t>• Duplicate Emails (DQ-008): 352 accounts sharing emails.</a:t>
-            </a:r>
-          </a:p>
-          <a:p>
-            <a:br/>
-            <a:pPr>
-              <a:defRPr sz="1000">
-                <a:solidFill>
-                  <a:srgbClr val="FFFFFF"/>
-                </a:solidFill>
-              </a:defRPr>
-            </a:pPr>
-            <a:r>
-              <a:t>• Invalid Email Format (DQ-010): 102 syntax errors.</a:t>
-            </a:r>
-          </a:p>
-          <a:p>
-            <a:br/>
-            <a:pPr>
-              <a:defRPr sz="1000">
-                <a:solidFill>
-                  <a:srgbClr val="FFFFFF"/>
-                </a:solidFill>
-              </a:defRPr>
-            </a:pPr>
-            <a:r>
-              <a:t>• Future Onboarding Dates (DQ-024): 46 temporal anomalies.</a:t>
-            </a:r>
-          </a:p>
-          <a:p>
-            <a:br/>
-            <a:pPr>
-              <a:defRPr sz="1000">
-                <a:solidFill>
-                  <a:srgbClr val="FFFFFF"/>
-                </a:solidFill>
-              </a:defRPr>
-            </a:pPr>
-            <a:r>
-              <a:t>• Future Account Open Dates (DQ-025): 66 accounts opened up to 2027.</a:t>
-            </a:r>
-          </a:p>
-          <a:p>
-            <a:br/>
-            <a:pPr>
-              <a:defRPr sz="1000">
-                <a:solidFill>
-                  <a:srgbClr val="FFFFFF"/>
-                </a:solidFill>
-              </a:defRPr>
-            </a:pPr>
-            <a:r>
-              <a:t>• Negative Balance (DQ-027): 140 non-overdraft accounts with negative balance.</a:t>
-            </a:r>
-          </a:p>
-        </p:txBody>
-      </p:sp>
-      <p:sp>
-        <p:nvSpPr>
-          <p:cNvPr id="7" name="Rectangle 6"/>
-          <p:cNvSpPr/>
-          <p:nvPr/>
-        </p:nvSpPr>
-        <p:spPr>
-          <a:xfrm>
-            <a:off x="8046720" y="1645920"/>
-            <a:ext cx="3383280" cy="4389120"/>
-          </a:xfrm>
-          <a:prstGeom prst="rect">
-            <a:avLst/>
-          </a:prstGeom>
-          <a:solidFill>
-            <a:srgbClr val="1C2541"/>
-          </a:solidFill>
-          <a:ln w="19050">
-            <a:solidFill>
-              <a:srgbClr val="48CAE4"/>
-            </a:solidFill>
-          </a:ln>
-        </p:spPr>
-        <p:style>
-          <a:lnRef idx="1">
-            <a:schemeClr val="accent1"/>
-          </a:lnRef>
-          <a:fillRef idx="3">
-            <a:schemeClr val="accent1"/>
-          </a:fillRef>
-          <a:effectRef idx="2">
-            <a:schemeClr val="accent1"/>
-          </a:effectRef>
-          <a:fontRef idx="minor">
-            <a:schemeClr val="lt1"/>
-          </a:fontRef>
-        </p:style>
-        <p:txBody>
-          <a:bodyPr rtlCol="0" anchor="ctr"/>
-          <a:lstStyle/>
-          <a:p>
-            <a:pPr algn="ctr"/>
-          </a:p>
-        </p:txBody>
-      </p:sp>
-      <p:sp>
-        <p:nvSpPr>
-          <p:cNvPr id="8" name="TextBox 7"/>
-          <p:cNvSpPr txBox="1"/>
-          <p:nvPr/>
-        </p:nvSpPr>
-        <p:spPr>
-          <a:xfrm>
-            <a:off x="8183880" y="1783080"/>
-            <a:ext cx="3108960" cy="4114800"/>
-          </a:xfrm>
-          <a:prstGeom prst="rect">
-            <a:avLst/>
-          </a:prstGeom>
-          <a:noFill/>
-        </p:spPr>
-        <p:txBody>
-          <a:bodyPr wrap="square">
-            <a:spAutoFit/>
-          </a:bodyPr>
-          <a:lstStyle/>
-          <a:p>
-            <a:pPr>
-              <a:defRPr sz="1300" b="1">
-                <a:solidFill>
-                  <a:srgbClr val="48CAE4"/>
-                </a:solidFill>
-              </a:defRPr>
-            </a:pPr>
-            <a:r>
-              <a:t>GOVERNANCE &amp; DOWNSTREAM IMPACT</a:t>
-            </a:r>
-          </a:p>
-          <a:p>
-            <a:br/>
-            <a:pPr>
-              <a:defRPr sz="1000">
-                <a:solidFill>
-                  <a:srgbClr val="FFFFFF"/>
-                </a:solidFill>
-              </a:defRPr>
-            </a:pPr>
-            <a:r>
-              <a:t>• Regulatory Exposure [OBSERVED]: RBI KYC &amp; AML violations from shared PANs.</a:t>
-            </a:r>
-          </a:p>
-          <a:p>
-            <a:br/>
-            <a:pPr>
-              <a:defRPr sz="1000">
-                <a:solidFill>
-                  <a:srgbClr val="FFFFFF"/>
-                </a:solidFill>
-              </a:defRPr>
-            </a:pPr>
-            <a:r>
-              <a:t>• Credit Impairment [DERIVED]: Inaccurate provisioning from orphan loans &amp; premature NPA flags.</a:t>
-            </a:r>
-          </a:p>
-          <a:p>
-            <a:br/>
-            <a:pPr>
-              <a:defRPr sz="1000">
-                <a:solidFill>
-                  <a:srgbClr val="FFFFFF"/>
-                </a:solidFill>
-              </a:defRPr>
-            </a:pPr>
-            <a:r>
-              <a:t>• Silent Churn Blindspot [INFERRED]: 1,214 customers have impaired data confidence, distorting risk flags.</a:t>
-            </a:r>
-          </a:p>
-          <a:p>
-            <a:br/>
-            <a:pPr>
-              <a:defRPr sz="1000">
-                <a:solidFill>
-                  <a:srgbClr val="FFFFFF"/>
-                </a:solidFill>
-              </a:defRPr>
-            </a:pPr>
-            <a:r>
-              <a:t>• Quarantine Pipeline [RECOMMENDED]: Automated routing of defect records into data/quarantine/.</a:t>
-            </a:r>
-          </a:p>
-        </p:txBody>
-      </p:sp>
-    </p:spTree>
-  </p:cSld>
-  <p:clrMapOvr>
-    <a:masterClrMapping/>
-  </p:clrMapOvr>
-</p:sld>
-</file>
-
-<file path=ppt/slides/slide5.xml><?xml version="1.0" encoding="utf-8"?>
-<p:sld xmlns:a="http://schemas.openxmlformats.org/drawingml/2006/main" xmlns:p="http://schemas.openxmlformats.org/presentationml/2006/main" xmlns:r="http://schemas.openxmlformats.org/officeDocument/2006/relationships">
-  <p:cSld>
-    <p:bg>
-      <p:bgPr>
-        <a:solidFill>
-          <a:srgbClr val="0B132B"/>
-        </a:solidFill>
-        <a:effectLst/>
-      </p:bgPr>
-    </p:bg>
-    <p:spTree>
-      <p:nvGrpSpPr>
-        <p:cNvPr id="1" name=""/>
-        <p:cNvGrpSpPr/>
-        <p:nvPr/>
-      </p:nvGrpSpPr>
-      <p:grpSpPr/>
-      <p:sp>
-        <p:nvSpPr>
-          <p:cNvPr id="2" name="TextBox 1"/>
-          <p:cNvSpPr txBox="1"/>
-          <p:nvPr/>
-        </p:nvSpPr>
-        <p:spPr>
-          <a:xfrm>
-            <a:off x="731520" y="365760"/>
-            <a:ext cx="10698480" cy="914400"/>
-          </a:xfrm>
-          <a:prstGeom prst="rect">
-            <a:avLst/>
-          </a:prstGeom>
-          <a:noFill/>
-        </p:spPr>
-        <p:txBody>
-          <a:bodyPr wrap="square" lIns="0" tIns="0" rIns="0" bIns="0">
-            <a:spAutoFit/>
-          </a:bodyPr>
-          <a:lstStyle/>
-          <a:p>
-            <a:pPr>
-              <a:defRPr sz="1000" b="1">
-                <a:solidFill>
-                  <a:srgbClr val="48CAE4"/>
-                </a:solidFill>
-              </a:defRPr>
-            </a:pPr>
-            <a:r>
-              <a:t>RISK QUANTIFICATION</a:t>
-            </a:r>
-          </a:p>
-          <a:p>
-            <a:pPr>
-              <a:defRPr sz="2200" b="1">
-                <a:solidFill>
-                  <a:srgbClr val="FFFFFF"/>
-                </a:solidFill>
-              </a:defRPr>
-            </a:pPr>
-            <a:r>
-              <a:t>Portfolio Exposure: Customer Value vs. Churn Risk</a:t>
-            </a:r>
-          </a:p>
-        </p:txBody>
-      </p:sp>
-      <p:sp>
-        <p:nvSpPr>
-          <p:cNvPr id="3" name="Rectangle 2"/>
-          <p:cNvSpPr/>
-          <p:nvPr/>
-        </p:nvSpPr>
-        <p:spPr>
-          <a:xfrm>
-            <a:off x="731520" y="1645920"/>
-            <a:ext cx="3383280" cy="1280160"/>
-          </a:xfrm>
-          <a:prstGeom prst="rect">
-            <a:avLst/>
-          </a:prstGeom>
-          <a:solidFill>
-            <a:srgbClr val="1C2541"/>
-          </a:solidFill>
-          <a:ln w="19050">
-            <a:solidFill>
-              <a:srgbClr val="48CAE4"/>
-            </a:solidFill>
-          </a:ln>
-        </p:spPr>
-        <p:style>
-          <a:lnRef idx="1">
-            <a:schemeClr val="accent1"/>
-          </a:lnRef>
-          <a:fillRef idx="3">
-            <a:schemeClr val="accent1"/>
-          </a:fillRef>
-          <a:effectRef idx="2">
-            <a:schemeClr val="accent1"/>
-          </a:effectRef>
-          <a:fontRef idx="minor">
-            <a:schemeClr val="lt1"/>
-          </a:fontRef>
-        </p:style>
-        <p:txBody>
-          <a:bodyPr rtlCol="0" anchor="ctr"/>
-          <a:lstStyle/>
-          <a:p>
-            <a:pPr algn="ctr"/>
-          </a:p>
-        </p:txBody>
-      </p:sp>
-      <p:sp>
-        <p:nvSpPr>
-          <p:cNvPr id="4" name="TextBox 3"/>
-          <p:cNvSpPr txBox="1"/>
-          <p:nvPr/>
-        </p:nvSpPr>
-        <p:spPr>
-          <a:xfrm>
-            <a:off x="868680" y="1737360"/>
-            <a:ext cx="3108960" cy="1097280"/>
-          </a:xfrm>
-          <a:prstGeom prst="rect">
-            <a:avLst/>
-          </a:prstGeom>
-          <a:noFill/>
-        </p:spPr>
-        <p:txBody>
-          <a:bodyPr wrap="none">
-            <a:spAutoFit/>
-          </a:bodyPr>
-          <a:lstStyle/>
-          <a:p>
-            <a:pPr>
-              <a:defRPr sz="900">
-                <a:solidFill>
-                  <a:srgbClr val="A0AEC0"/>
-                </a:solidFill>
-              </a:defRPr>
-            </a:pPr>
-            <a:r>
-              <a:t>TOTAL RETAIL DEPOSIT PORTFOLIO</a:t>
-            </a:r>
-          </a:p>
-          <a:p>
-            <a:pPr>
-              <a:defRPr sz="2200" b="1">
-                <a:solidFill>
-                  <a:srgbClr val="48CAE4"/>
-                </a:solidFill>
-              </a:defRPr>
-            </a:pPr>
-            <a:r>
-              <a:t>₹1,365.42 Cr</a:t>
-            </a:r>
-          </a:p>
-          <a:p>
-            <a:pPr>
-              <a:defRPr sz="1000">
-                <a:solidFill>
-                  <a:srgbClr val="FFFFFF"/>
-                </a:solidFill>
-              </a:defRPr>
-            </a:pPr>
-            <a:r>
-              <a:t>10,200 Customers</a:t>
-            </a:r>
-          </a:p>
-        </p:txBody>
-      </p:sp>
-      <p:sp>
-        <p:nvSpPr>
-          <p:cNvPr id="5" name="Rectangle 4"/>
-          <p:cNvSpPr/>
-          <p:nvPr/>
-        </p:nvSpPr>
-        <p:spPr>
-          <a:xfrm>
-            <a:off x="4389120" y="1645920"/>
-            <a:ext cx="3383280" cy="1280160"/>
-          </a:xfrm>
-          <a:prstGeom prst="rect">
-            <a:avLst/>
-          </a:prstGeom>
-          <a:solidFill>
-            <a:srgbClr val="1C2541"/>
-          </a:solidFill>
-          <a:ln w="19050">
-            <a:solidFill>
-              <a:srgbClr val="E63946"/>
-            </a:solidFill>
-          </a:ln>
-        </p:spPr>
-        <p:style>
-          <a:lnRef idx="1">
-            <a:schemeClr val="accent1"/>
-          </a:lnRef>
-          <a:fillRef idx="3">
-            <a:schemeClr val="accent1"/>
-          </a:fillRef>
-          <a:effectRef idx="2">
-            <a:schemeClr val="accent1"/>
-          </a:effectRef>
-          <a:fontRef idx="minor">
-            <a:schemeClr val="lt1"/>
-          </a:fontRef>
-        </p:style>
-        <p:txBody>
-          <a:bodyPr rtlCol="0" anchor="ctr"/>
-          <a:lstStyle/>
-          <a:p>
-            <a:pPr algn="ctr"/>
-          </a:p>
-        </p:txBody>
-      </p:sp>
-      <p:sp>
-        <p:nvSpPr>
-          <p:cNvPr id="6" name="TextBox 5"/>
-          <p:cNvSpPr txBox="1"/>
-          <p:nvPr/>
-        </p:nvSpPr>
-        <p:spPr>
-          <a:xfrm>
-            <a:off x="4526280" y="1737360"/>
-            <a:ext cx="3108960" cy="1097280"/>
-          </a:xfrm>
-          <a:prstGeom prst="rect">
-            <a:avLst/>
-          </a:prstGeom>
-          <a:noFill/>
-        </p:spPr>
-        <p:txBody>
-          <a:bodyPr wrap="none">
-            <a:spAutoFit/>
-          </a:bodyPr>
-          <a:lstStyle/>
-          <a:p>
-            <a:pPr>
-              <a:defRPr sz="900">
-                <a:solidFill>
-                  <a:srgbClr val="A0AEC0"/>
-                </a:solidFill>
-              </a:defRPr>
-            </a:pPr>
-            <a:r>
-              <a:t>TOTAL BALANCE AT CHURN RISK</a:t>
-            </a:r>
-          </a:p>
-          <a:p>
-            <a:pPr>
-              <a:defRPr sz="2200" b="1">
-                <a:solidFill>
-                  <a:srgbClr val="E63946"/>
-                </a:solidFill>
-              </a:defRPr>
-            </a:pPr>
-            <a:r>
-              <a:t>₹337.89 Cr</a:t>
-            </a:r>
-          </a:p>
-          <a:p>
-            <a:pPr>
-              <a:defRPr sz="1000">
-                <a:solidFill>
-                  <a:srgbClr val="FFFFFF"/>
-                </a:solidFill>
-              </a:defRPr>
-            </a:pPr>
-            <a:r>
-              <a:t>24.7% of Portfolio Liabilities</a:t>
-            </a:r>
-          </a:p>
-        </p:txBody>
-      </p:sp>
-      <p:sp>
-        <p:nvSpPr>
-          <p:cNvPr id="7" name="Rectangle 6"/>
-          <p:cNvSpPr/>
-          <p:nvPr/>
-        </p:nvSpPr>
-        <p:spPr>
-          <a:xfrm>
-            <a:off x="8046720" y="1645920"/>
-            <a:ext cx="3383280" cy="1280160"/>
-          </a:xfrm>
-          <a:prstGeom prst="rect">
-            <a:avLst/>
-          </a:prstGeom>
-          <a:solidFill>
-            <a:srgbClr val="1C2541"/>
-          </a:solidFill>
-          <a:ln w="19050">
-            <a:solidFill>
-              <a:srgbClr val="E9C46A"/>
-            </a:solidFill>
-          </a:ln>
-        </p:spPr>
-        <p:style>
-          <a:lnRef idx="1">
-            <a:schemeClr val="accent1"/>
-          </a:lnRef>
-          <a:fillRef idx="3">
-            <a:schemeClr val="accent1"/>
-          </a:fillRef>
-          <a:effectRef idx="2">
-            <a:schemeClr val="accent1"/>
-          </a:effectRef>
-          <a:fontRef idx="minor">
-            <a:schemeClr val="lt1"/>
-          </a:fontRef>
-        </p:style>
-        <p:txBody>
-          <a:bodyPr rtlCol="0" anchor="ctr"/>
-          <a:lstStyle/>
-          <a:p>
-            <a:pPr algn="ctr"/>
-          </a:p>
-        </p:txBody>
-      </p:sp>
-      <p:sp>
-        <p:nvSpPr>
-          <p:cNvPr id="8" name="TextBox 7"/>
-          <p:cNvSpPr txBox="1"/>
-          <p:nvPr/>
-        </p:nvSpPr>
-        <p:spPr>
-          <a:xfrm>
-            <a:off x="8183880" y="1737360"/>
-            <a:ext cx="3108960" cy="1097280"/>
-          </a:xfrm>
-          <a:prstGeom prst="rect">
-            <a:avLst/>
-          </a:prstGeom>
-          <a:noFill/>
-        </p:spPr>
-        <p:txBody>
-          <a:bodyPr wrap="none">
-            <a:spAutoFit/>
-          </a:bodyPr>
-          <a:lstStyle/>
-          <a:p>
-            <a:pPr>
-              <a:defRPr sz="900">
-                <a:solidFill>
-                  <a:srgbClr val="A0AEC0"/>
-                </a:solidFill>
-              </a:defRPr>
-            </a:pPr>
-            <a:r>
-              <a:t>WEALTH SEGMENT EXPOSURE</a:t>
-            </a:r>
-          </a:p>
-          <a:p>
-            <a:pPr>
-              <a:defRPr sz="2200" b="1">
-                <a:solidFill>
-                  <a:srgbClr val="E9C46A"/>
-                </a:solidFill>
-              </a:defRPr>
-            </a:pPr>
-            <a:r>
-              <a:t>₹162.24 Cr</a:t>
-            </a:r>
-          </a:p>
-          <a:p>
-            <a:pPr>
-              <a:defRPr sz="1000">
-                <a:solidFill>
-                  <a:srgbClr val="FFFFFF"/>
-                </a:solidFill>
-              </a:defRPr>
-            </a:pPr>
-            <a:r>
-              <a:t>48.0% of Total Balance at Risk</a:t>
-            </a:r>
-          </a:p>
-        </p:txBody>
-      </p:sp>
-      <p:sp>
-        <p:nvSpPr>
-          <p:cNvPr id="9" name="Rectangle 8"/>
-          <p:cNvSpPr/>
-          <p:nvPr/>
-        </p:nvSpPr>
-        <p:spPr>
-          <a:xfrm>
-            <a:off x="731520" y="3108960"/>
-            <a:ext cx="10698480" cy="3108960"/>
-          </a:xfrm>
-          <a:prstGeom prst="rect">
-            <a:avLst/>
-          </a:prstGeom>
-          <a:solidFill>
-            <a:srgbClr val="1C2541"/>
-          </a:solidFill>
-          <a:ln>
-            <a:noFill/>
-          </a:ln>
-        </p:spPr>
-        <p:style>
-          <a:lnRef idx="1">
-            <a:schemeClr val="accent1"/>
-          </a:lnRef>
-          <a:fillRef idx="3">
-            <a:schemeClr val="accent1"/>
-          </a:fillRef>
-          <a:effectRef idx="2">
-            <a:schemeClr val="accent1"/>
-          </a:effectRef>
-          <a:fontRef idx="minor">
-            <a:schemeClr val="lt1"/>
-          </a:fontRef>
-        </p:style>
-        <p:txBody>
-          <a:bodyPr rtlCol="0" anchor="ctr"/>
-          <a:lstStyle/>
-          <a:p>
-            <a:pPr algn="ctr"/>
-          </a:p>
-        </p:txBody>
-      </p:sp>
-      <p:sp>
-        <p:nvSpPr>
-          <p:cNvPr id="10" name="TextBox 9"/>
-          <p:cNvSpPr txBox="1"/>
-          <p:nvPr/>
-        </p:nvSpPr>
-        <p:spPr>
-          <a:xfrm>
-            <a:off x="1005840" y="3291840"/>
-            <a:ext cx="10149840" cy="2743200"/>
-          </a:xfrm>
-          <a:prstGeom prst="rect">
-            <a:avLst/>
-          </a:prstGeom>
-          <a:noFill/>
-        </p:spPr>
-        <p:txBody>
-          <a:bodyPr wrap="square">
-            <a:spAutoFit/>
-          </a:bodyPr>
-          <a:lstStyle/>
-          <a:p>
-            <a:pPr>
-              <a:defRPr sz="1500" b="1">
-                <a:solidFill>
-                  <a:srgbClr val="FFFFFF"/>
-                </a:solidFill>
-              </a:defRPr>
-            </a:pPr>
-            <a:r>
-              <a:t>Segment Exposure Matrix [DERIVED]</a:t>
-            </a:r>
-          </a:p>
-          <a:p>
-            <a:br/>
-            <a:pPr>
-              <a:defRPr sz="1100">
-                <a:solidFill>
-                  <a:srgbClr val="A0AEC0"/>
-                </a:solidFill>
-              </a:defRPr>
-            </a:pPr>
-            <a:r>
-              <a:t>• Wealth Tier: 1,020 Customers (10.0% of base) | Total Deposits: ₹520.10 Cr | High Risk: 284 Customers | Balance at Risk: ₹162.24 Cr (31.2% of segment). Severe capital concentration.</a:t>
-            </a:r>
-          </a:p>
-          <a:p>
-            <a:br/>
-            <a:pPr>
-              <a:defRPr sz="1100">
-                <a:solidFill>
-                  <a:srgbClr val="A0AEC0"/>
-                </a:solidFill>
-              </a:defRPr>
-            </a:pPr>
-            <a:r>
-              <a:t>• Privileged Tier: 3,060 Customers (30.0% of base) | Total Deposits: ₹465.80 Cr | High Risk: 735 Customers | Balance at Risk: ₹108.50 Cr (23.3% of segment). High digital banking sensitivity.</a:t>
-            </a:r>
-          </a:p>
-          <a:p>
-            <a:br/>
-            <a:pPr>
-              <a:defRPr sz="1100">
-                <a:solidFill>
-                  <a:srgbClr val="A0AEC0"/>
-                </a:solidFill>
-              </a:defRPr>
-            </a:pPr>
-            <a:r>
-              <a:t>• Mass Retail Tier: 6,120 Customers (60.0% of base) | Total Deposits: ₹379.52 Cr | High Risk: 1,383 Customers | Balance at Risk: ₹67.15 Cr (17.7% of segment). Service friction &amp; fee dispute drivers.</a:t>
-            </a:r>
-          </a:p>
-          <a:p>
-            <a:br/>
-            <a:pPr>
-              <a:defRPr sz="1100">
-                <a:solidFill>
-                  <a:srgbClr val="A0AEC0"/>
-                </a:solidFill>
-              </a:defRPr>
-            </a:pPr>
-            <a:r>
-              <a:t>• Strategic Takeaway [RECOMMENDED]: Retention efforts must not be democratic. Losing 1 Wealth client inflicts the same balance sheet damage as losing 25 Mass Retail accounts. Immediate executive focus on top 284 Wealth accounts.</a:t>
-            </a:r>
-          </a:p>
-        </p:txBody>
-      </p:sp>
-    </p:spTree>
-  </p:cSld>
-  <p:clrMapOvr>
-    <a:masterClrMapping/>
-  </p:clrMapOvr>
-</p:sld>
-</file>
-
-<file path=ppt/slides/slide6.xml><?xml version="1.0" encoding="utf-8"?>
-<p:sld xmlns:a="http://schemas.openxmlformats.org/drawingml/2006/main" xmlns:p="http://schemas.openxmlformats.org/presentationml/2006/main" xmlns:r="http://schemas.openxmlformats.org/officeDocument/2006/relationships">
-  <p:cSld>
-    <p:bg>
-      <p:bgPr>
-        <a:solidFill>
-          <a:srgbClr val="0B132B"/>
-        </a:solidFill>
-        <a:effectLst/>
-      </p:bgPr>
-    </p:bg>
-    <p:spTree>
-      <p:nvGrpSpPr>
-        <p:cNvPr id="1" name=""/>
-        <p:cNvGrpSpPr/>
-        <p:nvPr/>
-      </p:nvGrpSpPr>
-      <p:grpSpPr/>
-      <p:sp>
-        <p:nvSpPr>
-          <p:cNvPr id="2" name="TextBox 1"/>
-          <p:cNvSpPr txBox="1"/>
-          <p:nvPr/>
-        </p:nvSpPr>
-        <p:spPr>
-          <a:xfrm>
-            <a:off x="731520" y="365760"/>
-            <a:ext cx="10698480" cy="914400"/>
-          </a:xfrm>
-          <a:prstGeom prst="rect">
-            <a:avLst/>
-          </a:prstGeom>
-          <a:noFill/>
-        </p:spPr>
-        <p:txBody>
-          <a:bodyPr wrap="square" lIns="0" tIns="0" rIns="0" bIns="0">
-            <a:spAutoFit/>
-          </a:bodyPr>
-          <a:lstStyle/>
-          <a:p>
-            <a:pPr>
-              <a:defRPr sz="1000" b="1">
-                <a:solidFill>
-                  <a:srgbClr val="48CAE4"/>
-                </a:solidFill>
-              </a:defRPr>
-            </a:pPr>
-            <a:r>
-              <a:t>BEHAVIORAL SIGNALS</a:t>
-            </a:r>
-          </a:p>
-          <a:p>
-            <a:pPr>
-              <a:defRPr sz="2200" b="1">
-                <a:solidFill>
-                  <a:srgbClr val="FFFFFF"/>
-                </a:solidFill>
-              </a:defRPr>
-            </a:pPr>
-            <a:r>
-              <a:t>Multi-Dimensional Early Warning Indicators</a:t>
-            </a:r>
-          </a:p>
-        </p:txBody>
-      </p:sp>
-      <p:sp>
-        <p:nvSpPr>
-          <p:cNvPr id="3" name="Rectangle 2"/>
-          <p:cNvSpPr/>
-          <p:nvPr/>
-        </p:nvSpPr>
-        <p:spPr>
-          <a:xfrm>
-            <a:off x="731520" y="1645920"/>
-            <a:ext cx="3383280" cy="4389120"/>
-          </a:xfrm>
-          <a:prstGeom prst="rect">
-            <a:avLst/>
-          </a:prstGeom>
-          <a:solidFill>
-            <a:srgbClr val="1C2541"/>
-          </a:solidFill>
-          <a:ln w="19050">
-            <a:solidFill>
-              <a:srgbClr val="E63946"/>
-            </a:solidFill>
-          </a:ln>
-        </p:spPr>
-        <p:style>
-          <a:lnRef idx="1">
-            <a:schemeClr val="accent1"/>
-          </a:lnRef>
-          <a:fillRef idx="3">
-            <a:schemeClr val="accent1"/>
-          </a:fillRef>
-          <a:effectRef idx="2">
-            <a:schemeClr val="accent1"/>
-          </a:effectRef>
-          <a:fontRef idx="minor">
-            <a:schemeClr val="lt1"/>
-          </a:fontRef>
-        </p:style>
-        <p:txBody>
-          <a:bodyPr rtlCol="0" anchor="ctr"/>
-          <a:lstStyle/>
-          <a:p>
-            <a:pPr algn="ctr"/>
-          </a:p>
-        </p:txBody>
-      </p:sp>
-      <p:sp>
-        <p:nvSpPr>
-          <p:cNvPr id="4" name="TextBox 3"/>
-          <p:cNvSpPr txBox="1"/>
-          <p:nvPr/>
-        </p:nvSpPr>
-        <p:spPr>
-          <a:xfrm>
-            <a:off x="868680" y="1783080"/>
-            <a:ext cx="3108960" cy="4114800"/>
-          </a:xfrm>
-          <a:prstGeom prst="rect">
-            <a:avLst/>
-          </a:prstGeom>
-          <a:noFill/>
-        </p:spPr>
-        <p:txBody>
-          <a:bodyPr wrap="square">
-            <a:spAutoFit/>
-          </a:bodyPr>
-          <a:lstStyle/>
-          <a:p>
-            <a:pPr>
-              <a:defRPr sz="900">
-                <a:solidFill>
-                  <a:srgbClr val="E63946"/>
-                </a:solidFill>
-              </a:defRPr>
-            </a:pPr>
-            <a:r>
-              <a:t>Dimension 2 (Weight: 25%)</a:t>
-            </a:r>
-          </a:p>
-          <a:p>
-            <a:pPr>
-              <a:defRPr sz="1300" b="1">
-                <a:solidFill>
-                  <a:srgbClr val="FFFFFF"/>
-                </a:solidFill>
-              </a:defRPr>
-            </a:pPr>
-            <a:r>
-              <a:t>MONEY OUTFLOW SIGNALS</a:t>
-            </a:r>
-          </a:p>
-          <a:p>
-            <a:br/>
-            <a:pPr>
-              <a:defRPr sz="1000">
-                <a:solidFill>
-                  <a:srgbClr val="A0AEC0"/>
-                </a:solidFill>
-              </a:defRPr>
-            </a:pPr>
-            <a:r>
-              <a:t>• Outflow Volume: 2,599 customers show recent debit spikes &gt; 75th percentile.</a:t>
-            </a:r>
-          </a:p>
-          <a:p>
-            <a:br/>
-            <a:pPr>
-              <a:defRPr sz="1000">
-                <a:solidFill>
-                  <a:srgbClr val="A0AEC0"/>
-                </a:solidFill>
-              </a:defRPr>
-            </a:pPr>
-            <a:r>
-              <a:t>• Outflow Velocity: Ratio of 90D debit to historical debit accelerating by &gt; 2.0x.</a:t>
-            </a:r>
-          </a:p>
-          <a:p>
-            <a:br/>
-            <a:pPr>
-              <a:defRPr sz="1000">
-                <a:solidFill>
-                  <a:srgbClr val="A0AEC0"/>
-                </a:solidFill>
-              </a:defRPr>
-            </a:pPr>
-            <a:r>
-              <a:t>• Transfer Activity: Rapid UPI/NetBanking transfers to external institutions without commensurate inward credit.</a:t>
-            </a:r>
-          </a:p>
-        </p:txBody>
-      </p:sp>
-      <p:sp>
-        <p:nvSpPr>
-          <p:cNvPr id="5" name="Rectangle 4"/>
-          <p:cNvSpPr/>
-          <p:nvPr/>
-        </p:nvSpPr>
-        <p:spPr>
-          <a:xfrm>
-            <a:off x="4389120" y="1645920"/>
-            <a:ext cx="3383280" cy="4389120"/>
-          </a:xfrm>
-          <a:prstGeom prst="rect">
-            <a:avLst/>
-          </a:prstGeom>
-          <a:solidFill>
-            <a:srgbClr val="1C2541"/>
-          </a:solidFill>
-          <a:ln w="19050">
-            <a:solidFill>
-              <a:srgbClr val="F4A261"/>
-            </a:solidFill>
-          </a:ln>
-        </p:spPr>
-        <p:style>
-          <a:lnRef idx="1">
-            <a:schemeClr val="accent1"/>
-          </a:lnRef>
-          <a:fillRef idx="3">
-            <a:schemeClr val="accent1"/>
-          </a:fillRef>
-          <a:effectRef idx="2">
-            <a:schemeClr val="accent1"/>
-          </a:effectRef>
-          <a:fontRef idx="minor">
-            <a:schemeClr val="lt1"/>
-          </a:fontRef>
-        </p:style>
-        <p:txBody>
-          <a:bodyPr rtlCol="0" anchor="ctr"/>
-          <a:lstStyle/>
-          <a:p>
-            <a:pPr algn="ctr"/>
-          </a:p>
-        </p:txBody>
-      </p:sp>
-      <p:sp>
-        <p:nvSpPr>
-          <p:cNvPr id="6" name="TextBox 5"/>
-          <p:cNvSpPr txBox="1"/>
-          <p:nvPr/>
-        </p:nvSpPr>
-        <p:spPr>
-          <a:xfrm>
-            <a:off x="4526280" y="1783080"/>
-            <a:ext cx="3108960" cy="4114800"/>
-          </a:xfrm>
-          <a:prstGeom prst="rect">
-            <a:avLst/>
-          </a:prstGeom>
-          <a:noFill/>
-        </p:spPr>
-        <p:txBody>
-          <a:bodyPr wrap="square">
-            <a:spAutoFit/>
-          </a:bodyPr>
-          <a:lstStyle/>
-          <a:p>
-            <a:pPr>
-              <a:defRPr sz="900">
-                <a:solidFill>
-                  <a:srgbClr val="F4A261"/>
-                </a:solidFill>
-              </a:defRPr>
-            </a:pPr>
-            <a:r>
-              <a:t>Dimension 3 (Weight: 20%)</a:t>
-            </a:r>
-          </a:p>
-          <a:p>
-            <a:pPr>
-              <a:defRPr sz="1300" b="1">
-                <a:solidFill>
-                  <a:srgbClr val="FFFFFF"/>
-                </a:solidFill>
-              </a:defRPr>
-            </a:pPr>
-            <a:r>
-              <a:t>DIGITAL DETERIORATION</a:t>
-            </a:r>
-          </a:p>
-          <a:p>
-            <a:br/>
-            <a:pPr>
-              <a:defRPr sz="1000">
-                <a:solidFill>
-                  <a:srgbClr val="A0AEC0"/>
-                </a:solidFill>
-              </a:defRPr>
-            </a:pPr>
-            <a:r>
-              <a:t>• Login Inactivity: 3,781 customers exhibit significant drop in session recency (&gt; 45 days since login).</a:t>
-            </a:r>
-          </a:p>
-          <a:p>
-            <a:br/>
-            <a:pPr>
-              <a:defRPr sz="1000">
-                <a:solidFill>
-                  <a:srgbClr val="A0AEC0"/>
-                </a:solidFill>
-              </a:defRPr>
-            </a:pPr>
-            <a:r>
-              <a:t>• Feature Abandonment: App usage drops from transaction features to purely checking balances.</a:t>
-            </a:r>
-          </a:p>
-          <a:p>
-            <a:br/>
-            <a:pPr>
-              <a:defRPr sz="1000">
-                <a:solidFill>
-                  <a:srgbClr val="A0AEC0"/>
-                </a:solidFill>
-              </a:defRPr>
-            </a:pPr>
-            <a:r>
-              <a:t>• Session Duration: 35% decline in monthly app time preceding primary fund transfers.</a:t>
-            </a:r>
-          </a:p>
-        </p:txBody>
-      </p:sp>
-      <p:sp>
-        <p:nvSpPr>
-          <p:cNvPr id="7" name="Rectangle 6"/>
-          <p:cNvSpPr/>
-          <p:nvPr/>
-        </p:nvSpPr>
-        <p:spPr>
-          <a:xfrm>
-            <a:off x="8046720" y="1645920"/>
-            <a:ext cx="3383280" cy="4389120"/>
-          </a:xfrm>
-          <a:prstGeom prst="rect">
-            <a:avLst/>
-          </a:prstGeom>
-          <a:solidFill>
-            <a:srgbClr val="1C2541"/>
-          </a:solidFill>
-          <a:ln w="19050">
-            <a:solidFill>
-              <a:srgbClr val="48CAE4"/>
-            </a:solidFill>
-          </a:ln>
-        </p:spPr>
-        <p:style>
-          <a:lnRef idx="1">
-            <a:schemeClr val="accent1"/>
-          </a:lnRef>
-          <a:fillRef idx="3">
-            <a:schemeClr val="accent1"/>
-          </a:fillRef>
-          <a:effectRef idx="2">
-            <a:schemeClr val="accent1"/>
-          </a:effectRef>
-          <a:fontRef idx="minor">
-            <a:schemeClr val="lt1"/>
-          </a:fontRef>
-        </p:style>
-        <p:txBody>
-          <a:bodyPr rtlCol="0" anchor="ctr"/>
-          <a:lstStyle/>
-          <a:p>
-            <a:pPr algn="ctr"/>
-          </a:p>
-        </p:txBody>
-      </p:sp>
-      <p:sp>
-        <p:nvSpPr>
-          <p:cNvPr id="8" name="TextBox 7"/>
-          <p:cNvSpPr txBox="1"/>
-          <p:nvPr/>
-        </p:nvSpPr>
-        <p:spPr>
-          <a:xfrm>
-            <a:off x="8183880" y="1783080"/>
-            <a:ext cx="3108960" cy="4114800"/>
-          </a:xfrm>
-          <a:prstGeom prst="rect">
-            <a:avLst/>
-          </a:prstGeom>
-          <a:noFill/>
-        </p:spPr>
-        <p:txBody>
-          <a:bodyPr wrap="square">
-            <a:spAutoFit/>
-          </a:bodyPr>
-          <a:lstStyle/>
-          <a:p>
-            <a:pPr>
-              <a:defRPr sz="900">
-                <a:solidFill>
-                  <a:srgbClr val="48CAE4"/>
-                </a:solidFill>
-              </a:defRPr>
-            </a:pPr>
-            <a:r>
-              <a:t>Dimension 4 (Weight: 20%)</a:t>
-            </a:r>
-          </a:p>
-          <a:p>
-            <a:pPr>
-              <a:defRPr sz="1300" b="1">
-                <a:solidFill>
-                  <a:srgbClr val="FFFFFF"/>
-                </a:solidFill>
-              </a:defRPr>
-            </a:pPr>
-            <a:r>
-              <a:t>SERVICE FRICTION SIGNALS</a:t>
-            </a:r>
-          </a:p>
-          <a:p>
-            <a:br/>
-            <a:pPr>
-              <a:defRPr sz="1000">
-                <a:solidFill>
-                  <a:srgbClr val="A0AEC0"/>
-                </a:solidFill>
-              </a:defRPr>
-            </a:pPr>
-            <a:r>
-              <a:t>• Grievance Clustering: 1,480 customers logged multiple grievances within 90 days.</a:t>
-            </a:r>
-          </a:p>
-          <a:p>
-            <a:br/>
-            <a:pPr>
-              <a:defRPr sz="1000">
-                <a:solidFill>
-                  <a:srgbClr val="A0AEC0"/>
-                </a:solidFill>
-              </a:defRPr>
-            </a:pPr>
-            <a:r>
-              <a:t>• CSAT Collapse: Severe churn correlation among customers giving CSAT &lt;= 2.</a:t>
-            </a:r>
-          </a:p>
-          <a:p>
-            <a:br/>
-            <a:pPr>
-              <a:defRPr sz="1000">
-                <a:solidFill>
-                  <a:srgbClr val="A0AEC0"/>
-                </a:solidFill>
-              </a:defRPr>
-            </a:pPr>
-            <a:r>
               <a:t>• Resolution Delay: Outlier resolution TAT (&gt; 20 days) creates a 3.4x higher churn propensity.</a:t>
-            </a:r>
-          </a:p>
-        </p:txBody>
-      </p:sp>
-    </p:spTree>
-  </p:cSld>
-  <p:clrMapOvr>
-    <a:masterClrMapping/>
-  </p:clrMapOvr>
-</p:sld>
-</file>
-
-<file path=ppt/slides/slide7.xml><?xml version="1.0" encoding="utf-8"?>
-<p:sld xmlns:a="http://schemas.openxmlformats.org/drawingml/2006/main" xmlns:p="http://schemas.openxmlformats.org/presentationml/2006/main" xmlns:r="http://schemas.openxmlformats.org/officeDocument/2006/relationships">
-  <p:cSld>
-    <p:bg>
-      <p:bgPr>
-        <a:solidFill>
-          <a:srgbClr val="0B132B"/>
-        </a:solidFill>
-        <a:effectLst/>
-      </p:bgPr>
-    </p:bg>
-    <p:spTree>
-      <p:nvGrpSpPr>
-        <p:cNvPr id="1" name=""/>
-        <p:cNvGrpSpPr/>
-        <p:nvPr/>
-      </p:nvGrpSpPr>
-      <p:grpSpPr/>
-      <p:sp>
-        <p:nvSpPr>
-          <p:cNvPr id="2" name="TextBox 1"/>
-          <p:cNvSpPr txBox="1"/>
-          <p:nvPr/>
-        </p:nvSpPr>
-        <p:spPr>
-          <a:xfrm>
-            <a:off x="731520" y="365760"/>
-            <a:ext cx="10698480" cy="914400"/>
-          </a:xfrm>
-          <a:prstGeom prst="rect">
-            <a:avLst/>
-          </a:prstGeom>
-          <a:noFill/>
-        </p:spPr>
-        <p:txBody>
-          <a:bodyPr wrap="square" lIns="0" tIns="0" rIns="0" bIns="0">
-            <a:spAutoFit/>
-          </a:bodyPr>
-          <a:lstStyle/>
-          <a:p>
-            <a:pPr>
-              <a:defRPr sz="1000" b="1">
-                <a:solidFill>
-                  <a:srgbClr val="48CAE4"/>
-                </a:solidFill>
-              </a:defRPr>
-            </a:pPr>
-            <a:r>
-              <a:t>OPERATIONAL TAXONOMY</a:t>
-            </a:r>
-          </a:p>
-          <a:p>
-            <a:pPr>
-              <a:defRPr sz="2200" b="1">
-                <a:solidFill>
-                  <a:srgbClr val="FFFFFF"/>
-                </a:solidFill>
-              </a:defRPr>
-            </a:pPr>
-            <a:r>
-              <a:t>Explainable Segmentation: 6 Actionable Archetypes</a:t>
-            </a:r>
-          </a:p>
-        </p:txBody>
-      </p:sp>
-      <p:sp>
-        <p:nvSpPr>
-          <p:cNvPr id="3" name="Rectangle 2"/>
-          <p:cNvSpPr/>
-          <p:nvPr/>
-        </p:nvSpPr>
-        <p:spPr>
-          <a:xfrm>
-            <a:off x="731520" y="1645920"/>
-            <a:ext cx="10698480" cy="4389120"/>
-          </a:xfrm>
-          <a:prstGeom prst="rect">
-            <a:avLst/>
-          </a:prstGeom>
-          <a:solidFill>
-            <a:srgbClr val="1C2541"/>
-          </a:solidFill>
-          <a:ln>
-            <a:noFill/>
-          </a:ln>
-        </p:spPr>
-        <p:style>
-          <a:lnRef idx="1">
-            <a:schemeClr val="accent1"/>
-          </a:lnRef>
-          <a:fillRef idx="3">
-            <a:schemeClr val="accent1"/>
-          </a:fillRef>
-          <a:effectRef idx="2">
-            <a:schemeClr val="accent1"/>
-          </a:effectRef>
-          <a:fontRef idx="minor">
-            <a:schemeClr val="lt1"/>
-          </a:fontRef>
-        </p:style>
-        <p:txBody>
-          <a:bodyPr rtlCol="0" anchor="ctr"/>
-          <a:lstStyle/>
-          <a:p>
-            <a:pPr algn="ctr"/>
-          </a:p>
-        </p:txBody>
-      </p:sp>
-      <p:sp>
-        <p:nvSpPr>
-          <p:cNvPr id="4" name="TextBox 3"/>
-          <p:cNvSpPr txBox="1"/>
-          <p:nvPr/>
-        </p:nvSpPr>
-        <p:spPr>
-          <a:xfrm>
-            <a:off x="1005840" y="1828800"/>
-            <a:ext cx="10149840" cy="4023360"/>
-          </a:xfrm>
-          <a:prstGeom prst="rect">
-            <a:avLst/>
-          </a:prstGeom>
-          <a:noFill/>
-        </p:spPr>
-        <p:txBody>
-          <a:bodyPr wrap="square">
-            <a:spAutoFit/>
-          </a:bodyPr>
-          <a:lstStyle/>
-          <a:p>
-            <a:pPr>
-              <a:defRPr sz="1500" b="1">
-                <a:solidFill>
-                  <a:srgbClr val="FFFFFF"/>
-                </a:solidFill>
-              </a:defRPr>
-            </a:pPr>
-            <a:r>
-              <a:t>Operational Customer Archetypes &amp; Prescriptive Action Protocols [RECOMMENDED]</a:t>
-            </a:r>
-          </a:p>
-          <a:p>
-            <a:br/>
-            <a:pPr>
-              <a:defRPr sz="1050">
-                <a:solidFill>
-                  <a:srgbClr val="A0AEC0"/>
-                </a:solidFill>
-              </a:defRPr>
-            </a:pPr>
-            <a:r>
-              <a:t>• Archetype A — High Value + Multi-Signal Risk (198 Customers | ₹112.4 Cr): High deposit balance + simultaneous outflow, digital decay, and complaints. ➔ PROTOCOL: Priority Senior RM outreach within 48h; personalized wealth retention offer.</a:t>
-            </a:r>
-          </a:p>
-          <a:p>
-            <a:br/>
-            <a:pPr>
-              <a:defRPr sz="1050">
-                <a:solidFill>
-                  <a:srgbClr val="A0AEC0"/>
-                </a:solidFill>
-              </a:defRPr>
-            </a:pPr>
-            <a:r>
-              <a:t>• Archetype B — High Outflow + Weak Supporting Evidence (512 Customers | ₹68.2 Cr): Large single outflow without app decline or complaints (e.g., tax payment or real estate purchase). ➔ PROTOCOL: 30-day monitoring; DO NOT harass customer with churn retention calls.</a:t>
-            </a:r>
-          </a:p>
-          <a:p>
-            <a:br/>
-            <a:pPr>
-              <a:defRPr sz="1050">
-                <a:solidFill>
-                  <a:srgbClr val="A0AEC0"/>
-                </a:solidFill>
-              </a:defRPr>
-            </a:pPr>
-            <a:r>
-              <a:t>• Archetype C — Digital Decline + Service Friction (945 Customers | ₹74.6 Cr): Frustrated digital users with low CSAT and declining logins. ➔ PROTOCOL: Digital service recovery call, fee reversal where applicable, proactive app re-onboarding.</a:t>
-            </a:r>
-          </a:p>
-          <a:p>
-            <a:br/>
-            <a:pPr>
-              <a:defRPr sz="1050">
-                <a:solidFill>
-                  <a:srgbClr val="A0AEC0"/>
-                </a:solidFill>
-              </a:defRPr>
-            </a:pPr>
-            <a:r>
-              <a:t>• Archetype D — Credit Stress Driven Risk (314 Customers | ₹28.5 Cr): Elevated loan DPD (30–90 days) impacting broader banking relationship. ➔ PROTOCOL: Branch credit counseling, debt restructuring review, proactive restructuring counseling.</a:t>
-            </a:r>
-          </a:p>
-          <a:p>
-            <a:br/>
-            <a:pPr>
-              <a:defRPr sz="1050">
-                <a:solidFill>
-                  <a:srgbClr val="A0AEC0"/>
-                </a:solidFill>
-              </a:defRPr>
-            </a:pPr>
-            <a:r>
-              <a:t>• Archetype E — Data Confidence Limited Risk (433 Customers | ₹14.1 Cr): Incomplete KYC or missing profile data rendering risk score noisy. ➔ PROTOCOL: Immediate KYC remediation outreach before taking risk or marketing actions.</a:t>
-            </a:r>
-          </a:p>
-          <a:p>
-            <a:br/>
-            <a:pPr>
-              <a:defRPr sz="1050">
-                <a:solidFill>
-                  <a:srgbClr val="A0AEC0"/>
-                </a:solidFill>
-              </a:defRPr>
-            </a:pPr>
-            <a:r>
-              <a:t>• Archetype F — Baseline / Stable (7,798 Customers | ₹1,067.6 Cr): Normal transaction cadence, moderate to low risk. ➔ PROTOCOL: Standard relationship management.</a:t>
-            </a:r>
-          </a:p>
-        </p:txBody>
-      </p:sp>
-    </p:spTree>
-  </p:cSld>
-  <p:clrMapOvr>
-    <a:masterClrMapping/>
-  </p:clrMapOvr>
-</p:sld>
-</file>
-
-<file path=ppt/slides/slide8.xml><?xml version="1.0" encoding="utf-8"?>
-<p:sld xmlns:a="http://schemas.openxmlformats.org/drawingml/2006/main" xmlns:p="http://schemas.openxmlformats.org/presentationml/2006/main" xmlns:r="http://schemas.openxmlformats.org/officeDocument/2006/relationships">
-  <p:cSld>
-    <p:bg>
-      <p:bgPr>
-        <a:solidFill>
-          <a:srgbClr val="0B132B"/>
-        </a:solidFill>
-        <a:effectLst/>
-      </p:bgPr>
-    </p:bg>
-    <p:spTree>
-      <p:nvGrpSpPr>
-        <p:cNvPr id="1" name=""/>
-        <p:cNvGrpSpPr/>
-        <p:nvPr/>
-      </p:nvGrpSpPr>
-      <p:grpSpPr/>
-      <p:sp>
-        <p:nvSpPr>
-          <p:cNvPr id="2" name="TextBox 1"/>
-          <p:cNvSpPr txBox="1"/>
-          <p:nvPr/>
-        </p:nvSpPr>
-        <p:spPr>
-          <a:xfrm>
-            <a:off x="731520" y="365760"/>
-            <a:ext cx="10698480" cy="914400"/>
-          </a:xfrm>
-          <a:prstGeom prst="rect">
-            <a:avLst/>
-          </a:prstGeom>
-          <a:noFill/>
-        </p:spPr>
-        <p:txBody>
-          <a:bodyPr wrap="square" lIns="0" tIns="0" rIns="0" bIns="0">
-            <a:spAutoFit/>
-          </a:bodyPr>
-          <a:lstStyle/>
-          <a:p>
-            <a:pPr>
-              <a:defRPr sz="1000" b="1">
-                <a:solidFill>
-                  <a:srgbClr val="48CAE4"/>
-                </a:solidFill>
-              </a:defRPr>
-            </a:pPr>
-            <a:r>
-              <a:t>ROOT CAUSE ANALYSIS</a:t>
-            </a:r>
-          </a:p>
-          <a:p>
-            <a:pPr>
-              <a:defRPr sz="2200" b="1">
-                <a:solidFill>
-                  <a:srgbClr val="FFFFFF"/>
-                </a:solidFill>
-              </a:defRPr>
-            </a:pPr>
-            <a:r>
-              <a:t>Service Friction &amp; Digital Abandonment Dynamics</a:t>
-            </a:r>
-          </a:p>
-        </p:txBody>
-      </p:sp>
-      <p:sp>
-        <p:nvSpPr>
-          <p:cNvPr id="3" name="Rectangle 2"/>
-          <p:cNvSpPr/>
-          <p:nvPr/>
-        </p:nvSpPr>
-        <p:spPr>
-          <a:xfrm>
-            <a:off x="731520" y="1645920"/>
-            <a:ext cx="3383280" cy="4389120"/>
-          </a:xfrm>
-          <a:prstGeom prst="rect">
-            <a:avLst/>
-          </a:prstGeom>
-          <a:solidFill>
-            <a:srgbClr val="1C2541"/>
-          </a:solidFill>
-          <a:ln w="19050">
-            <a:solidFill>
-              <a:srgbClr val="48CAE4"/>
-            </a:solidFill>
-          </a:ln>
-        </p:spPr>
-        <p:style>
-          <a:lnRef idx="1">
-            <a:schemeClr val="accent1"/>
-          </a:lnRef>
-          <a:fillRef idx="3">
-            <a:schemeClr val="accent1"/>
-          </a:fillRef>
-          <a:effectRef idx="2">
-            <a:schemeClr val="accent1"/>
-          </a:effectRef>
-          <a:fontRef idx="minor">
-            <a:schemeClr val="lt1"/>
-          </a:fontRef>
-        </p:style>
-        <p:txBody>
-          <a:bodyPr rtlCol="0" anchor="ctr"/>
-          <a:lstStyle/>
-          <a:p>
-            <a:pPr algn="ctr"/>
-          </a:p>
-        </p:txBody>
-      </p:sp>
-      <p:sp>
-        <p:nvSpPr>
-          <p:cNvPr id="4" name="TextBox 3"/>
-          <p:cNvSpPr txBox="1"/>
-          <p:nvPr/>
-        </p:nvSpPr>
-        <p:spPr>
-          <a:xfrm>
-            <a:off x="868680" y="1783080"/>
-            <a:ext cx="3108960" cy="4114800"/>
-          </a:xfrm>
-          <a:prstGeom prst="rect">
-            <a:avLst/>
-          </a:prstGeom>
-          <a:noFill/>
-        </p:spPr>
-        <p:txBody>
-          <a:bodyPr wrap="square">
-            <a:spAutoFit/>
-          </a:bodyPr>
-          <a:lstStyle/>
-          <a:p>
-            <a:pPr>
-              <a:defRPr sz="1300" b="1">
-                <a:solidFill>
-                  <a:srgbClr val="48CAE4"/>
-                </a:solidFill>
-              </a:defRPr>
-            </a:pPr>
-            <a:r>
-              <a:t>GRIEVANCE DRIVERS</a:t>
-            </a:r>
-          </a:p>
-          <a:p>
-            <a:br/>
-            <a:pPr>
-              <a:defRPr sz="1000">
-                <a:solidFill>
-                  <a:srgbClr val="A0AEC0"/>
-                </a:solidFill>
-              </a:defRPr>
-            </a:pPr>
-            <a:r>
-              <a:t>• Total Complaints: 12,000 across 7,077 customers.</a:t>
-            </a:r>
-          </a:p>
-          <a:p>
-            <a:br/>
-            <a:pPr>
-              <a:defRPr sz="1000">
-                <a:solidFill>
-                  <a:srgbClr val="A0AEC0"/>
-                </a:solidFill>
-              </a:defRPr>
-            </a:pPr>
-            <a:r>
-              <a:t>• Top Category: Transaction Disputes (34%) &amp; Mobile Banking Failures (28%).</a:t>
-            </a:r>
-          </a:p>
-          <a:p>
-            <a:br/>
-            <a:pPr>
-              <a:defRPr sz="1000">
-                <a:solidFill>
-                  <a:srgbClr val="A0AEC0"/>
-                </a:solidFill>
-              </a:defRPr>
-            </a:pPr>
-            <a:r>
-              <a:t>• Worst Channel: Branch Queue complaints yield the lowest CSAT (average 2.1 / 5.0).</a:t>
-            </a:r>
-          </a:p>
-          <a:p>
-            <a:br/>
-            <a:pPr>
-              <a:defRPr sz="1000">
-                <a:solidFill>
-                  <a:srgbClr val="A0AEC0"/>
-                </a:solidFill>
-              </a:defRPr>
-            </a:pPr>
-            <a:r>
-              <a:t>• TAT Outliers: 412 complaints took &gt; 30 days to resolve (standard SLA: 7 days).</a:t>
-            </a:r>
-          </a:p>
-        </p:txBody>
-      </p:sp>
-      <p:sp>
-        <p:nvSpPr>
-          <p:cNvPr id="5" name="Rectangle 4"/>
-          <p:cNvSpPr/>
-          <p:nvPr/>
-        </p:nvSpPr>
-        <p:spPr>
-          <a:xfrm>
-            <a:off x="4389120" y="1645920"/>
-            <a:ext cx="3383280" cy="4389120"/>
-          </a:xfrm>
-          <a:prstGeom prst="rect">
-            <a:avLst/>
-          </a:prstGeom>
-          <a:solidFill>
-            <a:srgbClr val="1C2541"/>
-          </a:solidFill>
-          <a:ln w="19050">
-            <a:solidFill>
-              <a:srgbClr val="F4A261"/>
-            </a:solidFill>
-          </a:ln>
-        </p:spPr>
-        <p:style>
-          <a:lnRef idx="1">
-            <a:schemeClr val="accent1"/>
-          </a:lnRef>
-          <a:fillRef idx="3">
-            <a:schemeClr val="accent1"/>
-          </a:fillRef>
-          <a:effectRef idx="2">
-            <a:schemeClr val="accent1"/>
-          </a:effectRef>
-          <a:fontRef idx="minor">
-            <a:schemeClr val="lt1"/>
-          </a:fontRef>
-        </p:style>
-        <p:txBody>
-          <a:bodyPr rtlCol="0" anchor="ctr"/>
-          <a:lstStyle/>
-          <a:p>
-            <a:pPr algn="ctr"/>
-          </a:p>
-        </p:txBody>
-      </p:sp>
-      <p:sp>
-        <p:nvSpPr>
-          <p:cNvPr id="6" name="TextBox 5"/>
-          <p:cNvSpPr txBox="1"/>
-          <p:nvPr/>
-        </p:nvSpPr>
-        <p:spPr>
-          <a:xfrm>
-            <a:off x="4526280" y="1783080"/>
-            <a:ext cx="3108960" cy="4114800"/>
-          </a:xfrm>
-          <a:prstGeom prst="rect">
-            <a:avLst/>
-          </a:prstGeom>
-          <a:noFill/>
-        </p:spPr>
-        <p:txBody>
-          <a:bodyPr wrap="square">
-            <a:spAutoFit/>
-          </a:bodyPr>
-          <a:lstStyle/>
-          <a:p>
-            <a:pPr>
-              <a:defRPr sz="1300" b="1">
-                <a:solidFill>
-                  <a:srgbClr val="F4A261"/>
-                </a:solidFill>
-              </a:defRPr>
-            </a:pPr>
-            <a:r>
-              <a:t>DIGITAL APP USAGE</a:t>
-            </a:r>
-          </a:p>
-          <a:p>
-            <a:br/>
-            <a:pPr>
-              <a:defRPr sz="1000">
-                <a:solidFill>
-                  <a:srgbClr val="A0AEC0"/>
-                </a:solidFill>
-              </a:defRPr>
-            </a:pPr>
-            <a:r>
-              <a:t>• Total Activity: 150,000 sessions across 8 app modules.</a:t>
-            </a:r>
-          </a:p>
-          <a:p>
-            <a:br/>
-            <a:pPr>
-              <a:defRPr sz="1000">
-                <a:solidFill>
-                  <a:srgbClr val="A0AEC0"/>
-                </a:solidFill>
-              </a:defRPr>
-            </a:pPr>
-            <a:r>
-              <a:t>• Critical Drop-off: 'Transfers' and 'KYC' pages account for 58% of abandoned sessions.</a:t>
-            </a:r>
-          </a:p>
-          <a:p>
-            <a:br/>
-            <a:pPr>
-              <a:defRPr sz="1000">
-                <a:solidFill>
-                  <a:srgbClr val="A0AEC0"/>
-                </a:solidFill>
-              </a:defRPr>
-            </a:pPr>
-            <a:r>
-              <a:t>• Silent Churn Leading Indicator: When monthly sessions drop below 2, outflow probability doubles within 60 days.</a:t>
-            </a:r>
-          </a:p>
-          <a:p>
-            <a:br/>
-            <a:pPr>
-              <a:defRPr sz="1000">
-                <a:solidFill>
-                  <a:srgbClr val="A0AEC0"/>
-                </a:solidFill>
-              </a:defRPr>
-            </a:pPr>
-            <a:r>
-              <a:t>• Inactivity Clustering: 22% of high-risk customers have zero logins in trailing 60 days.</a:t>
-            </a:r>
-          </a:p>
-        </p:txBody>
-      </p:sp>
-      <p:sp>
-        <p:nvSpPr>
-          <p:cNvPr id="7" name="Rectangle 6"/>
-          <p:cNvSpPr/>
-          <p:nvPr/>
-        </p:nvSpPr>
-        <p:spPr>
-          <a:xfrm>
-            <a:off x="8046720" y="1645920"/>
-            <a:ext cx="3383280" cy="4389120"/>
-          </a:xfrm>
-          <a:prstGeom prst="rect">
-            <a:avLst/>
-          </a:prstGeom>
-          <a:solidFill>
-            <a:srgbClr val="1C2541"/>
-          </a:solidFill>
-          <a:ln w="19050">
-            <a:solidFill>
-              <a:srgbClr val="E63946"/>
-            </a:solidFill>
-          </a:ln>
-        </p:spPr>
-        <p:style>
-          <a:lnRef idx="1">
-            <a:schemeClr val="accent1"/>
-          </a:lnRef>
-          <a:fillRef idx="3">
-            <a:schemeClr val="accent1"/>
-          </a:fillRef>
-          <a:effectRef idx="2">
-            <a:schemeClr val="accent1"/>
-          </a:effectRef>
-          <a:fontRef idx="minor">
-            <a:schemeClr val="lt1"/>
-          </a:fontRef>
-        </p:style>
-        <p:txBody>
-          <a:bodyPr rtlCol="0" anchor="ctr"/>
-          <a:lstStyle/>
-          <a:p>
-            <a:pPr algn="ctr"/>
-          </a:p>
-        </p:txBody>
-      </p:sp>
-      <p:sp>
-        <p:nvSpPr>
-          <p:cNvPr id="8" name="TextBox 7"/>
-          <p:cNvSpPr txBox="1"/>
-          <p:nvPr/>
-        </p:nvSpPr>
-        <p:spPr>
-          <a:xfrm>
-            <a:off x="8183880" y="1783080"/>
-            <a:ext cx="3108960" cy="4114800"/>
-          </a:xfrm>
-          <a:prstGeom prst="rect">
-            <a:avLst/>
-          </a:prstGeom>
-          <a:noFill/>
-        </p:spPr>
-        <p:txBody>
-          <a:bodyPr wrap="square">
-            <a:spAutoFit/>
-          </a:bodyPr>
-          <a:lstStyle/>
-          <a:p>
-            <a:pPr>
-              <a:defRPr sz="1300" b="1">
-                <a:solidFill>
-                  <a:srgbClr val="E63946"/>
-                </a:solidFill>
-              </a:defRPr>
-            </a:pPr>
-            <a:r>
-              <a:t>THE ATTRITION FLYWHEEL</a:t>
-            </a:r>
-          </a:p>
-          <a:p>
-            <a:br/>
-            <a:pPr>
-              <a:defRPr sz="1000">
-                <a:solidFill>
-                  <a:srgbClr val="A0AEC0"/>
-                </a:solidFill>
-              </a:defRPr>
-            </a:pPr>
-            <a:r>
-              <a:t>1. Digital Friction: App transfer failure or login error.</a:t>
-            </a:r>
-          </a:p>
-          <a:p>
-            <a:br/>
-            <a:pPr>
-              <a:defRPr sz="1000">
-                <a:solidFill>
-                  <a:srgbClr val="A0AEC0"/>
-                </a:solidFill>
-              </a:defRPr>
-            </a:pPr>
-            <a:r>
-              <a:t>2. Service Delay: Customer raises complaint; TAT exceeds 14 days.</a:t>
-            </a:r>
-          </a:p>
-          <a:p>
-            <a:br/>
-            <a:pPr>
-              <a:defRPr sz="1000">
-                <a:solidFill>
-                  <a:srgbClr val="A0AEC0"/>
-                </a:solidFill>
-              </a:defRPr>
-            </a:pPr>
-            <a:r>
-              <a:t>3. Trust Erosion: Customer rates CSAT 1 or 2.</a:t>
-            </a:r>
-          </a:p>
-          <a:p>
-            <a:br/>
-            <a:pPr>
-              <a:defRPr sz="1000">
-                <a:solidFill>
-                  <a:srgbClr val="A0AEC0"/>
-                </a:solidFill>
-              </a:defRPr>
-            </a:pPr>
-            <a:r>
-              <a:t>4. Silent Outflow: Customer migrates primary deposits to competitor bank.</a:t>
-            </a:r>
-          </a:p>
-          <a:p>
-            <a:br/>
-            <a:pPr>
-              <a:defRPr sz="1000">
-                <a:solidFill>
-                  <a:srgbClr val="A0AEC0"/>
-                </a:solidFill>
-              </a:defRPr>
-            </a:pPr>
-            <a:r>
-              <a:t>5. Account Becomes Dormant: Bank loses customer without notice.</a:t>
-            </a:r>
-          </a:p>
-        </p:txBody>
-      </p:sp>
-    </p:spTree>
-  </p:cSld>
-  <p:clrMapOvr>
-    <a:masterClrMapping/>
-  </p:clrMapOvr>
-</p:sld>
-</file>
-
-<file path=ppt/slides/slide9.xml><?xml version="1.0" encoding="utf-8"?>
-<p:sld xmlns:a="http://schemas.openxmlformats.org/drawingml/2006/main" xmlns:p="http://schemas.openxmlformats.org/presentationml/2006/main" xmlns:r="http://schemas.openxmlformats.org/officeDocument/2006/relationships">
-  <p:cSld>
-    <p:bg>
-      <p:bgPr>
-        <a:solidFill>
-          <a:srgbClr val="0B132B"/>
-        </a:solidFill>
-        <a:effectLst/>
-      </p:bgPr>
-    </p:bg>
-    <p:spTree>
-      <p:nvGrpSpPr>
-        <p:cNvPr id="1" name=""/>
-        <p:cNvGrpSpPr/>
-        <p:nvPr/>
-      </p:nvGrpSpPr>
-      <p:grpSpPr/>
-      <p:sp>
-        <p:nvSpPr>
-          <p:cNvPr id="2" name="TextBox 1"/>
-          <p:cNvSpPr txBox="1"/>
-          <p:nvPr/>
-        </p:nvSpPr>
-        <p:spPr>
-          <a:xfrm>
-            <a:off x="731520" y="365760"/>
-            <a:ext cx="10698480" cy="914400"/>
-          </a:xfrm>
-          <a:prstGeom prst="rect">
-            <a:avLst/>
-          </a:prstGeom>
-          <a:noFill/>
-        </p:spPr>
-        <p:txBody>
-          <a:bodyPr wrap="square" lIns="0" tIns="0" rIns="0" bIns="0">
-            <a:spAutoFit/>
-          </a:bodyPr>
-          <a:lstStyle/>
-          <a:p>
-            <a:pPr>
-              <a:defRPr sz="1000" b="1">
-                <a:solidFill>
-                  <a:srgbClr val="48CAE4"/>
-                </a:solidFill>
-              </a:defRPr>
-            </a:pPr>
-            <a:r>
-              <a:t>BRANCH NETWORK</a:t>
-            </a:r>
-          </a:p>
-          <a:p>
-            <a:pPr>
-              <a:defRPr sz="2200" b="1">
-                <a:solidFill>
-                  <a:srgbClr val="FFFFFF"/>
-                </a:solidFill>
-              </a:defRPr>
-            </a:pPr>
-            <a:r>
-              <a:t>Regional Governance: Geographic Risk Concentration</a:t>
-            </a:r>
-          </a:p>
-        </p:txBody>
-      </p:sp>
-      <p:sp>
-        <p:nvSpPr>
-          <p:cNvPr id="3" name="Rectangle 2"/>
-          <p:cNvSpPr/>
-          <p:nvPr/>
-        </p:nvSpPr>
-        <p:spPr>
-          <a:xfrm>
-            <a:off x="731520" y="1645920"/>
-            <a:ext cx="10698480" cy="4389120"/>
-          </a:xfrm>
-          <a:prstGeom prst="rect">
-            <a:avLst/>
-          </a:prstGeom>
-          <a:solidFill>
-            <a:srgbClr val="1C2541"/>
-          </a:solidFill>
-          <a:ln>
-            <a:noFill/>
-          </a:ln>
-        </p:spPr>
-        <p:style>
-          <a:lnRef idx="1">
-            <a:schemeClr val="accent1"/>
-          </a:lnRef>
-          <a:fillRef idx="3">
-            <a:schemeClr val="accent1"/>
-          </a:fillRef>
-          <a:effectRef idx="2">
-            <a:schemeClr val="accent1"/>
-          </a:effectRef>
-          <a:fontRef idx="minor">
-            <a:schemeClr val="lt1"/>
-          </a:fontRef>
-        </p:style>
-        <p:txBody>
-          <a:bodyPr rtlCol="0" anchor="ctr"/>
-          <a:lstStyle/>
-          <a:p>
-            <a:pPr algn="ctr"/>
-          </a:p>
-        </p:txBody>
-      </p:sp>
-      <p:sp>
-        <p:nvSpPr>
-          <p:cNvPr id="4" name="TextBox 3"/>
-          <p:cNvSpPr txBox="1"/>
-          <p:nvPr/>
-        </p:nvSpPr>
-        <p:spPr>
-          <a:xfrm>
-            <a:off x="1005840" y="1828800"/>
-            <a:ext cx="10149840" cy="4023360"/>
-          </a:xfrm>
-          <a:prstGeom prst="rect">
-            <a:avLst/>
-          </a:prstGeom>
-          <a:noFill/>
-        </p:spPr>
-        <p:txBody>
-          <a:bodyPr wrap="square">
-            <a:spAutoFit/>
-          </a:bodyPr>
-          <a:lstStyle/>
-          <a:p>
-            <a:pPr>
-              <a:defRPr sz="1500" b="1">
-                <a:solidFill>
-                  <a:srgbClr val="FFFFFF"/>
-                </a:solidFill>
-              </a:defRPr>
-            </a:pPr>
-            <a:r>
-              <a:t>Top 5 Branch Hotspots Account for 38% of At-Risk Deposits [DERIVED]</a:t>
-            </a:r>
-          </a:p>
-          <a:p>
-            <a:br/>
-            <a:pPr>
-              <a:defRPr sz="1100">
-                <a:solidFill>
-                  <a:srgbClr val="A0AEC0"/>
-                </a:solidFill>
-              </a:defRPr>
-            </a:pPr>
-            <a:r>
-              <a:t>• Branch BR-104 (Metropolitan Commercial Hub): 340 Customers | Total Deposits: ₹112.5 Cr | Balance at Risk: ₹34.8 Cr (30.9% risk rate). Driven by Wealth tier outflow and digital friction.</a:t>
-            </a:r>
-          </a:p>
-          <a:p>
-            <a:br/>
-            <a:pPr>
-              <a:defRPr sz="1100">
-                <a:solidFill>
-                  <a:srgbClr val="A0AEC0"/>
-                </a:solidFill>
-              </a:defRPr>
-            </a:pPr>
-            <a:r>
-              <a:t>• Branch BR-112 (Suburban Retail Center): 410 Customers | Total Deposits: ₹94.2 Cr | Balance at Risk: ₹28.4 Cr (30.1% risk rate). Driven by high service TAT (average 16.2 days) and fee disputes.</a:t>
-            </a:r>
-          </a:p>
-          <a:p>
-            <a:br/>
-            <a:pPr>
-              <a:defRPr sz="1100">
-                <a:solidFill>
-                  <a:srgbClr val="A0AEC0"/>
-                </a:solidFill>
-              </a:defRPr>
-            </a:pPr>
-            <a:r>
-              <a:t>• Branch BR-108: 380 Customers | Total Deposits: ₹88.1 Cr | Balance at Risk: ₹24.6 Cr. High concentration of credit-stressed retail borrowers (NPA cluster).</a:t>
-            </a:r>
-          </a:p>
-          <a:p>
-            <a:br/>
-            <a:pPr>
-              <a:defRPr sz="1100">
-                <a:solidFill>
-                  <a:srgbClr val="A0AEC0"/>
-                </a:solidFill>
-              </a:defRPr>
-            </a:pPr>
-            <a:r>
-              <a:t>• Branch BR-121: 295 Customers | Total Deposits: ₹76.4 Cr | Balance at Risk: ₹22.1 Cr. Primary issue: pending KYC documentation causing account freeze frustrations.</a:t>
-            </a:r>
-          </a:p>
-          <a:p>
-            <a:br/>
-            <a:pPr>
-              <a:defRPr sz="1100">
-                <a:solidFill>
-                  <a:srgbClr val="A0AEC0"/>
-                </a:solidFill>
-              </a:defRPr>
-            </a:pPr>
-            <a:r>
-              <a:t>• Branch BR-115: 350 Customers | Total Deposits: ₹71.0 Cr | Balance at Risk: ₹19.8 Cr. High mobile banking complaint density.</a:t>
-            </a:r>
-          </a:p>
-          <a:p>
-            <a:br/>
-            <a:pPr>
-              <a:defRPr sz="1100">
-                <a:solidFill>
-                  <a:srgbClr val="A0AEC0"/>
-                </a:solidFill>
-              </a:defRPr>
-            </a:pPr>
-            <a:r>
-              <a:t>• Governance Mandate [RECOMMENDED]: Regional directors must not issue generic churn targets. Branch Managers at BR-104 and BR-112 require dedicated retention taskforces and dedicated service resolution liaisons.</a:t>
             </a:r>
           </a:p>
         </p:txBody>
